--- a/S1-CL2-Cloud-Disaster-Recovery/delivery/topic_02/Topic_02_Slides.pptx
+++ b/S1-CL2-Cloud-Disaster-Recovery/delivery/topic_02/Topic_02_Slides.pptx
@@ -3387,7 +3387,7 @@
           <a:noFill/>
         </p:spPr>
         <p:txBody>
-          <a:bodyPr wrap="square" anchor="t" lIns="0" rIns="0" tIns="0" bIns="0">
+          <a:bodyPr wrap="square" anchor="ctr" lIns="0" rIns="0" tIns="0" bIns="0">
             <a:spAutoFit/>
           </a:bodyPr>
           <a:lstStyle/>
@@ -3404,7 +3404,7 @@
               </a:spcAft>
             </a:pPr>
             <a:r>
-              <a:rPr sz="1800" b="1" i="0">
+              <a:rPr sz="2400" b="1" i="0">
                 <a:solidFill>
                   <a:srgbClr val="EDAB0C"/>
                 </a:solidFill>
@@ -3413,7 +3413,7 @@
               <a:t>■  </a:t>
             </a:r>
             <a:r>
-              <a:rPr sz="1800" b="0" i="0">
+              <a:rPr sz="2400" b="0" i="0">
                 <a:solidFill>
                   <a:srgbClr val="2A2929"/>
                 </a:solidFill>
@@ -3435,7 +3435,7 @@
               </a:spcAft>
             </a:pPr>
             <a:r>
-              <a:rPr sz="1800" b="1" i="0">
+              <a:rPr sz="2400" b="1" i="0">
                 <a:solidFill>
                   <a:srgbClr val="EDAB0C"/>
                 </a:solidFill>
@@ -3444,7 +3444,7 @@
               <a:t>■  </a:t>
             </a:r>
             <a:r>
-              <a:rPr sz="1800" b="0" i="0">
+              <a:rPr sz="2400" b="0" i="0">
                 <a:solidFill>
                   <a:srgbClr val="2A2929"/>
                 </a:solidFill>
@@ -3466,7 +3466,7 @@
               </a:spcAft>
             </a:pPr>
             <a:r>
-              <a:rPr sz="1800" b="1" i="0">
+              <a:rPr sz="2400" b="1" i="0">
                 <a:solidFill>
                   <a:srgbClr val="EDAB0C"/>
                 </a:solidFill>
@@ -3475,7 +3475,7 @@
               <a:t>■  </a:t>
             </a:r>
             <a:r>
-              <a:rPr sz="1800" b="0" i="0">
+              <a:rPr sz="2400" b="0" i="0">
                 <a:solidFill>
                   <a:srgbClr val="2A2929"/>
                 </a:solidFill>
@@ -3497,7 +3497,7 @@
               </a:spcAft>
             </a:pPr>
             <a:r>
-              <a:rPr sz="1800" b="1" i="0">
+              <a:rPr sz="2400" b="1" i="0">
                 <a:solidFill>
                   <a:srgbClr val="EDAB0C"/>
                 </a:solidFill>
@@ -3506,7 +3506,7 @@
               <a:t>■  </a:t>
             </a:r>
             <a:r>
-              <a:rPr sz="1800" b="0" i="0">
+              <a:rPr sz="2400" b="0" i="0">
                 <a:solidFill>
                   <a:srgbClr val="2A2929"/>
                 </a:solidFill>
@@ -4496,7 +4496,7 @@
           <a:noFill/>
         </p:spPr>
         <p:txBody>
-          <a:bodyPr wrap="square" anchor="t" lIns="0" rIns="0" tIns="0" bIns="0">
+          <a:bodyPr wrap="square" anchor="ctr" lIns="0" rIns="0" tIns="0" bIns="0">
             <a:spAutoFit/>
           </a:bodyPr>
           <a:lstStyle/>
@@ -4513,7 +4513,7 @@
               </a:spcAft>
             </a:pPr>
             <a:r>
-              <a:rPr sz="1800" b="1" i="0">
+              <a:rPr sz="2400" b="1" i="0">
                 <a:solidFill>
                   <a:srgbClr val="EDAB0C"/>
                 </a:solidFill>
@@ -4522,7 +4522,7 @@
               <a:t>■  </a:t>
             </a:r>
             <a:r>
-              <a:rPr sz="1800" b="0" i="0">
+              <a:rPr sz="2400" b="0" i="0">
                 <a:solidFill>
                   <a:srgbClr val="2A2929"/>
                 </a:solidFill>
@@ -4544,7 +4544,7 @@
               </a:spcAft>
             </a:pPr>
             <a:r>
-              <a:rPr sz="1800" b="1" i="0">
+              <a:rPr sz="2400" b="1" i="0">
                 <a:solidFill>
                   <a:srgbClr val="EDAB0C"/>
                 </a:solidFill>
@@ -4553,7 +4553,7 @@
               <a:t>■  </a:t>
             </a:r>
             <a:r>
-              <a:rPr sz="1800" b="0" i="0">
+              <a:rPr sz="2400" b="0" i="0">
                 <a:solidFill>
                   <a:srgbClr val="2A2929"/>
                 </a:solidFill>
@@ -4575,7 +4575,7 @@
               </a:spcAft>
             </a:pPr>
             <a:r>
-              <a:rPr sz="1800" b="1" i="0">
+              <a:rPr sz="2400" b="1" i="0">
                 <a:solidFill>
                   <a:srgbClr val="EDAB0C"/>
                 </a:solidFill>
@@ -4584,7 +4584,7 @@
               <a:t>■  </a:t>
             </a:r>
             <a:r>
-              <a:rPr sz="1800" b="0" i="0">
+              <a:rPr sz="2400" b="0" i="0">
                 <a:solidFill>
                   <a:srgbClr val="2A2929"/>
                 </a:solidFill>
@@ -5204,7 +5204,7 @@
           <a:noFill/>
         </p:spPr>
         <p:txBody>
-          <a:bodyPr wrap="square" anchor="t" lIns="0" rIns="0" tIns="0" bIns="0">
+          <a:bodyPr wrap="square" anchor="ctr" lIns="0" rIns="0" tIns="0" bIns="0">
             <a:spAutoFit/>
           </a:bodyPr>
           <a:lstStyle/>
@@ -5221,7 +5221,7 @@
               </a:spcAft>
             </a:pPr>
             <a:r>
-              <a:rPr sz="1800" b="1" i="0">
+              <a:rPr sz="2400" b="1" i="0">
                 <a:solidFill>
                   <a:srgbClr val="EDAB0C"/>
                 </a:solidFill>
@@ -5230,7 +5230,7 @@
               <a:t>■  </a:t>
             </a:r>
             <a:r>
-              <a:rPr sz="1800" b="0" i="0">
+              <a:rPr sz="2400" b="0" i="0">
                 <a:solidFill>
                   <a:srgbClr val="2A2929"/>
                 </a:solidFill>
@@ -5252,7 +5252,7 @@
               </a:spcAft>
             </a:pPr>
             <a:r>
-              <a:rPr sz="1800" b="1" i="0">
+              <a:rPr sz="2400" b="1" i="0">
                 <a:solidFill>
                   <a:srgbClr val="EDAB0C"/>
                 </a:solidFill>
@@ -5261,7 +5261,7 @@
               <a:t>■  </a:t>
             </a:r>
             <a:r>
-              <a:rPr sz="1800" b="0" i="0">
+              <a:rPr sz="2400" b="0" i="0">
                 <a:solidFill>
                   <a:srgbClr val="2A2929"/>
                 </a:solidFill>
@@ -5283,7 +5283,7 @@
               </a:spcAft>
             </a:pPr>
             <a:r>
-              <a:rPr sz="1800" b="1" i="0">
+              <a:rPr sz="2400" b="1" i="0">
                 <a:solidFill>
                   <a:srgbClr val="EDAB0C"/>
                 </a:solidFill>
@@ -5292,7 +5292,7 @@
               <a:t>■  </a:t>
             </a:r>
             <a:r>
-              <a:rPr sz="1800" b="0" i="0">
+              <a:rPr sz="2400" b="0" i="0">
                 <a:solidFill>
                   <a:srgbClr val="2A2929"/>
                 </a:solidFill>
@@ -7579,7 +7579,7 @@
           <a:noFill/>
         </p:spPr>
         <p:txBody>
-          <a:bodyPr wrap="square" anchor="t" lIns="0" rIns="0" tIns="0" bIns="0">
+          <a:bodyPr wrap="square" anchor="ctr" lIns="0" rIns="0" tIns="0" bIns="0">
             <a:spAutoFit/>
           </a:bodyPr>
           <a:lstStyle/>
@@ -7596,7 +7596,7 @@
               </a:spcAft>
             </a:pPr>
             <a:r>
-              <a:rPr sz="1800" b="1" i="0">
+              <a:rPr sz="2400" b="1" i="0">
                 <a:solidFill>
                   <a:srgbClr val="EDAB0C"/>
                 </a:solidFill>
@@ -7605,7 +7605,7 @@
               <a:t>■  </a:t>
             </a:r>
             <a:r>
-              <a:rPr sz="1800" b="0" i="0">
+              <a:rPr sz="2400" b="0" i="0">
                 <a:solidFill>
                   <a:srgbClr val="2A2929"/>
                 </a:solidFill>
@@ -7627,7 +7627,7 @@
               </a:spcAft>
             </a:pPr>
             <a:r>
-              <a:rPr sz="1800" b="1" i="0">
+              <a:rPr sz="2400" b="1" i="0">
                 <a:solidFill>
                   <a:srgbClr val="EDAB0C"/>
                 </a:solidFill>
@@ -7636,7 +7636,7 @@
               <a:t>■  </a:t>
             </a:r>
             <a:r>
-              <a:rPr sz="1800" b="0" i="0">
+              <a:rPr sz="2400" b="0" i="0">
                 <a:solidFill>
                   <a:srgbClr val="2A2929"/>
                 </a:solidFill>
@@ -7658,7 +7658,7 @@
               </a:spcAft>
             </a:pPr>
             <a:r>
-              <a:rPr sz="1800" b="1" i="0">
+              <a:rPr sz="2400" b="1" i="0">
                 <a:solidFill>
                   <a:srgbClr val="EDAB0C"/>
                 </a:solidFill>
@@ -7667,7 +7667,7 @@
               <a:t>■  </a:t>
             </a:r>
             <a:r>
-              <a:rPr sz="1800" b="0" i="0">
+              <a:rPr sz="2400" b="0" i="0">
                 <a:solidFill>
                   <a:srgbClr val="2A2929"/>
                 </a:solidFill>
@@ -7921,7 +7921,7 @@
           <a:noFill/>
         </p:spPr>
         <p:txBody>
-          <a:bodyPr wrap="square" anchor="t" lIns="0" rIns="0" tIns="0" bIns="0">
+          <a:bodyPr wrap="square" anchor="ctr" lIns="0" rIns="0" tIns="0" bIns="0">
             <a:spAutoFit/>
           </a:bodyPr>
           <a:lstStyle/>
@@ -7938,7 +7938,7 @@
               </a:spcAft>
             </a:pPr>
             <a:r>
-              <a:rPr sz="1800" b="1" i="0">
+              <a:rPr sz="2400" b="1" i="0">
                 <a:solidFill>
                   <a:srgbClr val="EDAB0C"/>
                 </a:solidFill>
@@ -7947,7 +7947,7 @@
               <a:t>■  </a:t>
             </a:r>
             <a:r>
-              <a:rPr sz="1800" b="0" i="0">
+              <a:rPr sz="2400" b="0" i="0">
                 <a:solidFill>
                   <a:srgbClr val="2A2929"/>
                 </a:solidFill>
@@ -7969,7 +7969,7 @@
               </a:spcAft>
             </a:pPr>
             <a:r>
-              <a:rPr sz="1800" b="1" i="0">
+              <a:rPr sz="2400" b="1" i="0">
                 <a:solidFill>
                   <a:srgbClr val="EDAB0C"/>
                 </a:solidFill>
@@ -7978,7 +7978,7 @@
               <a:t>■  </a:t>
             </a:r>
             <a:r>
-              <a:rPr sz="1800" b="0" i="0">
+              <a:rPr sz="2400" b="0" i="0">
                 <a:solidFill>
                   <a:srgbClr val="2A2929"/>
                 </a:solidFill>
@@ -8000,7 +8000,7 @@
               </a:spcAft>
             </a:pPr>
             <a:r>
-              <a:rPr sz="1800" b="1" i="0">
+              <a:rPr sz="2400" b="1" i="0">
                 <a:solidFill>
                   <a:srgbClr val="EDAB0C"/>
                 </a:solidFill>
@@ -8009,7 +8009,7 @@
               <a:t>■  </a:t>
             </a:r>
             <a:r>
-              <a:rPr sz="1800" b="0" i="0">
+              <a:rPr sz="2400" b="0" i="0">
                 <a:solidFill>
                   <a:srgbClr val="2A2929"/>
                 </a:solidFill>
@@ -8263,7 +8263,7 @@
           <a:noFill/>
         </p:spPr>
         <p:txBody>
-          <a:bodyPr wrap="square" anchor="t" lIns="0" rIns="0" tIns="0" bIns="0">
+          <a:bodyPr wrap="square" anchor="ctr" lIns="0" rIns="0" tIns="0" bIns="0">
             <a:spAutoFit/>
           </a:bodyPr>
           <a:lstStyle/>
@@ -8280,7 +8280,7 @@
               </a:spcAft>
             </a:pPr>
             <a:r>
-              <a:rPr sz="1800" b="1" i="0">
+              <a:rPr sz="2400" b="1" i="0">
                 <a:solidFill>
                   <a:srgbClr val="EDAB0C"/>
                 </a:solidFill>
@@ -8289,7 +8289,7 @@
               <a:t>■  </a:t>
             </a:r>
             <a:r>
-              <a:rPr sz="1800" b="0" i="0">
+              <a:rPr sz="2400" b="0" i="0">
                 <a:solidFill>
                   <a:srgbClr val="2A2929"/>
                 </a:solidFill>
@@ -8311,7 +8311,7 @@
               </a:spcAft>
             </a:pPr>
             <a:r>
-              <a:rPr sz="1800" b="1" i="0">
+              <a:rPr sz="2400" b="1" i="0">
                 <a:solidFill>
                   <a:srgbClr val="EDAB0C"/>
                 </a:solidFill>
@@ -8320,7 +8320,7 @@
               <a:t>■  </a:t>
             </a:r>
             <a:r>
-              <a:rPr sz="1800" b="0" i="0">
+              <a:rPr sz="2400" b="0" i="0">
                 <a:solidFill>
                   <a:srgbClr val="2A2929"/>
                 </a:solidFill>
@@ -8342,7 +8342,7 @@
               </a:spcAft>
             </a:pPr>
             <a:r>
-              <a:rPr sz="1800" b="1" i="0">
+              <a:rPr sz="2400" b="1" i="0">
                 <a:solidFill>
                   <a:srgbClr val="EDAB0C"/>
                 </a:solidFill>
@@ -8351,7 +8351,7 @@
               <a:t>■  </a:t>
             </a:r>
             <a:r>
-              <a:rPr sz="1800" b="0" i="0">
+              <a:rPr sz="2400" b="0" i="0">
                 <a:solidFill>
                   <a:srgbClr val="2A2929"/>
                 </a:solidFill>
@@ -9341,7 +9341,7 @@
           <a:noFill/>
         </p:spPr>
         <p:txBody>
-          <a:bodyPr wrap="square" anchor="t" lIns="0" rIns="0" tIns="0" bIns="0">
+          <a:bodyPr wrap="square" anchor="ctr" lIns="0" rIns="0" tIns="0" bIns="0">
             <a:spAutoFit/>
           </a:bodyPr>
           <a:lstStyle/>
@@ -9358,7 +9358,7 @@
               </a:spcAft>
             </a:pPr>
             <a:r>
-              <a:rPr sz="1800" b="1" i="0">
+              <a:rPr sz="2400" b="1" i="0">
                 <a:solidFill>
                   <a:srgbClr val="EDAB0C"/>
                 </a:solidFill>
@@ -9367,7 +9367,7 @@
               <a:t>■  </a:t>
             </a:r>
             <a:r>
-              <a:rPr sz="1800" b="0" i="0">
+              <a:rPr sz="2400" b="0" i="0">
                 <a:solidFill>
                   <a:srgbClr val="2A2929"/>
                 </a:solidFill>
@@ -9389,7 +9389,7 @@
               </a:spcAft>
             </a:pPr>
             <a:r>
-              <a:rPr sz="1800" b="1" i="0">
+              <a:rPr sz="2400" b="1" i="0">
                 <a:solidFill>
                   <a:srgbClr val="EDAB0C"/>
                 </a:solidFill>
@@ -9398,7 +9398,7 @@
               <a:t>■  </a:t>
             </a:r>
             <a:r>
-              <a:rPr sz="1800" b="0" i="0">
+              <a:rPr sz="2400" b="0" i="0">
                 <a:solidFill>
                   <a:srgbClr val="2A2929"/>
                 </a:solidFill>
@@ -9420,7 +9420,7 @@
               </a:spcAft>
             </a:pPr>
             <a:r>
-              <a:rPr sz="1800" b="1" i="0">
+              <a:rPr sz="2400" b="1" i="0">
                 <a:solidFill>
                   <a:srgbClr val="EDAB0C"/>
                 </a:solidFill>
@@ -9429,7 +9429,7 @@
               <a:t>■  </a:t>
             </a:r>
             <a:r>
-              <a:rPr sz="1800" b="0" i="0">
+              <a:rPr sz="2400" b="0" i="0">
                 <a:solidFill>
                   <a:srgbClr val="2A2929"/>
                 </a:solidFill>
@@ -9451,7 +9451,7 @@
               </a:spcAft>
             </a:pPr>
             <a:r>
-              <a:rPr sz="1800" b="1" i="0">
+              <a:rPr sz="2400" b="1" i="0">
                 <a:solidFill>
                   <a:srgbClr val="EDAB0C"/>
                 </a:solidFill>
@@ -9460,7 +9460,7 @@
               <a:t>■  </a:t>
             </a:r>
             <a:r>
-              <a:rPr sz="1800" b="0" i="0">
+              <a:rPr sz="2400" b="0" i="0">
                 <a:solidFill>
                   <a:srgbClr val="2A2929"/>
                 </a:solidFill>

--- a/S1-CL2-Cloud-Disaster-Recovery/delivery/topic_02/Topic_02_Slides.pptx
+++ b/S1-CL2-Cloud-Disaster-Recovery/delivery/topic_02/Topic_02_Slides.pptx
@@ -7,22 +7,22 @@
   <p:sldIdLst>
     <p:sldId id="256" r:id="rId7"/>
     <p:sldId id="257" r:id="rId8"/>
-    <p:sldId id="258" r:id="rId9"/>
-    <p:sldId id="259" r:id="rId10"/>
-    <p:sldId id="260" r:id="rId11"/>
-    <p:sldId id="261" r:id="rId12"/>
-    <p:sldId id="262" r:id="rId13"/>
-    <p:sldId id="263" r:id="rId14"/>
-    <p:sldId id="264" r:id="rId15"/>
-    <p:sldId id="265" r:id="rId16"/>
-    <p:sldId id="266" r:id="rId17"/>
-    <p:sldId id="267" r:id="rId18"/>
-    <p:sldId id="268" r:id="rId19"/>
-    <p:sldId id="269" r:id="rId20"/>
-    <p:sldId id="270" r:id="rId21"/>
-    <p:sldId id="271" r:id="rId22"/>
-    <p:sldId id="272" r:id="rId23"/>
-    <p:sldId id="273" r:id="rId24"/>
+    <p:sldId id="258" r:id="rId10"/>
+    <p:sldId id="259" r:id="rId11"/>
+    <p:sldId id="260" r:id="rId12"/>
+    <p:sldId id="261" r:id="rId13"/>
+    <p:sldId id="262" r:id="rId14"/>
+    <p:sldId id="263" r:id="rId15"/>
+    <p:sldId id="264" r:id="rId16"/>
+    <p:sldId id="265" r:id="rId17"/>
+    <p:sldId id="266" r:id="rId18"/>
+    <p:sldId id="267" r:id="rId19"/>
+    <p:sldId id="268" r:id="rId20"/>
+    <p:sldId id="269" r:id="rId21"/>
+    <p:sldId id="270" r:id="rId22"/>
+    <p:sldId id="271" r:id="rId23"/>
+    <p:sldId id="272" r:id="rId24"/>
+    <p:sldId id="273" r:id="rId25"/>
   </p:sldIdLst>
   <p:sldSz cx="12191695" cy="6858000" type="screen4x3"/>
   <p:notesSz cx="6858000" cy="9144000"/>
@@ -122,6 +122,1636 @@
     </a:lvl9pPr>
   </p:defaultTextStyle>
 </p:presentation>
+</file>
+
+<file path=ppt/notesMasters/notesMaster1.xml><?xml version="1.0" encoding="utf-8"?>
+<p:notesMaster xmlns:a="http://schemas.openxmlformats.org/drawingml/2006/main" xmlns:p="http://schemas.openxmlformats.org/presentationml/2006/main" xmlns:r="http://schemas.openxmlformats.org/officeDocument/2006/relationships">
+  <p:cSld>
+    <p:bg>
+      <p:bgRef idx="1001">
+        <a:schemeClr val="bg1"/>
+      </p:bgRef>
+    </p:bg>
+    <p:spTree>
+      <p:nvGrpSpPr>
+        <p:cNvPr id="1" name=""/>
+        <p:cNvGrpSpPr/>
+        <p:nvPr/>
+      </p:nvGrpSpPr>
+      <p:grpSpPr>
+        <a:xfrm>
+          <a:off x="0" y="0"/>
+          <a:ext cx="0" cy="0"/>
+          <a:chOff x="0" y="0"/>
+          <a:chExt cx="0" cy="0"/>
+        </a:xfrm>
+      </p:grpSpPr>
+      <p:sp>
+        <p:nvSpPr>
+          <p:cNvPr id="2" name="Header Placeholder 1"/>
+          <p:cNvSpPr>
+            <a:spLocks noGrp="1"/>
+          </p:cNvSpPr>
+          <p:nvPr>
+            <p:ph type="hdr" sz="quarter"/>
+          </p:nvPr>
+        </p:nvSpPr>
+        <p:spPr>
+          <a:xfrm>
+            <a:off x="0" y="0"/>
+            <a:ext cx="2971800" cy="457200"/>
+          </a:xfrm>
+          <a:prstGeom prst="rect">
+            <a:avLst/>
+          </a:prstGeom>
+        </p:spPr>
+        <p:txBody>
+          <a:bodyPr vert="horz" lIns="91440" tIns="45720" rIns="91440" bIns="45720" rtlCol="0"/>
+          <a:lstStyle>
+            <a:lvl1pPr algn="l">
+              <a:defRPr sz="1200"/>
+            </a:lvl1pPr>
+          </a:lstStyle>
+          <a:p>
+            <a:endParaRPr lang="en-US"/>
+          </a:p>
+        </p:txBody>
+      </p:sp>
+      <p:sp>
+        <p:nvSpPr>
+          <p:cNvPr id="3" name="Date Placeholder 2"/>
+          <p:cNvSpPr>
+            <a:spLocks noGrp="1"/>
+          </p:cNvSpPr>
+          <p:nvPr>
+            <p:ph type="dt" idx="1"/>
+          </p:nvPr>
+        </p:nvSpPr>
+        <p:spPr>
+          <a:xfrm>
+            <a:off x="3884613" y="0"/>
+            <a:ext cx="2971800" cy="457200"/>
+          </a:xfrm>
+          <a:prstGeom prst="rect">
+            <a:avLst/>
+          </a:prstGeom>
+        </p:spPr>
+        <p:txBody>
+          <a:bodyPr vert="horz" lIns="91440" tIns="45720" rIns="91440" bIns="45720" rtlCol="0"/>
+          <a:lstStyle>
+            <a:lvl1pPr algn="r">
+              <a:defRPr sz="1200"/>
+            </a:lvl1pPr>
+          </a:lstStyle>
+          <a:p>
+            <a:fld id="{0F89C1C7-3DCD-1040-A9CF-14679D8B5DDD}" type="datetimeFigureOut">
+              <a:rPr lang="en-US" smtClean="0"/>
+              <a:t>10/17/16</a:t>
+            </a:fld>
+            <a:endParaRPr lang="en-US"/>
+          </a:p>
+        </p:txBody>
+      </p:sp>
+      <p:sp>
+        <p:nvSpPr>
+          <p:cNvPr id="4" name="Slide Image Placeholder 3"/>
+          <p:cNvSpPr>
+            <a:spLocks noGrp="1" noRot="1" noChangeAspect="1"/>
+          </p:cNvSpPr>
+          <p:nvPr>
+            <p:ph type="sldImg" idx="2"/>
+          </p:nvPr>
+        </p:nvSpPr>
+        <p:spPr>
+          <a:xfrm>
+            <a:off x="1143000" y="685800"/>
+            <a:ext cx="4572000" cy="3429000"/>
+          </a:xfrm>
+          <a:prstGeom prst="rect">
+            <a:avLst/>
+          </a:prstGeom>
+          <a:noFill/>
+          <a:ln w="12700">
+            <a:solidFill>
+              <a:prstClr val="black"/>
+            </a:solidFill>
+          </a:ln>
+        </p:spPr>
+        <p:txBody>
+          <a:bodyPr vert="horz" lIns="91440" tIns="45720" rIns="91440" bIns="45720" rtlCol="0" anchor="ctr"/>
+          <a:lstStyle/>
+          <a:p>
+            <a:endParaRPr lang="en-US"/>
+          </a:p>
+        </p:txBody>
+      </p:sp>
+      <p:sp>
+        <p:nvSpPr>
+          <p:cNvPr id="5" name="Notes Placeholder 4"/>
+          <p:cNvSpPr>
+            <a:spLocks noGrp="1"/>
+          </p:cNvSpPr>
+          <p:nvPr>
+            <p:ph type="body" sz="quarter" idx="3"/>
+          </p:nvPr>
+        </p:nvSpPr>
+        <p:spPr>
+          <a:xfrm>
+            <a:off x="685800" y="4343400"/>
+            <a:ext cx="5486400" cy="4114800"/>
+          </a:xfrm>
+          <a:prstGeom prst="rect">
+            <a:avLst/>
+          </a:prstGeom>
+        </p:spPr>
+        <p:txBody>
+          <a:bodyPr vert="horz" lIns="91440" tIns="45720" rIns="91440" bIns="45720" rtlCol="0"/>
+          <a:lstStyle/>
+          <a:p>
+            <a:pPr lvl="0"/>
+            <a:r>
+              <a:rPr lang="en-US" smtClean="0"/>
+              <a:t>Click to edit Master text styles</a:t>
+            </a:r>
+          </a:p>
+          <a:p>
+            <a:pPr lvl="1"/>
+            <a:r>
+              <a:rPr lang="en-US" smtClean="0"/>
+              <a:t>Second level</a:t>
+            </a:r>
+          </a:p>
+          <a:p>
+            <a:pPr lvl="2"/>
+            <a:r>
+              <a:rPr lang="en-US" smtClean="0"/>
+              <a:t>Third level</a:t>
+            </a:r>
+          </a:p>
+          <a:p>
+            <a:pPr lvl="3"/>
+            <a:r>
+              <a:rPr lang="en-US" smtClean="0"/>
+              <a:t>Fourth level</a:t>
+            </a:r>
+          </a:p>
+          <a:p>
+            <a:pPr lvl="4"/>
+            <a:r>
+              <a:rPr lang="en-US" smtClean="0"/>
+              <a:t>Fifth level</a:t>
+            </a:r>
+            <a:endParaRPr lang="en-US"/>
+          </a:p>
+        </p:txBody>
+      </p:sp>
+      <p:sp>
+        <p:nvSpPr>
+          <p:cNvPr id="6" name="Footer Placeholder 5"/>
+          <p:cNvSpPr>
+            <a:spLocks noGrp="1"/>
+          </p:cNvSpPr>
+          <p:nvPr>
+            <p:ph type="ftr" sz="quarter" idx="4"/>
+          </p:nvPr>
+        </p:nvSpPr>
+        <p:spPr>
+          <a:xfrm>
+            <a:off x="0" y="8685213"/>
+            <a:ext cx="2971800" cy="457200"/>
+          </a:xfrm>
+          <a:prstGeom prst="rect">
+            <a:avLst/>
+          </a:prstGeom>
+        </p:spPr>
+        <p:txBody>
+          <a:bodyPr vert="horz" lIns="91440" tIns="45720" rIns="91440" bIns="45720" rtlCol="0" anchor="b"/>
+          <a:lstStyle>
+            <a:lvl1pPr algn="l">
+              <a:defRPr sz="1200"/>
+            </a:lvl1pPr>
+          </a:lstStyle>
+          <a:p>
+            <a:endParaRPr lang="en-US"/>
+          </a:p>
+        </p:txBody>
+      </p:sp>
+      <p:sp>
+        <p:nvSpPr>
+          <p:cNvPr id="7" name="Slide Number Placeholder 6"/>
+          <p:cNvSpPr>
+            <a:spLocks noGrp="1"/>
+          </p:cNvSpPr>
+          <p:nvPr>
+            <p:ph type="sldNum" sz="quarter" idx="5"/>
+          </p:nvPr>
+        </p:nvSpPr>
+        <p:spPr>
+          <a:xfrm>
+            <a:off x="3884613" y="8685213"/>
+            <a:ext cx="2971800" cy="457200"/>
+          </a:xfrm>
+          <a:prstGeom prst="rect">
+            <a:avLst/>
+          </a:prstGeom>
+        </p:spPr>
+        <p:txBody>
+          <a:bodyPr vert="horz" lIns="91440" tIns="45720" rIns="91440" bIns="45720" rtlCol="0" anchor="b"/>
+          <a:lstStyle>
+            <a:lvl1pPr algn="r">
+              <a:defRPr sz="1200"/>
+            </a:lvl1pPr>
+          </a:lstStyle>
+          <a:p>
+            <a:fld id="{BB5E49A5-4136-284D-997B-48E1D791AD67}" type="slidenum">
+              <a:rPr lang="en-US" smtClean="0"/>
+              <a:t>‹#›</a:t>
+            </a:fld>
+            <a:endParaRPr lang="en-US"/>
+          </a:p>
+        </p:txBody>
+      </p:sp>
+    </p:spTree>
+    <p:extLst>
+      <p:ext uri="{BB962C8B-B14F-4D97-AF65-F5344CB8AC3E}">
+        <p14:creationId xmlns:p14="http://schemas.microsoft.com/office/powerpoint/2010/main" val="2623252185"/>
+      </p:ext>
+    </p:extLst>
+  </p:cSld>
+  <p:clrMap bg1="lt1" tx1="dk1" bg2="lt2" tx2="dk2" accent1="accent1" accent2="accent2" accent3="accent3" accent4="accent4" accent5="accent5" accent6="accent6" hlink="hlink" folHlink="folHlink"/>
+  <p:notesStyle>
+    <a:lvl1pPr marL="0" algn="l" defTabSz="457200" rtl="0" eaLnBrk="1" latinLnBrk="0" hangingPunct="1">
+      <a:defRPr sz="1200" kern="1200">
+        <a:solidFill>
+          <a:schemeClr val="tx1"/>
+        </a:solidFill>
+        <a:latin typeface="+mn-lt"/>
+        <a:ea typeface="+mn-ea"/>
+        <a:cs typeface="+mn-cs"/>
+      </a:defRPr>
+    </a:lvl1pPr>
+    <a:lvl2pPr marL="457200" algn="l" defTabSz="457200" rtl="0" eaLnBrk="1" latinLnBrk="0" hangingPunct="1">
+      <a:defRPr sz="1200" kern="1200">
+        <a:solidFill>
+          <a:schemeClr val="tx1"/>
+        </a:solidFill>
+        <a:latin typeface="+mn-lt"/>
+        <a:ea typeface="+mn-ea"/>
+        <a:cs typeface="+mn-cs"/>
+      </a:defRPr>
+    </a:lvl2pPr>
+    <a:lvl3pPr marL="914400" algn="l" defTabSz="457200" rtl="0" eaLnBrk="1" latinLnBrk="0" hangingPunct="1">
+      <a:defRPr sz="1200" kern="1200">
+        <a:solidFill>
+          <a:schemeClr val="tx1"/>
+        </a:solidFill>
+        <a:latin typeface="+mn-lt"/>
+        <a:ea typeface="+mn-ea"/>
+        <a:cs typeface="+mn-cs"/>
+      </a:defRPr>
+    </a:lvl3pPr>
+    <a:lvl4pPr marL="1371600" algn="l" defTabSz="457200" rtl="0" eaLnBrk="1" latinLnBrk="0" hangingPunct="1">
+      <a:defRPr sz="1200" kern="1200">
+        <a:solidFill>
+          <a:schemeClr val="tx1"/>
+        </a:solidFill>
+        <a:latin typeface="+mn-lt"/>
+        <a:ea typeface="+mn-ea"/>
+        <a:cs typeface="+mn-cs"/>
+      </a:defRPr>
+    </a:lvl4pPr>
+    <a:lvl5pPr marL="1828800" algn="l" defTabSz="457200" rtl="0" eaLnBrk="1" latinLnBrk="0" hangingPunct="1">
+      <a:defRPr sz="1200" kern="1200">
+        <a:solidFill>
+          <a:schemeClr val="tx1"/>
+        </a:solidFill>
+        <a:latin typeface="+mn-lt"/>
+        <a:ea typeface="+mn-ea"/>
+        <a:cs typeface="+mn-cs"/>
+      </a:defRPr>
+    </a:lvl5pPr>
+    <a:lvl6pPr marL="2286000" algn="l" defTabSz="457200" rtl="0" eaLnBrk="1" latinLnBrk="0" hangingPunct="1">
+      <a:defRPr sz="1200" kern="1200">
+        <a:solidFill>
+          <a:schemeClr val="tx1"/>
+        </a:solidFill>
+        <a:latin typeface="+mn-lt"/>
+        <a:ea typeface="+mn-ea"/>
+        <a:cs typeface="+mn-cs"/>
+      </a:defRPr>
+    </a:lvl6pPr>
+    <a:lvl7pPr marL="2743200" algn="l" defTabSz="457200" rtl="0" eaLnBrk="1" latinLnBrk="0" hangingPunct="1">
+      <a:defRPr sz="1200" kern="1200">
+        <a:solidFill>
+          <a:schemeClr val="tx1"/>
+        </a:solidFill>
+        <a:latin typeface="+mn-lt"/>
+        <a:ea typeface="+mn-ea"/>
+        <a:cs typeface="+mn-cs"/>
+      </a:defRPr>
+    </a:lvl7pPr>
+    <a:lvl8pPr marL="3200400" algn="l" defTabSz="457200" rtl="0" eaLnBrk="1" latinLnBrk="0" hangingPunct="1">
+      <a:defRPr sz="1200" kern="1200">
+        <a:solidFill>
+          <a:schemeClr val="tx1"/>
+        </a:solidFill>
+        <a:latin typeface="+mn-lt"/>
+        <a:ea typeface="+mn-ea"/>
+        <a:cs typeface="+mn-cs"/>
+      </a:defRPr>
+    </a:lvl8pPr>
+    <a:lvl9pPr marL="3657600" algn="l" defTabSz="457200" rtl="0" eaLnBrk="1" latinLnBrk="0" hangingPunct="1">
+      <a:defRPr sz="1200" kern="1200">
+        <a:solidFill>
+          <a:schemeClr val="tx1"/>
+        </a:solidFill>
+        <a:latin typeface="+mn-lt"/>
+        <a:ea typeface="+mn-ea"/>
+        <a:cs typeface="+mn-cs"/>
+      </a:defRPr>
+    </a:lvl9pPr>
+  </p:notesStyle>
+</p:notesMaster>
+</file>
+
+<file path=ppt/notesSlides/notesSlide1.xml><?xml version="1.0" encoding="utf-8"?>
+<p:notes xmlns:a="http://schemas.openxmlformats.org/drawingml/2006/main" xmlns:p="http://schemas.openxmlformats.org/presentationml/2006/main" xmlns:r="http://schemas.openxmlformats.org/officeDocument/2006/relationships">
+  <p:cSld>
+    <p:spTree>
+      <p:nvGrpSpPr>
+        <p:cNvPr id="1" name=""/>
+        <p:cNvGrpSpPr/>
+        <p:nvPr/>
+      </p:nvGrpSpPr>
+      <p:grpSpPr>
+        <a:xfrm>
+          <a:off x="0" y="0"/>
+          <a:ext cx="0" cy="0"/>
+          <a:chOff x="0" y="0"/>
+          <a:chExt cx="0" cy="0"/>
+        </a:xfrm>
+      </p:grpSpPr>
+      <p:sp>
+        <p:nvSpPr>
+          <p:cNvPr id="2" name="Slide Image Placeholder 1"/>
+          <p:cNvSpPr>
+            <a:spLocks noGrp="1"/>
+          </p:cNvSpPr>
+          <p:nvPr>
+            <p:ph type="sldImg" idx="2"/>
+          </p:nvPr>
+        </p:nvSpPr>
+        <p:spPr/>
+      </p:sp>
+      <p:sp>
+        <p:nvSpPr>
+          <p:cNvPr id="3" name="Notes Placeholder 2"/>
+          <p:cNvSpPr>
+            <a:spLocks noGrp="1"/>
+          </p:cNvSpPr>
+          <p:nvPr>
+            <p:ph type="body" idx="3" sz="quarter"/>
+          </p:nvPr>
+        </p:nvSpPr>
+        <p:spPr/>
+        <p:txBody>
+          <a:bodyPr/>
+          <a:lstStyle/>
+          <a:p>
+            <a:r>
+              <a:t>Frame the Topic as the second design half — the microservice that plugs into Topic 1's web-scale site. Set the job and the boundary; don't teach serverless yet.</a:t>
+            </a:r>
+          </a:p>
+          <a:p>
+            <a:r>
+              <a:t>• First bullet: callback to Topic 1 — they designed the web-scale site; today they design the serverless audit-log MICROSERVICE that plugs into it. Two halves of one Solution Design (AT1 Part A).</a:t>
+            </a:r>
+          </a:p>
+          <a:p>
+            <a:r>
+              <a:t>• Second bullet: name the microservice's reason to exist — it records India-cohort access events to a RESIDENCY-COMPLIANT store. This is the localisation hook straight from the requirements, not an add-on.</a:t>
+            </a:r>
+          </a:p>
+          <a:p>
+            <a:r>
+              <a:t>• Third bullet: define serverless plainly — no servers to manage, event-driven, scales with demand, pay per request. Stress "event-driven": the site emits events, the service reacts.</a:t>
+            </a:r>
+          </a:p>
+          <a:p>
+            <a:r>
+              <a:t>• Hold the boundary (last bullet): DESIGN ONLY, to the supplied requirements — the build is AT2 (Topic 8). On paper today.</a:t>
+            </a:r>
+          </a:p>
+          <a:p>
+            <a:r>
+              <a:t>Misconception to pre-empt: "serverless means there are no servers." No — there are servers; YOU just don't manage or provision them. The shift is operational responsibility, not physics.</a:t>
+            </a:r>
+          </a:p>
+          <a:p>
+            <a:r>
+              <a:t>Question to pose: "The website already works — why build a SEPARATE service just to record access events?" (single responsibility, independent scale, and a residency-resident store the site itself needn't host).</a:t>
+            </a:r>
+          </a:p>
+          <a:p>
+            <a:r>
+              <a:t>UoC/AT1 tie: this Topic develops [ICTCLD503 PC 2.1]–[ICTCLD503 PC 2.3] plus [ICTCLD503 PE 2] and [ICTCLD503 KE 4], evidenced in AT1 Part A (Solution Design, microservice sections) and the Part A KE appendix.</a:t>
+            </a:r>
+          </a:p>
+        </p:txBody>
+      </p:sp>
+      <p:sp>
+        <p:nvSpPr>
+          <p:cNvPr id="4" name="Slide Number Placeholder 3"/>
+          <p:cNvSpPr>
+            <a:spLocks noGrp="1"/>
+          </p:cNvSpPr>
+          <p:nvPr>
+            <p:ph type="sldNum" idx="5" sz="quarter"/>
+          </p:nvPr>
+        </p:nvSpPr>
+        <p:spPr/>
+      </p:sp>
+    </p:spTree>
+  </p:cSld>
+  <p:clrMapOvr>
+    <a:masterClrMapping/>
+  </p:clrMapOvr>
+</p:notes>
+</file>
+
+<file path=ppt/notesSlides/notesSlide10.xml><?xml version="1.0" encoding="utf-8"?>
+<p:notes xmlns:a="http://schemas.openxmlformats.org/drawingml/2006/main" xmlns:p="http://schemas.openxmlformats.org/presentationml/2006/main" xmlns:r="http://schemas.openxmlformats.org/officeDocument/2006/relationships">
+  <p:cSld>
+    <p:spTree>
+      <p:nvGrpSpPr>
+        <p:cNvPr id="1" name=""/>
+        <p:cNvGrpSpPr/>
+        <p:nvPr/>
+      </p:nvGrpSpPr>
+      <p:grpSpPr>
+        <a:xfrm>
+          <a:off x="0" y="0"/>
+          <a:ext cx="0" cy="0"/>
+          <a:chOff x="0" y="0"/>
+          <a:chExt cx="0" cy="0"/>
+        </a:xfrm>
+      </p:grpSpPr>
+      <p:sp>
+        <p:nvSpPr>
+          <p:cNvPr id="2" name="Slide Image Placeholder 1"/>
+          <p:cNvSpPr>
+            <a:spLocks noGrp="1"/>
+          </p:cNvSpPr>
+          <p:nvPr>
+            <p:ph type="sldImg" idx="2"/>
+          </p:nvPr>
+        </p:nvSpPr>
+        <p:spPr/>
+      </p:sp>
+      <p:sp>
+        <p:nvSpPr>
+          <p:cNvPr id="3" name="Notes Placeholder 2"/>
+          <p:cNvSpPr>
+            <a:spLocks noGrp="1"/>
+          </p:cNvSpPr>
+          <p:nvPr>
+            <p:ph type="body" idx="3" sz="quarter"/>
+          </p:nvPr>
+        </p:nvSpPr>
+        <p:spPr/>
+        <p:txBody>
+          <a:bodyPr/>
+          <a:lstStyle/>
+          <a:p>
+            <a:r>
+              <a:t>The keystone slide — the target architecture, on the diagram. Trace the flow live, stage by stage, and tie each stage back to a principle from the last slide.</a:t>
+            </a:r>
+          </a:p>
+          <a:p>
+            <a:r>
+              <a:t>• Walk the flow left to right: website webhook → API gateway → queue → function → NoSQL datastore. Five stages, one event's journey; say each stage's job as you pass it.</a:t>
+            </a:r>
+          </a:p>
+          <a:p>
+            <a:r>
+              <a:t>• Second bullet: the website knows ONLY the webhook, and each stage is independently SCALABLE and REPLACEABLE — loose coupling made visible. Any stage can change without the others knowing.</a:t>
+            </a:r>
+          </a:p>
+          <a:p>
+            <a:r>
+              <a:t>• Third bullet (accent it): the store sits in the India region (ap-south-1) so the access logs are RESIDENT BY CONSTRUCTION — residency isn't a policy you enforce later, it's where you put the box.</a:t>
+            </a:r>
+          </a:p>
+          <a:p>
+            <a:r>
+              <a:t>• Point out this is a DESIGN artefact — boxes and a contract, not a built system. The .drawio is student-editable; they adapt this shape to their practice scenario.</a:t>
+            </a:r>
+          </a:p>
+          <a:p>
+            <a:r>
+              <a:t>Misconception to pre-empt: "the queue is an optional extra." No — the queue is what makes producer and consumer independent; remove it and a slow logger backs up the website. Every stage answers a principle.</a:t>
+            </a:r>
+          </a:p>
+          <a:p>
+            <a:r>
+              <a:t>Question to pose: "Point at one stage and tell me which principle it delivers — cohesion, coupling, or persistence." — go round the room; every box should trace to a principle.</a:t>
+            </a:r>
+          </a:p>
+          <a:p>
+            <a:r>
+              <a:t>UoC/AT1 tie: [ICTCLD503 PC 2.3] (design the architecture using cloud services) + [ICTCLD503 PE 2] (design at least one microservice architecture for a simple web app) — this diagram is the PE 2 evidence.</a:t>
+            </a:r>
+          </a:p>
+        </p:txBody>
+      </p:sp>
+      <p:sp>
+        <p:nvSpPr>
+          <p:cNvPr id="4" name="Slide Number Placeholder 3"/>
+          <p:cNvSpPr>
+            <a:spLocks noGrp="1"/>
+          </p:cNvSpPr>
+          <p:nvPr>
+            <p:ph type="sldNum" idx="5" sz="quarter"/>
+          </p:nvPr>
+        </p:nvSpPr>
+        <p:spPr/>
+      </p:sp>
+    </p:spTree>
+  </p:cSld>
+  <p:clrMapOvr>
+    <a:masterClrMapping/>
+  </p:clrMapOvr>
+</p:notes>
+</file>
+
+<file path=ppt/notesSlides/notesSlide11.xml><?xml version="1.0" encoding="utf-8"?>
+<p:notes xmlns:a="http://schemas.openxmlformats.org/drawingml/2006/main" xmlns:p="http://schemas.openxmlformats.org/presentationml/2006/main" xmlns:r="http://schemas.openxmlformats.org/officeDocument/2006/relationships">
+  <p:cSld>
+    <p:spTree>
+      <p:nvGrpSpPr>
+        <p:cNvPr id="1" name=""/>
+        <p:cNvGrpSpPr/>
+        <p:nvPr/>
+      </p:nvGrpSpPr>
+      <p:grpSpPr>
+        <a:xfrm>
+          <a:off x="0" y="0"/>
+          <a:ext cx="0" cy="0"/>
+          <a:chOff x="0" y="0"/>
+          <a:chExt cx="0" cy="0"/>
+        </a:xfrm>
+      </p:grpSpPr>
+      <p:sp>
+        <p:nvSpPr>
+          <p:cNvPr id="2" name="Slide Image Placeholder 1"/>
+          <p:cNvSpPr>
+            <a:spLocks noGrp="1"/>
+          </p:cNvSpPr>
+          <p:nvPr>
+            <p:ph type="sldImg" idx="2"/>
+          </p:nvPr>
+        </p:nvSpPr>
+        <p:spPr/>
+      </p:sp>
+      <p:sp>
+        <p:nvSpPr>
+          <p:cNvPr id="3" name="Notes Placeholder 2"/>
+          <p:cNvSpPr>
+            <a:spLocks noGrp="1"/>
+          </p:cNvSpPr>
+          <p:nvPr>
+            <p:ph type="body" idx="3" sz="quarter"/>
+          </p:nvPr>
+        </p:nvSpPr>
+        <p:spPr/>
+        <p:txBody>
+          <a:bodyPr/>
+          <a:lstStyle/>
+          <a:p>
+            <a:r>
+              <a:t>Teach the CONTRACT — the interface the whole loosely-coupled design hinges on. Short and sharp; this is the "and nothing else" idea.</a:t>
+            </a:r>
+          </a:p>
+          <a:p>
+            <a:r>
+              <a:t>• First bullet: define the webhook payload CONTRACT — the fields the website sends and what each MEANS. A contract is a shared, explicit agreement, not an implied one.</a:t>
+            </a:r>
+          </a:p>
+          <a:p>
+            <a:r>
+              <a:t>• Second bullet: VERSION it and VALIDATE it — producer and consumer agree on THIS and nothing else. Versioning lets the contract change safely; validation rejects malformed events at the door.</a:t>
+            </a:r>
+          </a:p>
+          <a:p>
+            <a:r>
+              <a:t>• Third bullet (accent it): a clear contract is what LETS THE TWO SIDES EVOLVE INDEPENDENTLY — the payoff of loose coupling. The site team and the logger team can work without meetings.</a:t>
+            </a:r>
+          </a:p>
+          <a:p>
+            <a:r>
+              <a:t>Misconception to pre-empt: "the contract is just documentation you write at the end." No — it's the design's load-bearing interface; you define it FIRST (contract-first), and both sides build to it. It's an agreement, not a write-up.</a:t>
+            </a:r>
+          </a:p>
+          <a:p>
+            <a:r>
+              <a:t>Question to pose: "The website team wants to add a new field to the event — how does the contract let them do that without breaking the logger?" (versioning + the consumer validating/ignoring unknown fields — evolve independently).</a:t>
+            </a:r>
+          </a:p>
+          <a:p>
+            <a:r>
+              <a:t>UoC/AT1 tie: [ICTCLD503 PC 2.3] (design the architecture including the interface/integration contract) + [ICTCLD503 KE 4] — AT1 Part A A10/A12; the contract is the interface half of the design.</a:t>
+            </a:r>
+          </a:p>
+        </p:txBody>
+      </p:sp>
+      <p:sp>
+        <p:nvSpPr>
+          <p:cNvPr id="4" name="Slide Number Placeholder 3"/>
+          <p:cNvSpPr>
+            <a:spLocks noGrp="1"/>
+          </p:cNvSpPr>
+          <p:nvPr>
+            <p:ph type="sldNum" idx="5" sz="quarter"/>
+          </p:nvPr>
+        </p:nvSpPr>
+        <p:spPr/>
+      </p:sp>
+    </p:spTree>
+  </p:cSld>
+  <p:clrMapOvr>
+    <a:masterClrMapping/>
+  </p:clrMapOvr>
+</p:notes>
+</file>
+
+<file path=ppt/notesSlides/notesSlide12.xml><?xml version="1.0" encoding="utf-8"?>
+<p:notes xmlns:a="http://schemas.openxmlformats.org/drawingml/2006/main" xmlns:p="http://schemas.openxmlformats.org/presentationml/2006/main" xmlns:r="http://schemas.openxmlformats.org/officeDocument/2006/relationships">
+  <p:cSld>
+    <p:spTree>
+      <p:nvGrpSpPr>
+        <p:cNvPr id="1" name=""/>
+        <p:cNvGrpSpPr/>
+        <p:nvPr/>
+      </p:nvGrpSpPr>
+      <p:grpSpPr>
+        <a:xfrm>
+          <a:off x="0" y="0"/>
+          <a:ext cx="0" cy="0"/>
+          <a:chOff x="0" y="0"/>
+          <a:chExt cx="0" cy="0"/>
+        </a:xfrm>
+      </p:grpSpPr>
+      <p:sp>
+        <p:nvSpPr>
+          <p:cNvPr id="2" name="Slide Image Placeholder 1"/>
+          <p:cNvSpPr>
+            <a:spLocks noGrp="1"/>
+          </p:cNvSpPr>
+          <p:nvPr>
+            <p:ph type="sldImg" idx="2"/>
+          </p:nvPr>
+        </p:nvSpPr>
+        <p:spPr/>
+      </p:sp>
+      <p:sp>
+        <p:nvSpPr>
+          <p:cNvPr id="3" name="Notes Placeholder 2"/>
+          <p:cNvSpPr>
+            <a:spLocks noGrp="1"/>
+          </p:cNvSpPr>
+          <p:nvPr>
+            <p:ph type="body" idx="3" sz="quarter"/>
+          </p:nvPr>
+        </p:nvSpPr>
+        <p:spPr/>
+        <p:txBody>
+          <a:bodyPr/>
+          <a:lstStyle/>
+          <a:p>
+            <a:r>
+              <a:t>Facilitation — the biggest activity in the Topic: students draw their OWN microservice architecture and write its contract for the practice scenario. The core AT1 Part A microservice rehearsal.</a:t>
+            </a:r>
+          </a:p>
+          <a:p>
+            <a:r>
+              <a:t>Tell students: "Using the target architecture as a model — not a template to copy — design your microservice architecture for the practice scenario: cohesive, loosely coupled, persistent, with API and messaging. Then define the webhook integration contract."</a:t>
+            </a:r>
+          </a:p>
+          <a:p>
+            <a:r>
+              <a:t>Steps:</a:t>
+            </a:r>
+          </a:p>
+          <a:p>
+            <a:r>
+              <a:t>1. Draw the flow: ingress → buffer → compute → persistent store, each stage independently scalable.</a:t>
+            </a:r>
+          </a:p>
+          <a:p>
+            <a:r>
+              <a:t>2. Show high cohesion (one job) and loose coupling (the queue seam); place the store to honour residency.</a:t>
+            </a:r>
+          </a:p>
+          <a:p>
+            <a:r>
+              <a:t>3. Define the webhook contract — the fields, their meanings, and a version.</a:t>
+            </a:r>
+          </a:p>
+          <a:p>
+            <a:r>
+              <a:t>Must produce: a labelled architecture sketch (their own .drawio or on paper) PLUS a written payload contract.</a:t>
+            </a:r>
+          </a:p>
+          <a:p>
+            <a:r>
+              <a:t>Timing: ~30 min. Where they get stuck: they redraw the teaching diagram verbatim (push them to adapt it to THEIR scenario), they forget the contract (half the mark is the interface), and they omit the queue (ask "where's your decoupling seam?").</a:t>
+            </a:r>
+          </a:p>
+          <a:p>
+            <a:r>
+              <a:t>Share-back prompt: "Show your contract's fields and where the queue sits" — surface both loose coupling and the interface.</a:t>
+            </a:r>
+          </a:p>
+          <a:p>
+            <a:r>
+              <a:t>No-leakage note: practice scenario only (comparable, not identical); AT1 evidences the same design skill on the assessed system — keep them on the practice brief.</a:t>
+            </a:r>
+          </a:p>
+          <a:p>
+            <a:r>
+              <a:t>UoC/AT1 tie: [ICTCLD503 PC 2.3] · [ICTCLD503 PE 2] · [ICTCLD503 KE 4] — the full architecture-and-contract core of AT1 Part A's microservice strand.</a:t>
+            </a:r>
+          </a:p>
+        </p:txBody>
+      </p:sp>
+      <p:sp>
+        <p:nvSpPr>
+          <p:cNvPr id="4" name="Slide Number Placeholder 3"/>
+          <p:cNvSpPr>
+            <a:spLocks noGrp="1"/>
+          </p:cNvSpPr>
+          <p:nvPr>
+            <p:ph type="sldNum" idx="5" sz="quarter"/>
+          </p:nvPr>
+        </p:nvSpPr>
+        <p:spPr/>
+      </p:sp>
+    </p:spTree>
+  </p:cSld>
+  <p:clrMapOvr>
+    <a:masterClrMapping/>
+  </p:clrMapOvr>
+</p:notes>
+</file>
+
+<file path=ppt/notesSlides/notesSlide2.xml><?xml version="1.0" encoding="utf-8"?>
+<p:notes xmlns:a="http://schemas.openxmlformats.org/drawingml/2006/main" xmlns:p="http://schemas.openxmlformats.org/presentationml/2006/main" xmlns:r="http://schemas.openxmlformats.org/officeDocument/2006/relationships">
+  <p:cSld>
+    <p:spTree>
+      <p:nvGrpSpPr>
+        <p:cNvPr id="1" name=""/>
+        <p:cNvGrpSpPr/>
+        <p:nvPr/>
+      </p:nvGrpSpPr>
+      <p:grpSpPr>
+        <a:xfrm>
+          <a:off x="0" y="0"/>
+          <a:ext cx="0" cy="0"/>
+          <a:chOff x="0" y="0"/>
+          <a:chExt cx="0" cy="0"/>
+        </a:xfrm>
+      </p:grpSpPr>
+      <p:sp>
+        <p:nvSpPr>
+          <p:cNvPr id="2" name="Slide Image Placeholder 1"/>
+          <p:cNvSpPr>
+            <a:spLocks noGrp="1"/>
+          </p:cNvSpPr>
+          <p:nvPr>
+            <p:ph type="sldImg" idx="2"/>
+          </p:nvPr>
+        </p:nvSpPr>
+        <p:spPr/>
+      </p:sp>
+      <p:sp>
+        <p:nvSpPr>
+          <p:cNvPr id="3" name="Notes Placeholder 2"/>
+          <p:cNvSpPr>
+            <a:spLocks noGrp="1"/>
+          </p:cNvSpPr>
+          <p:nvPr>
+            <p:ph type="body" idx="3" sz="quarter"/>
+          </p:nvPr>
+        </p:nvSpPr>
+        <p:spPr/>
+        <p:txBody>
+          <a:bodyPr/>
+          <a:lstStyle/>
+          <a:p>
+            <a:r>
+              <a:t>Install the microservice concept — vendor-neutral, no AWS yet. Keep it tight; it's the definition the whole Topic builds on.</a:t>
+            </a:r>
+          </a:p>
+          <a:p>
+            <a:r>
+              <a:t>• First bullet: a microservice does ONE thing well — small, independently deployable, single responsibility. Stress "single responsibility": that's the test for whether something should be its own service.</a:t>
+            </a:r>
+          </a:p>
+          <a:p>
+            <a:r>
+              <a:t>• Second bullet: it OWNS its data and exposes a NARROW interface — others talk to it only through that contract, never reach into its data directly. This is what keeps services decoupled.</a:t>
+            </a:r>
+          </a:p>
+          <a:p>
+            <a:r>
+              <a:t>• Third bullet: right-sized — big enough to be useful, small enough to reason about and scale on its own. Not "as small as possible"; sized to a responsibility.</a:t>
+            </a:r>
+          </a:p>
+          <a:p>
+            <a:r>
+              <a:t>Misconception to pre-empt: "microservices = lots of tiny services always." No — the win is single-responsibility and independent deploy/scale, not smallness for its own sake; over-splitting adds coupling and operational cost.</a:t>
+            </a:r>
+          </a:p>
+          <a:p>
+            <a:r>
+              <a:t>Question to pose: "If another system needs this service's data, how should it get it?" (through the service's interface/contract — never by reaching into its store).</a:t>
+            </a:r>
+          </a:p>
+          <a:p>
+            <a:r>
+              <a:t>UoC/AT1 tie: [ICTCLD503 PC 2.1] (identify microservices and the data transactions to meet business needs) — the concept students apply to the audit log next.</a:t>
+            </a:r>
+          </a:p>
+        </p:txBody>
+      </p:sp>
+      <p:sp>
+        <p:nvSpPr>
+          <p:cNvPr id="4" name="Slide Number Placeholder 3"/>
+          <p:cNvSpPr>
+            <a:spLocks noGrp="1"/>
+          </p:cNvSpPr>
+          <p:nvPr>
+            <p:ph type="sldNum" idx="5" sz="quarter"/>
+          </p:nvPr>
+        </p:nvSpPr>
+        <p:spPr/>
+      </p:sp>
+    </p:spTree>
+  </p:cSld>
+  <p:clrMapOvr>
+    <a:masterClrMapping/>
+  </p:clrMapOvr>
+</p:notes>
+</file>
+
+<file path=ppt/notesSlides/notesSlide3.xml><?xml version="1.0" encoding="utf-8"?>
+<p:notes xmlns:a="http://schemas.openxmlformats.org/drawingml/2006/main" xmlns:p="http://schemas.openxmlformats.org/presentationml/2006/main" xmlns:r="http://schemas.openxmlformats.org/officeDocument/2006/relationships">
+  <p:cSld>
+    <p:spTree>
+      <p:nvGrpSpPr>
+        <p:cNvPr id="1" name=""/>
+        <p:cNvGrpSpPr/>
+        <p:nvPr/>
+      </p:nvGrpSpPr>
+      <p:grpSpPr>
+        <a:xfrm>
+          <a:off x="0" y="0"/>
+          <a:ext cx="0" cy="0"/>
+          <a:chOff x="0" y="0"/>
+          <a:chExt cx="0" cy="0"/>
+        </a:xfrm>
+      </p:grpSpPr>
+      <p:sp>
+        <p:nvSpPr>
+          <p:cNvPr id="2" name="Slide Image Placeholder 1"/>
+          <p:cNvSpPr>
+            <a:spLocks noGrp="1"/>
+          </p:cNvSpPr>
+          <p:nvPr>
+            <p:ph type="sldImg" idx="2"/>
+          </p:nvPr>
+        </p:nvSpPr>
+        <p:spPr/>
+      </p:sp>
+      <p:sp>
+        <p:nvSpPr>
+          <p:cNvPr id="3" name="Notes Placeholder 2"/>
+          <p:cNvSpPr>
+            <a:spLocks noGrp="1"/>
+          </p:cNvSpPr>
+          <p:nvPr>
+            <p:ph type="body" idx="3" sz="quarter"/>
+          </p:nvPr>
+        </p:nvSpPr>
+        <p:spPr/>
+        <p:txBody>
+          <a:bodyPr/>
+          <a:lstStyle/>
+          <a:p>
+            <a:r>
+              <a:t>Make the concept concrete — THIS microservice, its single job. This is the design's first decision: what the service is responsible for.</a:t>
+            </a:r>
+          </a:p>
+          <a:p>
+            <a:r>
+              <a:t>• First bullet: the one job — capture each India-cohort access/enquiry event the website EMITS and record it DURABLY. One responsibility, stated as a sentence.</a:t>
+            </a:r>
+          </a:p>
+          <a:p>
+            <a:r>
+              <a:t>• Second bullet: the website is the PRODUCER; it knows ONLY the webhook contract, not the store behind it. This is the decoupling from the last slide, applied — the site can't and shouldn't know how the log is stored.</a:t>
+            </a:r>
+          </a:p>
+          <a:p>
+            <a:r>
+              <a:t>• Third bullet (accent it): RESIDENCY — India-cohort access logs land in an India-resident store (ap-south-1) per the requirements. This is the whole reason the service exists on its own; residency is an input constraint, not a design choice.</a:t>
+            </a:r>
+          </a:p>
+          <a:p>
+            <a:r>
+              <a:t>Misconception to pre-empt: "the website should just write the log itself." No — separating it gives single responsibility, independent scale, and lets the log live in a residency-compliant store the site needn't host. Coupling them would defeat all three.</a:t>
+            </a:r>
+          </a:p>
+          <a:p>
+            <a:r>
+              <a:t>Question to pose: "Why does the website only need to know the webhook, and not where the log ends up?" (loose coupling — the store can change, move region, or scale without touching the site).</a:t>
+            </a:r>
+          </a:p>
+          <a:p>
+            <a:r>
+              <a:t>UoC/AT1 tie: [ICTCLD503 PC 2.1] (identify the microservice to meet the business need) — AT1 Part A A8; residency is the business need it answers.</a:t>
+            </a:r>
+          </a:p>
+        </p:txBody>
+      </p:sp>
+      <p:sp>
+        <p:nvSpPr>
+          <p:cNvPr id="4" name="Slide Number Placeholder 3"/>
+          <p:cNvSpPr>
+            <a:spLocks noGrp="1"/>
+          </p:cNvSpPr>
+          <p:nvPr>
+            <p:ph type="sldNum" idx="5" sz="quarter"/>
+          </p:nvPr>
+        </p:nvSpPr>
+        <p:spPr/>
+      </p:sp>
+    </p:spTree>
+  </p:cSld>
+  <p:clrMapOvr>
+    <a:masterClrMapping/>
+  </p:clrMapOvr>
+</p:notes>
+</file>
+
+<file path=ppt/notesSlides/notesSlide4.xml><?xml version="1.0" encoding="utf-8"?>
+<p:notes xmlns:a="http://schemas.openxmlformats.org/drawingml/2006/main" xmlns:p="http://schemas.openxmlformats.org/presentationml/2006/main" xmlns:r="http://schemas.openxmlformats.org/officeDocument/2006/relationships">
+  <p:cSld>
+    <p:spTree>
+      <p:nvGrpSpPr>
+        <p:cNvPr id="1" name=""/>
+        <p:cNvGrpSpPr/>
+        <p:nvPr/>
+      </p:nvGrpSpPr>
+      <p:grpSpPr>
+        <a:xfrm>
+          <a:off x="0" y="0"/>
+          <a:ext cx="0" cy="0"/>
+          <a:chOff x="0" y="0"/>
+          <a:chExt cx="0" cy="0"/>
+        </a:xfrm>
+      </p:grpSpPr>
+      <p:sp>
+        <p:nvSpPr>
+          <p:cNvPr id="2" name="Slide Image Placeholder 1"/>
+          <p:cNvSpPr>
+            <a:spLocks noGrp="1"/>
+          </p:cNvSpPr>
+          <p:nvPr>
+            <p:ph type="sldImg" idx="2"/>
+          </p:nvPr>
+        </p:nvSpPr>
+        <p:spPr/>
+      </p:sp>
+      <p:sp>
+        <p:nvSpPr>
+          <p:cNvPr id="3" name="Notes Placeholder 2"/>
+          <p:cNvSpPr>
+            <a:spLocks noGrp="1"/>
+          </p:cNvSpPr>
+          <p:nvPr>
+            <p:ph type="body" idx="3" sz="quarter"/>
+          </p:nvPr>
+        </p:nvSpPr>
+        <p:spPr/>
+        <p:txBody>
+          <a:bodyPr/>
+          <a:lstStyle/>
+          <a:p>
+            <a:r>
+              <a:t>Teach the DATA-TRANSACTION half of C1 — what data moves through the service and how. Short and precise; this defines the store's shape.</a:t>
+            </a:r>
+          </a:p>
+          <a:p>
+            <a:r>
+              <a:t>• First bullet: ONE transaction — append an access event (who / what / when), WRITE-ONCE, never updated. An audit log is immutable by nature; you add records, you don't edit them.</a:t>
+            </a:r>
+          </a:p>
+          <a:p>
+            <a:r>
+              <a:t>• Second bullet: append-only buys you IDEMPOTENT writes (re-sending the same event is safe) and simple, high-scale READS for retrieval. The data pattern makes scaling trivial — no update contention.</a:t>
+            </a:r>
+          </a:p>
+          <a:p>
+            <a:r>
+              <a:t>• Third bullet: identify each transaction by the BUSINESS NEED it meets — here the CERT-In access-log obligation. A transaction exists because a requirement demands it, not because it's technically possible.</a:t>
+            </a:r>
+          </a:p>
+          <a:p>
+            <a:r>
+              <a:t>Misconception to pre-empt: "we'll need update and delete too." No — an audit log is append-only by design; mutability would break its evidentiary value. Fewer transactions, precisely justified, is the stronger design.</a:t>
+            </a:r>
+          </a:p>
+          <a:p>
+            <a:r>
+              <a:t>Question to pose: "Why is 'write-once, never updated' actually an advantage for scale and integrity?" (idempotent writes, no update contention, and a tamper-evident record).</a:t>
+            </a:r>
+          </a:p>
+          <a:p>
+            <a:r>
+              <a:t>UoC/AT1 tie: [ICTCLD503 PC 2.1] (data transactions to meet business needs) — AT1 Part A A8; each transaction traced to its business/compliance driver.</a:t>
+            </a:r>
+          </a:p>
+        </p:txBody>
+      </p:sp>
+      <p:sp>
+        <p:nvSpPr>
+          <p:cNvPr id="4" name="Slide Number Placeholder 3"/>
+          <p:cNvSpPr>
+            <a:spLocks noGrp="1"/>
+          </p:cNvSpPr>
+          <p:nvPr>
+            <p:ph type="sldNum" idx="5" sz="quarter"/>
+          </p:nvPr>
+        </p:nvSpPr>
+        <p:spPr/>
+      </p:sp>
+    </p:spTree>
+  </p:cSld>
+  <p:clrMapOvr>
+    <a:masterClrMapping/>
+  </p:clrMapOvr>
+</p:notes>
+</file>
+
+<file path=ppt/notesSlides/notesSlide5.xml><?xml version="1.0" encoding="utf-8"?>
+<p:notes xmlns:a="http://schemas.openxmlformats.org/drawingml/2006/main" xmlns:p="http://schemas.openxmlformats.org/presentationml/2006/main" xmlns:r="http://schemas.openxmlformats.org/officeDocument/2006/relationships">
+  <p:cSld>
+    <p:spTree>
+      <p:nvGrpSpPr>
+        <p:cNvPr id="1" name=""/>
+        <p:cNvGrpSpPr/>
+        <p:nvPr/>
+      </p:nvGrpSpPr>
+      <p:grpSpPr>
+        <a:xfrm>
+          <a:off x="0" y="0"/>
+          <a:ext cx="0" cy="0"/>
+          <a:chOff x="0" y="0"/>
+          <a:chExt cx="0" cy="0"/>
+        </a:xfrm>
+      </p:grpSpPr>
+      <p:sp>
+        <p:nvSpPr>
+          <p:cNvPr id="2" name="Slide Image Placeholder 1"/>
+          <p:cNvSpPr>
+            <a:spLocks noGrp="1"/>
+          </p:cNvSpPr>
+          <p:nvPr>
+            <p:ph type="sldImg" idx="2"/>
+          </p:nvPr>
+        </p:nvSpPr>
+        <p:spPr/>
+      </p:sp>
+      <p:sp>
+        <p:nvSpPr>
+          <p:cNvPr id="3" name="Notes Placeholder 2"/>
+          <p:cNvSpPr>
+            <a:spLocks noGrp="1"/>
+          </p:cNvSpPr>
+          <p:nvPr>
+            <p:ph type="body" idx="3" sz="quarter"/>
+          </p:nvPr>
+        </p:nvSpPr>
+        <p:spPr/>
+        <p:txBody>
+          <a:bodyPr/>
+          <a:lstStyle/>
+          <a:p>
+            <a:r>
+              <a:t>Facilitation — the C1 practice: identify the service(s) and their transactions on the PRACTICE scenario. Rehearses AT1 Part A A8 in miniature.</a:t>
+            </a:r>
+          </a:p>
+          <a:p>
+            <a:r>
+              <a:t>Tell students: "On the practice scenario, identify the microservice(s) you need and, for each, the data transaction(s) it handles — then state the business need behind every transaction."</a:t>
+            </a:r>
+          </a:p>
+          <a:p>
+            <a:r>
+              <a:t>Steps (put on the board):</a:t>
+            </a:r>
+          </a:p>
+          <a:p>
+            <a:r>
+              <a:t>1. Identify the microservice(s) — one responsibility each; name what each is FOR.</a:t>
+            </a:r>
+          </a:p>
+          <a:p>
+            <a:r>
+              <a:t>2. For each, list its data transaction(s) — what data moves, in which direction (append / read).</a:t>
+            </a:r>
+          </a:p>
+          <a:p>
+            <a:r>
+              <a:t>3. Against every transaction, write the business need it meets — no orphan transactions.</a:t>
+            </a:r>
+          </a:p>
+          <a:p>
+            <a:r>
+              <a:t>Must produce: a short written list of microservice(s) with their transactions, each transaction tied to a business need.</a:t>
+            </a:r>
+          </a:p>
+          <a:p>
+            <a:r>
+              <a:t>Timing: ~20 min. Where they get stuck: they design one big service that does everything (push single-responsibility — split by job), and they list transactions with no business need behind them (make them name the requirement).</a:t>
+            </a:r>
+          </a:p>
+          <a:p>
+            <a:r>
+              <a:t>Share-back prompt: "Name one transaction and the exact business need it meets" — take two or three; listen for transaction→need traceability.</a:t>
+            </a:r>
+          </a:p>
+          <a:p>
+            <a:r>
+              <a:t>No-leakage note: this runs on the PRACTICE scenario (comparable, not identical); AT1 evidences the same identify-the-service skill on the assessed system — keep them on the practice brief.</a:t>
+            </a:r>
+          </a:p>
+          <a:p>
+            <a:r>
+              <a:t>UoC/AT1 tie: [ICTCLD503 PC 2.1] — identify microservices + data transactions to business needs, the opening move of AT1 Part A's microservice strand.</a:t>
+            </a:r>
+          </a:p>
+        </p:txBody>
+      </p:sp>
+      <p:sp>
+        <p:nvSpPr>
+          <p:cNvPr id="4" name="Slide Number Placeholder 3"/>
+          <p:cNvSpPr>
+            <a:spLocks noGrp="1"/>
+          </p:cNvSpPr>
+          <p:nvPr>
+            <p:ph type="sldNum" idx="5" sz="quarter"/>
+          </p:nvPr>
+        </p:nvSpPr>
+        <p:spPr/>
+      </p:sp>
+    </p:spTree>
+  </p:cSld>
+  <p:clrMapOvr>
+    <a:masterClrMapping/>
+  </p:clrMapOvr>
+</p:notes>
+</file>
+
+<file path=ppt/notesSlides/notesSlide6.xml><?xml version="1.0" encoding="utf-8"?>
+<p:notes xmlns:a="http://schemas.openxmlformats.org/drawingml/2006/main" xmlns:p="http://schemas.openxmlformats.org/presentationml/2006/main" xmlns:r="http://schemas.openxmlformats.org/officeDocument/2006/relationships">
+  <p:cSld>
+    <p:spTree>
+      <p:nvGrpSpPr>
+        <p:cNvPr id="1" name=""/>
+        <p:cNvGrpSpPr/>
+        <p:nvPr/>
+      </p:nvGrpSpPr>
+      <p:grpSpPr>
+        <a:xfrm>
+          <a:off x="0" y="0"/>
+          <a:ext cx="0" cy="0"/>
+          <a:chOff x="0" y="0"/>
+          <a:chExt cx="0" cy="0"/>
+        </a:xfrm>
+      </p:grpSpPr>
+      <p:sp>
+        <p:nvSpPr>
+          <p:cNvPr id="2" name="Slide Image Placeholder 1"/>
+          <p:cNvSpPr>
+            <a:spLocks noGrp="1"/>
+          </p:cNvSpPr>
+          <p:nvPr>
+            <p:ph type="sldImg" idx="2"/>
+          </p:nvPr>
+        </p:nvSpPr>
+        <p:spPr/>
+      </p:sp>
+      <p:sp>
+        <p:nvSpPr>
+          <p:cNvPr id="3" name="Notes Placeholder 2"/>
+          <p:cNvSpPr>
+            <a:spLocks noGrp="1"/>
+          </p:cNvSpPr>
+          <p:nvPr>
+            <p:ph type="body" idx="3" sz="quarter"/>
+          </p:nvPr>
+        </p:nvSpPr>
+        <p:spPr/>
+        <p:txBody>
+          <a:bodyPr/>
+          <a:lstStyle/>
+          <a:p>
+            <a:r>
+              <a:t>Open C2 with the serverless toolkit — the four building-block TYPES, still vendor-neutral (name AWS only as the example). One block per line.</a:t>
+            </a:r>
+          </a:p>
+          <a:p>
+            <a:r>
+              <a:t>• COMPUTE: a function service runs your code ON DEMAND, no servers to manage (e.g. AWS Lambda). It runs when an event arrives, then stops — you pay per invocation.</a:t>
+            </a:r>
+          </a:p>
+          <a:p>
+            <a:r>
+              <a:t>• FRONT DOOR: an API gateway RECEIVES requests and routes them to the function — the public, managed entry point that speaks HTTPS.</a:t>
+            </a:r>
+          </a:p>
+          <a:p>
+            <a:r>
+              <a:t>• MESSAGING / QUEUING: a queue or topic BUFFERS events and DECOUPLES producer from consumer — the site can fire events faster than they're processed without anything breaking.</a:t>
+            </a:r>
+          </a:p>
+          <a:p>
+            <a:r>
+              <a:t>• PERSISTENCE: a managed datastore keeps the data WITHOUT you running a database server — no patching, no capacity planning.</a:t>
+            </a:r>
+          </a:p>
+          <a:p>
+            <a:r>
+              <a:t>Misconception to pre-empt: "serverless is just Lambda." No — it's a toolkit: gateway + queue + function + managed store, each a managed building block. The function is only one piece.</a:t>
+            </a:r>
+          </a:p>
+          <a:p>
+            <a:r>
+              <a:t>Question to pose: "Which block lets the website fire 1,000 events a second even if the logger can only write 200 a second?" (the queue — it buffers and decouples).</a:t>
+            </a:r>
+          </a:p>
+          <a:p>
+            <a:r>
+              <a:t>UoC/AT1 tie: [ICTCLD503 PC 2.2] (determine the cloud services that support the microservice architecture) — the palette students select from next.</a:t>
+            </a:r>
+          </a:p>
+        </p:txBody>
+      </p:sp>
+      <p:sp>
+        <p:nvSpPr>
+          <p:cNvPr id="4" name="Slide Number Placeholder 3"/>
+          <p:cNvSpPr>
+            <a:spLocks noGrp="1"/>
+          </p:cNvSpPr>
+          <p:nvPr>
+            <p:ph type="sldNum" idx="5" sz="quarter"/>
+          </p:nvPr>
+        </p:nvSpPr>
+        <p:spPr/>
+      </p:sp>
+    </p:spTree>
+  </p:cSld>
+  <p:clrMapOvr>
+    <a:masterClrMapping/>
+  </p:clrMapOvr>
+</p:notes>
+</file>
+
+<file path=ppt/notesSlides/notesSlide7.xml><?xml version="1.0" encoding="utf-8"?>
+<p:notes xmlns:a="http://schemas.openxmlformats.org/drawingml/2006/main" xmlns:p="http://schemas.openxmlformats.org/presentationml/2006/main" xmlns:r="http://schemas.openxmlformats.org/officeDocument/2006/relationships">
+  <p:cSld>
+    <p:spTree>
+      <p:nvGrpSpPr>
+        <p:cNvPr id="1" name=""/>
+        <p:cNvGrpSpPr/>
+        <p:nvPr/>
+      </p:nvGrpSpPr>
+      <p:grpSpPr>
+        <a:xfrm>
+          <a:off x="0" y="0"/>
+          <a:ext cx="0" cy="0"/>
+          <a:chOff x="0" y="0"/>
+          <a:chExt cx="0" cy="0"/>
+        </a:xfrm>
+      </p:grpSpPr>
+      <p:sp>
+        <p:nvSpPr>
+          <p:cNvPr id="2" name="Slide Image Placeholder 1"/>
+          <p:cNvSpPr>
+            <a:spLocks noGrp="1"/>
+          </p:cNvSpPr>
+          <p:nvPr>
+            <p:ph type="sldImg" idx="2"/>
+          </p:nvPr>
+        </p:nvSpPr>
+        <p:spPr/>
+      </p:sp>
+      <p:sp>
+        <p:nvSpPr>
+          <p:cNvPr id="3" name="Notes Placeholder 2"/>
+          <p:cNvSpPr>
+            <a:spLocks noGrp="1"/>
+          </p:cNvSpPr>
+          <p:nvPr>
+            <p:ph type="body" idx="3" sz="quarter"/>
+          </p:nvPr>
+        </p:nvSpPr>
+        <p:spPr/>
+        <p:txBody>
+          <a:bodyPr/>
+          <a:lstStyle/>
+          <a:p>
+            <a:r>
+              <a:t>Apply the toolkit to OUR service — map each building block to a specific job in the audit log. This is the service-selection decision (PC 2.2) made concrete.</a:t>
+            </a:r>
+          </a:p>
+          <a:p>
+            <a:r>
+              <a:t>• INGRESS: an API gateway receives the website's webhook over HTTPS — the front door for the producer's events.</a:t>
+            </a:r>
+          </a:p>
+          <a:p>
+            <a:r>
+              <a:t>• BUFFER: a queue absorbs bursts and DECOUPLES the site from the logger — loose coupling, so a slow or failed logger never backs up the website.</a:t>
+            </a:r>
+          </a:p>
+          <a:p>
+            <a:r>
+              <a:t>• COMPUTE: a function VALIDATES and writes each event — the only custom code in the whole service; everything else is managed.</a:t>
+            </a:r>
+          </a:p>
+          <a:p>
+            <a:r>
+              <a:t>• STORE: a managed NoSQL datastore holds the APPEND-ONLY log, RESIDENT IN INDIA. NoSQL fits the write-once, high-scale-read pattern from C1; residency picks the region.</a:t>
+            </a:r>
+          </a:p>
+          <a:p>
+            <a:r>
+              <a:t>Misconception to pre-empt: "pick a relational database, it's the default." No — the access pattern (append-only, high-scale simple reads) and residency point to managed NoSQL; justify the choice against the requirement, don't default to SQL.</a:t>
+            </a:r>
+          </a:p>
+          <a:p>
+            <a:r>
+              <a:t>Question to pose: "Each service here is chosen for a reason — pick one and tell me the requirement it answers." (gateway→ingress, queue→decoupling/burst, NoSQL store→append pattern + residency).</a:t>
+            </a:r>
+          </a:p>
+          <a:p>
+            <a:r>
+              <a:t>UoC/AT1 tie: [ICTCLD503 PC 2.2] (determine cloud services to support the architecture) — AT1 Part A A9; each service justified against a requirement.</a:t>
+            </a:r>
+          </a:p>
+        </p:txBody>
+      </p:sp>
+      <p:sp>
+        <p:nvSpPr>
+          <p:cNvPr id="4" name="Slide Number Placeholder 3"/>
+          <p:cNvSpPr>
+            <a:spLocks noGrp="1"/>
+          </p:cNvSpPr>
+          <p:nvPr>
+            <p:ph type="sldNum" idx="5" sz="quarter"/>
+          </p:nvPr>
+        </p:nvSpPr>
+        <p:spPr/>
+      </p:sp>
+    </p:spTree>
+  </p:cSld>
+  <p:clrMapOvr>
+    <a:masterClrMapping/>
+  </p:clrMapOvr>
+</p:notes>
+</file>
+
+<file path=ppt/notesSlides/notesSlide8.xml><?xml version="1.0" encoding="utf-8"?>
+<p:notes xmlns:a="http://schemas.openxmlformats.org/drawingml/2006/main" xmlns:p="http://schemas.openxmlformats.org/presentationml/2006/main" xmlns:r="http://schemas.openxmlformats.org/officeDocument/2006/relationships">
+  <p:cSld>
+    <p:spTree>
+      <p:nvGrpSpPr>
+        <p:cNvPr id="1" name=""/>
+        <p:cNvGrpSpPr/>
+        <p:nvPr/>
+      </p:nvGrpSpPr>
+      <p:grpSpPr>
+        <a:xfrm>
+          <a:off x="0" y="0"/>
+          <a:ext cx="0" cy="0"/>
+          <a:chOff x="0" y="0"/>
+          <a:chExt cx="0" cy="0"/>
+        </a:xfrm>
+      </p:grpSpPr>
+      <p:sp>
+        <p:nvSpPr>
+          <p:cNvPr id="2" name="Slide Image Placeholder 1"/>
+          <p:cNvSpPr>
+            <a:spLocks noGrp="1"/>
+          </p:cNvSpPr>
+          <p:nvPr>
+            <p:ph type="sldImg" idx="2"/>
+          </p:nvPr>
+        </p:nvSpPr>
+        <p:spPr/>
+      </p:sp>
+      <p:sp>
+        <p:nvSpPr>
+          <p:cNvPr id="3" name="Notes Placeholder 2"/>
+          <p:cNvSpPr>
+            <a:spLocks noGrp="1"/>
+          </p:cNvSpPr>
+          <p:nvPr>
+            <p:ph type="body" idx="3" sz="quarter"/>
+          </p:nvPr>
+        </p:nvSpPr>
+        <p:spPr/>
+        <p:txBody>
+          <a:bodyPr/>
+          <a:lstStyle/>
+          <a:p>
+            <a:r>
+              <a:t>Facilitation — the C2 practice: choose the supporting services for the practice-scenario microservice and JUSTIFY each. Rehearses AT1 Part A A9.</a:t>
+            </a:r>
+          </a:p>
+          <a:p>
+            <a:r>
+              <a:t>Tell students: "For the microservice you identified last activity, determine the cloud services that support it — and for EACH one, name the requirement it answers (scale, residency, or decoupling)."</a:t>
+            </a:r>
+          </a:p>
+          <a:p>
+            <a:r>
+              <a:t>Steps (put on the board):</a:t>
+            </a:r>
+          </a:p>
+          <a:p>
+            <a:r>
+              <a:t>1. Pick a service for each job: ingress, buffer/decouple, compute, persistence.</a:t>
+            </a:r>
+          </a:p>
+          <a:p>
+            <a:r>
+              <a:t>2. Against each choice, write the requirement it satisfies — scale, residency, or decoupling.</a:t>
+            </a:r>
+          </a:p>
+          <a:p>
+            <a:r>
+              <a:t>3. Prefer managed/serverless building blocks; note where a choice is forced by residency.</a:t>
+            </a:r>
+          </a:p>
+          <a:p>
+            <a:r>
+              <a:t>Must produce: a service list with a one-line justification per service, each tied to a requirement.</a:t>
+            </a:r>
+          </a:p>
+          <a:p>
+            <a:r>
+              <a:t>Timing: ~20 min. Where they get stuck: they name product names with no reason attached (make them state the requirement), and they skip the queue (ask "what absorbs a burst?").</a:t>
+            </a:r>
+          </a:p>
+          <a:p>
+            <a:r>
+              <a:t>Share-back prompt: "Name one service and the requirement that forced it" — spotlight choice→requirement traceability.</a:t>
+            </a:r>
+          </a:p>
+          <a:p>
+            <a:r>
+              <a:t>No-leakage note: practice scenario only (comparable, not identical); AT1 evidences the same service-selection skill on the assessed system — keep them on the practice brief.</a:t>
+            </a:r>
+          </a:p>
+          <a:p>
+            <a:r>
+              <a:t>UoC/AT1 tie: [ICTCLD503 PC 2.2] — determine the supporting cloud services, justified to requirements (AT1 Part A A9).</a:t>
+            </a:r>
+          </a:p>
+        </p:txBody>
+      </p:sp>
+      <p:sp>
+        <p:nvSpPr>
+          <p:cNvPr id="4" name="Slide Number Placeholder 3"/>
+          <p:cNvSpPr>
+            <a:spLocks noGrp="1"/>
+          </p:cNvSpPr>
+          <p:nvPr>
+            <p:ph type="sldNum" idx="5" sz="quarter"/>
+          </p:nvPr>
+        </p:nvSpPr>
+        <p:spPr/>
+      </p:sp>
+    </p:spTree>
+  </p:cSld>
+  <p:clrMapOvr>
+    <a:masterClrMapping/>
+  </p:clrMapOvr>
+</p:notes>
+</file>
+
+<file path=ppt/notesSlides/notesSlide9.xml><?xml version="1.0" encoding="utf-8"?>
+<p:notes xmlns:a="http://schemas.openxmlformats.org/drawingml/2006/main" xmlns:p="http://schemas.openxmlformats.org/presentationml/2006/main" xmlns:r="http://schemas.openxmlformats.org/officeDocument/2006/relationships">
+  <p:cSld>
+    <p:spTree>
+      <p:nvGrpSpPr>
+        <p:cNvPr id="1" name=""/>
+        <p:cNvGrpSpPr/>
+        <p:nvPr/>
+      </p:nvGrpSpPr>
+      <p:grpSpPr>
+        <a:xfrm>
+          <a:off x="0" y="0"/>
+          <a:ext cx="0" cy="0"/>
+          <a:chOff x="0" y="0"/>
+          <a:chExt cx="0" cy="0"/>
+        </a:xfrm>
+      </p:grpSpPr>
+      <p:sp>
+        <p:nvSpPr>
+          <p:cNvPr id="2" name="Slide Image Placeholder 1"/>
+          <p:cNvSpPr>
+            <a:spLocks noGrp="1"/>
+          </p:cNvSpPr>
+          <p:nvPr>
+            <p:ph type="sldImg" idx="2"/>
+          </p:nvPr>
+        </p:nvSpPr>
+        <p:spPr/>
+      </p:sp>
+      <p:sp>
+        <p:nvSpPr>
+          <p:cNvPr id="3" name="Notes Placeholder 2"/>
+          <p:cNvSpPr>
+            <a:spLocks noGrp="1"/>
+          </p:cNvSpPr>
+          <p:nvPr>
+            <p:ph type="body" idx="3" sz="quarter"/>
+          </p:nvPr>
+        </p:nvSpPr>
+        <p:spPr/>
+        <p:txBody>
+          <a:bodyPr/>
+          <a:lstStyle/>
+          <a:p>
+            <a:r>
+              <a:t>Open C3 with the three architecture PRINCIPLES the design must demonstrate — vendor-neutral, examinable. One principle per line.</a:t>
+            </a:r>
+          </a:p>
+          <a:p>
+            <a:r>
+              <a:t>• HIGH COHESION: everything in the service serves its ONE job. Nothing unrelated bolted on — cohesion is single-responsibility seen from inside the service.</a:t>
+            </a:r>
+          </a:p>
+          <a:p>
+            <a:r>
+              <a:t>• LOOSE COUPLING: the queue between producer and consumer means neither BREAKS the other — the site can fail, the logger can fail, independently. The queue is the coupling seam.</a:t>
+            </a:r>
+          </a:p>
+          <a:p>
+            <a:r>
+              <a:t>• PERSISTENT DATASTORE: the record SURVIVES independently of the compute that wrote it. The function is ephemeral (it runs and stops); the data must outlive it.</a:t>
+            </a:r>
+          </a:p>
+          <a:p>
+            <a:r>
+              <a:t>Misconception to pre-empt: "cohesion and coupling are the same idea." No — cohesion is WITHIN a service (does it do one job?); coupling is BETWEEN services (how tightly do they depend?). You want high cohesion AND loose coupling.</a:t>
+            </a:r>
+          </a:p>
+          <a:p>
+            <a:r>
+              <a:t>Question to pose: "The function runs for 200ms then disappears — so where does the audit record live?" (in the persistent datastore — compute is ephemeral, storage is durable).</a:t>
+            </a:r>
+          </a:p>
+          <a:p>
+            <a:r>
+              <a:t>UoC/AT1 tie: [ICTCLD503 KE 4] (features of web-scale infrastructure: cohesion/coupling, persistent datastore, API/messaging/queuing) and [ICTCLD503 PC 2.3]/[ICTCLD503 PE 2] — the principles the architecture on the next slide must show.</a:t>
+            </a:r>
+          </a:p>
+        </p:txBody>
+      </p:sp>
+      <p:sp>
+        <p:nvSpPr>
+          <p:cNvPr id="4" name="Slide Number Placeholder 3"/>
+          <p:cNvSpPr>
+            <a:spLocks noGrp="1"/>
+          </p:cNvSpPr>
+          <p:nvPr>
+            <p:ph type="sldNum" idx="5" sz="quarter"/>
+          </p:nvPr>
+        </p:nvSpPr>
+        <p:spPr/>
+      </p:sp>
+    </p:spTree>
+  </p:cSld>
+  <p:clrMapOvr>
+    <a:masterClrMapping/>
+  </p:clrMapOvr>
+</p:notes>
 </file>
 
 <file path=ppt/slideLayouts/slideLayout1.xml><?xml version="1.0" encoding="utf-8"?>
@@ -9919,4 +11549,324 @@
   </a:objectDefaults>
   <a:extraClrSchemeLst/>
 </a:theme>
+</file>
+
+<file path=ppt/theme/theme2.xml><?xml version="1.0" encoding="utf-8"?>
+<a:theme xmlns:a="http://schemas.openxmlformats.org/drawingml/2006/main" name="Office Theme">
+  <a:themeElements>
+    <a:clrScheme name="Office">
+      <a:dk1>
+        <a:sysClr val="windowText" lastClr="000000"/>
+      </a:dk1>
+      <a:lt1>
+        <a:sysClr val="window" lastClr="FFFFFF"/>
+      </a:lt1>
+      <a:dk2>
+        <a:srgbClr val="1F497D"/>
+      </a:dk2>
+      <a:lt2>
+        <a:srgbClr val="EEECE1"/>
+      </a:lt2>
+      <a:accent1>
+        <a:srgbClr val="4F81BD"/>
+      </a:accent1>
+      <a:accent2>
+        <a:srgbClr val="C0504D"/>
+      </a:accent2>
+      <a:accent3>
+        <a:srgbClr val="9BBB59"/>
+      </a:accent3>
+      <a:accent4>
+        <a:srgbClr val="8064A2"/>
+      </a:accent4>
+      <a:accent5>
+        <a:srgbClr val="4BACC6"/>
+      </a:accent5>
+      <a:accent6>
+        <a:srgbClr val="F79646"/>
+      </a:accent6>
+      <a:hlink>
+        <a:srgbClr val="0000FF"/>
+      </a:hlink>
+      <a:folHlink>
+        <a:srgbClr val="800080"/>
+      </a:folHlink>
+    </a:clrScheme>
+    <a:fontScheme name="Office">
+      <a:majorFont>
+        <a:latin typeface="Calibri"/>
+        <a:ea typeface=""/>
+        <a:cs typeface=""/>
+        <a:font script="Jpan" typeface="ＭＳ Ｐゴシック"/>
+        <a:font script="Hang" typeface="맑은 고딕"/>
+        <a:font script="Hans" typeface="宋体"/>
+        <a:font script="Hant" typeface="新細明體"/>
+        <a:font script="Arab" typeface="Times New Roman"/>
+        <a:font script="Hebr" typeface="Times New Roman"/>
+        <a:font script="Thai" typeface="Angsana New"/>
+        <a:font script="Ethi" typeface="Nyala"/>
+        <a:font script="Beng" typeface="Vrinda"/>
+        <a:font script="Gujr" typeface="Shruti"/>
+        <a:font script="Khmr" typeface="MoolBoran"/>
+        <a:font script="Knda" typeface="Tunga"/>
+        <a:font script="Guru" typeface="Raavi"/>
+        <a:font script="Cans" typeface="Euphemia"/>
+        <a:font script="Cher" typeface="Plantagenet Cherokee"/>
+        <a:font script="Yiii" typeface="Microsoft Yi Baiti"/>
+        <a:font script="Tibt" typeface="Microsoft Himalaya"/>
+        <a:font script="Thaa" typeface="MV Boli"/>
+        <a:font script="Deva" typeface="Mangal"/>
+        <a:font script="Telu" typeface="Gautami"/>
+        <a:font script="Taml" typeface="Latha"/>
+        <a:font script="Syrc" typeface="Estrangelo Edessa"/>
+        <a:font script="Orya" typeface="Kalinga"/>
+        <a:font script="Mlym" typeface="Kartika"/>
+        <a:font script="Laoo" typeface="DokChampa"/>
+        <a:font script="Sinh" typeface="Iskoola Pota"/>
+        <a:font script="Mong" typeface="Mongolian Baiti"/>
+        <a:font script="Viet" typeface="Times New Roman"/>
+        <a:font script="Uigh" typeface="Microsoft Uighur"/>
+        <a:font script="Geor" typeface="Sylfaen"/>
+      </a:majorFont>
+      <a:minorFont>
+        <a:latin typeface="Calibri"/>
+        <a:ea typeface=""/>
+        <a:cs typeface=""/>
+        <a:font script="Jpan" typeface="ＭＳ Ｐゴシック"/>
+        <a:font script="Hang" typeface="맑은 고딕"/>
+        <a:font script="Hans" typeface="宋体"/>
+        <a:font script="Hant" typeface="新細明體"/>
+        <a:font script="Arab" typeface="Arial"/>
+        <a:font script="Hebr" typeface="Arial"/>
+        <a:font script="Thai" typeface="Cordia New"/>
+        <a:font script="Ethi" typeface="Nyala"/>
+        <a:font script="Beng" typeface="Vrinda"/>
+        <a:font script="Gujr" typeface="Shruti"/>
+        <a:font script="Khmr" typeface="DaunPenh"/>
+        <a:font script="Knda" typeface="Tunga"/>
+        <a:font script="Guru" typeface="Raavi"/>
+        <a:font script="Cans" typeface="Euphemia"/>
+        <a:font script="Cher" typeface="Plantagenet Cherokee"/>
+        <a:font script="Yiii" typeface="Microsoft Yi Baiti"/>
+        <a:font script="Tibt" typeface="Microsoft Himalaya"/>
+        <a:font script="Thaa" typeface="MV Boli"/>
+        <a:font script="Deva" typeface="Mangal"/>
+        <a:font script="Telu" typeface="Gautami"/>
+        <a:font script="Taml" typeface="Latha"/>
+        <a:font script="Syrc" typeface="Estrangelo Edessa"/>
+        <a:font script="Orya" typeface="Kalinga"/>
+        <a:font script="Mlym" typeface="Kartika"/>
+        <a:font script="Laoo" typeface="DokChampa"/>
+        <a:font script="Sinh" typeface="Iskoola Pota"/>
+        <a:font script="Mong" typeface="Mongolian Baiti"/>
+        <a:font script="Viet" typeface="Arial"/>
+        <a:font script="Uigh" typeface="Microsoft Uighur"/>
+        <a:font script="Geor" typeface="Sylfaen"/>
+      </a:minorFont>
+    </a:fontScheme>
+    <a:fmtScheme name="Office">
+      <a:fillStyleLst>
+        <a:solidFill>
+          <a:schemeClr val="phClr"/>
+        </a:solidFill>
+        <a:gradFill rotWithShape="1">
+          <a:gsLst>
+            <a:gs pos="0">
+              <a:schemeClr val="phClr">
+                <a:tint val="50000"/>
+                <a:satMod val="300000"/>
+              </a:schemeClr>
+            </a:gs>
+            <a:gs pos="35000">
+              <a:schemeClr val="phClr">
+                <a:tint val="37000"/>
+                <a:satMod val="300000"/>
+              </a:schemeClr>
+            </a:gs>
+            <a:gs pos="100000">
+              <a:schemeClr val="phClr">
+                <a:tint val="15000"/>
+                <a:satMod val="350000"/>
+              </a:schemeClr>
+            </a:gs>
+          </a:gsLst>
+          <a:lin ang="16200000" scaled="1"/>
+        </a:gradFill>
+        <a:gradFill rotWithShape="1">
+          <a:gsLst>
+            <a:gs pos="0">
+              <a:schemeClr val="phClr">
+                <a:tint val="100000"/>
+                <a:shade val="100000"/>
+                <a:satMod val="130000"/>
+              </a:schemeClr>
+            </a:gs>
+            <a:gs pos="100000">
+              <a:schemeClr val="phClr">
+                <a:tint val="50000"/>
+                <a:shade val="100000"/>
+                <a:satMod val="350000"/>
+              </a:schemeClr>
+            </a:gs>
+          </a:gsLst>
+          <a:lin ang="16200000" scaled="0"/>
+        </a:gradFill>
+      </a:fillStyleLst>
+      <a:lnStyleLst>
+        <a:ln w="9525" cap="flat" cmpd="sng" algn="ctr">
+          <a:solidFill>
+            <a:schemeClr val="phClr">
+              <a:shade val="95000"/>
+              <a:satMod val="105000"/>
+            </a:schemeClr>
+          </a:solidFill>
+          <a:prstDash val="solid"/>
+        </a:ln>
+        <a:ln w="25400" cap="flat" cmpd="sng" algn="ctr">
+          <a:solidFill>
+            <a:schemeClr val="phClr"/>
+          </a:solidFill>
+          <a:prstDash val="solid"/>
+        </a:ln>
+        <a:ln w="38100" cap="flat" cmpd="sng" algn="ctr">
+          <a:solidFill>
+            <a:schemeClr val="phClr"/>
+          </a:solidFill>
+          <a:prstDash val="solid"/>
+        </a:ln>
+      </a:lnStyleLst>
+      <a:effectStyleLst>
+        <a:effectStyle>
+          <a:effectLst>
+            <a:outerShdw blurRad="40000" dist="20000" dir="5400000" rotWithShape="0">
+              <a:srgbClr val="000000">
+                <a:alpha val="38000"/>
+              </a:srgbClr>
+            </a:outerShdw>
+          </a:effectLst>
+        </a:effectStyle>
+        <a:effectStyle>
+          <a:effectLst>
+            <a:outerShdw blurRad="40000" dist="23000" dir="5400000" rotWithShape="0">
+              <a:srgbClr val="000000">
+                <a:alpha val="35000"/>
+              </a:srgbClr>
+            </a:outerShdw>
+          </a:effectLst>
+        </a:effectStyle>
+        <a:effectStyle>
+          <a:effectLst>
+            <a:outerShdw blurRad="40000" dist="23000" dir="5400000" rotWithShape="0">
+              <a:srgbClr val="000000">
+                <a:alpha val="35000"/>
+              </a:srgbClr>
+            </a:outerShdw>
+          </a:effectLst>
+          <a:scene3d>
+            <a:camera prst="orthographicFront">
+              <a:rot lat="0" lon="0" rev="0"/>
+            </a:camera>
+            <a:lightRig rig="threePt" dir="t">
+              <a:rot lat="0" lon="0" rev="1200000"/>
+            </a:lightRig>
+          </a:scene3d>
+          <a:sp3d>
+            <a:bevelT w="63500" h="25400"/>
+          </a:sp3d>
+        </a:effectStyle>
+      </a:effectStyleLst>
+      <a:bgFillStyleLst>
+        <a:solidFill>
+          <a:schemeClr val="phClr"/>
+        </a:solidFill>
+        <a:gradFill rotWithShape="1">
+          <a:gsLst>
+            <a:gs pos="0">
+              <a:schemeClr val="phClr">
+                <a:tint val="40000"/>
+                <a:satMod val="350000"/>
+              </a:schemeClr>
+            </a:gs>
+            <a:gs pos="40000">
+              <a:schemeClr val="phClr">
+                <a:tint val="45000"/>
+                <a:shade val="99000"/>
+                <a:satMod val="350000"/>
+              </a:schemeClr>
+            </a:gs>
+            <a:gs pos="100000">
+              <a:schemeClr val="phClr">
+                <a:shade val="20000"/>
+                <a:satMod val="255000"/>
+              </a:schemeClr>
+            </a:gs>
+          </a:gsLst>
+          <a:path path="circle">
+            <a:fillToRect l="50000" t="-80000" r="50000" b="180000"/>
+          </a:path>
+        </a:gradFill>
+        <a:gradFill rotWithShape="1">
+          <a:gsLst>
+            <a:gs pos="0">
+              <a:schemeClr val="phClr">
+                <a:tint val="80000"/>
+                <a:satMod val="300000"/>
+              </a:schemeClr>
+            </a:gs>
+            <a:gs pos="100000">
+              <a:schemeClr val="phClr">
+                <a:shade val="30000"/>
+                <a:satMod val="200000"/>
+              </a:schemeClr>
+            </a:gs>
+          </a:gsLst>
+          <a:path path="circle">
+            <a:fillToRect l="50000" t="50000" r="50000" b="50000"/>
+          </a:path>
+        </a:gradFill>
+      </a:bgFillStyleLst>
+    </a:fmtScheme>
+  </a:themeElements>
+  <a:objectDefaults>
+    <a:spDef>
+      <a:spPr/>
+      <a:bodyPr/>
+      <a:lstStyle/>
+      <a:style>
+        <a:lnRef idx="1">
+          <a:schemeClr val="accent1"/>
+        </a:lnRef>
+        <a:fillRef idx="3">
+          <a:schemeClr val="accent1"/>
+        </a:fillRef>
+        <a:effectRef idx="2">
+          <a:schemeClr val="accent1"/>
+        </a:effectRef>
+        <a:fontRef idx="minor">
+          <a:schemeClr val="lt1"/>
+        </a:fontRef>
+      </a:style>
+    </a:spDef>
+    <a:lnDef>
+      <a:spPr/>
+      <a:bodyPr/>
+      <a:lstStyle/>
+      <a:style>
+        <a:lnRef idx="2">
+          <a:schemeClr val="accent1"/>
+        </a:lnRef>
+        <a:fillRef idx="0">
+          <a:schemeClr val="accent1"/>
+        </a:fillRef>
+        <a:effectRef idx="1">
+          <a:schemeClr val="accent1"/>
+        </a:effectRef>
+        <a:fontRef idx="minor">
+          <a:schemeClr val="tx1"/>
+        </a:fontRef>
+      </a:style>
+    </a:lnDef>
+  </a:objectDefaults>
+  <a:extraClrSchemeLst/>
+</a:theme>
 </file>
--- a/S1-CL2-Cloud-Disaster-Recovery/delivery/topic_02/Topic_02_Slides.pptx
+++ b/S1-CL2-Cloud-Disaster-Recovery/delivery/topic_02/Topic_02_Slides.pptx
@@ -23,6 +23,13 @@
     <p:sldId id="271" r:id="rId23"/>
     <p:sldId id="272" r:id="rId24"/>
     <p:sldId id="273" r:id="rId25"/>
+    <p:sldId id="274" r:id="rId26"/>
+    <p:sldId id="275" r:id="rId27"/>
+    <p:sldId id="276" r:id="rId28"/>
+    <p:sldId id="277" r:id="rId29"/>
+    <p:sldId id="278" r:id="rId30"/>
+    <p:sldId id="279" r:id="rId31"/>
+    <p:sldId id="280" r:id="rId32"/>
   </p:sldIdLst>
   <p:sldSz cx="12191695" cy="6858000" type="screen4x3"/>
   <p:notesSz cx="6858000" cy="9144000"/>
@@ -519,42 +526,17 @@
           <a:lstStyle/>
           <a:p>
             <a:r>
-              <a:t>Frame the Topic as the second design half — the microservice that plugs into Topic 1's web-scale site. Set the job and the boundary; don't teach serverless yet.</a:t>
-            </a:r>
-          </a:p>
-          <a:p>
-            <a:r>
-              <a:t>• First bullet: callback to Topic 1 — they designed the web-scale site; today they design the serverless audit-log MICROSERVICE that plugs into it. Two halves of one Solution Design (AT1 Part A).</a:t>
-            </a:r>
-          </a:p>
-          <a:p>
-            <a:r>
-              <a:t>• Second bullet: name the microservice's reason to exist — it records India-cohort access events to a RESIDENCY-COMPLIANT store. This is the localisation hook straight from the requirements, not an add-on.</a:t>
-            </a:r>
-          </a:p>
-          <a:p>
-            <a:r>
-              <a:t>• Third bullet: define serverless plainly — no servers to manage, event-driven, scales with demand, pay per request. Stress "event-driven": the site emits events, the service reacts.</a:t>
-            </a:r>
-          </a:p>
-          <a:p>
-            <a:r>
-              <a:t>• Hold the boundary (last bullet): DESIGN ONLY, to the supplied requirements — the build is AT2 (Topic 8). On paper today.</a:t>
-            </a:r>
-          </a:p>
-          <a:p>
-            <a:r>
-              <a:t>Misconception to pre-empt: "serverless means there are no servers." No — there are servers; YOU just don't manage or provision them. The shift is operational responsibility, not physics.</a:t>
-            </a:r>
-          </a:p>
-          <a:p>
-            <a:r>
-              <a:t>Question to pose: "The website already works — why build a SEPARATE service just to record access events?" (single responsibility, independent scale, and a residency-resident store the site itself needn't host).</a:t>
-            </a:r>
-          </a:p>
-          <a:p>
-            <a:r>
-              <a:t>UoC/AT1 tie: this Topic develops [ICTCLD503 PC 2.1]–[ICTCLD503 PC 2.3] plus [ICTCLD503 PE 2] and [ICTCLD503 KE 4], evidenced in AT1 Part A (Solution Design, microservice sections) and the Part A KE appendix.</a:t>
+              <a:t>Second design half — today runs workbook tasks 15 to 19, then rehearses the Part A knowledge questions.</a:t>
+            </a:r>
+          </a:p>
+          <a:p>
+            <a:r>
+              <a:t>Stress event-driven: the platform emits events, the service reacts.</a:t>
+            </a:r>
+          </a:p>
+          <a:p>
+            <a:r>
+              <a:t>Misconception: serverless doesn't mean no servers — it means the operational responsibility isn't yours.</a:t>
             </a:r>
           </a:p>
         </p:txBody>
@@ -624,42 +606,12 @@
           <a:lstStyle/>
           <a:p>
             <a:r>
-              <a:t>The keystone slide — the target architecture, on the diagram. Trace the flow live, stage by stage, and tie each stage back to a principle from the last slide.</a:t>
-            </a:r>
-          </a:p>
-          <a:p>
-            <a:r>
-              <a:t>• Walk the flow left to right: website webhook → API gateway → queue → function → NoSQL datastore. Five stages, one event's journey; say each stage's job as you pass it.</a:t>
-            </a:r>
-          </a:p>
-          <a:p>
-            <a:r>
-              <a:t>• Second bullet: the website knows ONLY the webhook, and each stage is independently SCALABLE and REPLACEABLE — loose coupling made visible. Any stage can change without the others knowing.</a:t>
-            </a:r>
-          </a:p>
-          <a:p>
-            <a:r>
-              <a:t>• Third bullet (accent it): the store sits in the India region (ap-south-1) so the access logs are RESIDENT BY CONSTRUCTION — residency isn't a policy you enforce later, it's where you put the box.</a:t>
-            </a:r>
-          </a:p>
-          <a:p>
-            <a:r>
-              <a:t>• Point out this is a DESIGN artefact — boxes and a contract, not a built system. The .drawio is student-editable; they adapt this shape to their practice scenario.</a:t>
-            </a:r>
-          </a:p>
-          <a:p>
-            <a:r>
-              <a:t>Misconception to pre-empt: "the queue is an optional extra." No — the queue is what makes producer and consumer independent; remove it and a slow logger backs up the website. Every stage answers a principle.</a:t>
-            </a:r>
-          </a:p>
-          <a:p>
-            <a:r>
-              <a:t>Question to pose: "Point at one stage and tell me which principle it delivers — cohesion, coupling, or persistence." — go round the room; every box should trace to a principle.</a:t>
-            </a:r>
-          </a:p>
-          <a:p>
-            <a:r>
-              <a:t>UoC/AT1 tie: [ICTCLD503 PC 2.3] (design the architecture using cloud services) + [ICTCLD503 PE 2] (design at least one microservice architecture for a simple web app) — this diagram is the PE 2 evidence.</a:t>
+              <a:t>Trace the flow stage by stage; each stage delivers a principle from the previous slide.</a:t>
+            </a:r>
+          </a:p>
+          <a:p>
+            <a:r>
+              <a:t>A worked example to adapt, not copy — workbook task 17 asks for their own drawing.</a:t>
             </a:r>
           </a:p>
         </p:txBody>
@@ -729,37 +681,12 @@
           <a:lstStyle/>
           <a:p>
             <a:r>
-              <a:t>Teach the CONTRACT — the interface the whole loosely-coupled design hinges on. Short and sharp; this is the "and nothing else" idea.</a:t>
-            </a:r>
-          </a:p>
-          <a:p>
-            <a:r>
-              <a:t>• First bullet: define the webhook payload CONTRACT — the fields the website sends and what each MEANS. A contract is a shared, explicit agreement, not an implied one.</a:t>
-            </a:r>
-          </a:p>
-          <a:p>
-            <a:r>
-              <a:t>• Second bullet: VERSION it and VALIDATE it — producer and consumer agree on THIS and nothing else. Versioning lets the contract change safely; validation rejects malformed events at the door.</a:t>
-            </a:r>
-          </a:p>
-          <a:p>
-            <a:r>
-              <a:t>• Third bullet (accent it): a clear contract is what LETS THE TWO SIDES EVOLVE INDEPENDENTLY — the payoff of loose coupling. The site team and the logger team can work without meetings.</a:t>
-            </a:r>
-          </a:p>
-          <a:p>
-            <a:r>
-              <a:t>Misconception to pre-empt: "the contract is just documentation you write at the end." No — it's the design's load-bearing interface; you define it FIRST (contract-first), and both sides build to it. It's an agreement, not a write-up.</a:t>
-            </a:r>
-          </a:p>
-          <a:p>
-            <a:r>
-              <a:t>Question to pose: "The website team wants to add a new field to the event — how does the contract let them do that without breaking the logger?" (versioning + the consumer validating/ignoring unknown fields — evolve independently).</a:t>
-            </a:r>
-          </a:p>
-          <a:p>
-            <a:r>
-              <a:t>UoC/AT1 tie: [ICTCLD503 PC 2.3] (design the architecture including the interface/integration contract) + [ICTCLD503 KE 4] — AT1 Part A A10/A12; the contract is the interface half of the design.</a:t>
+              <a:t>Workbook task 18's subject. Contract-first: it is defined before either side builds, not documented after.</a:t>
+            </a:r>
+          </a:p>
+          <a:p>
+            <a:r>
+              <a:t>Question to pose: the platform team adds a field — how does versioning stop that breaking the logger?</a:t>
             </a:r>
           </a:p>
         </p:txBody>
@@ -829,57 +756,237 @@
           <a:lstStyle/>
           <a:p>
             <a:r>
-              <a:t>Facilitation — the biggest activity in the Topic: students draw their OWN microservice architecture and write its contract for the practice scenario. The core AT1 Part A microservice rehearsal.</a:t>
-            </a:r>
-          </a:p>
-          <a:p>
-            <a:r>
-              <a:t>Tell students: "Using the target architecture as a model — not a template to copy — design your microservice architecture for the practice scenario: cohesive, loosely coupled, persistent, with API and messaging. Then define the webhook integration contract."</a:t>
-            </a:r>
-          </a:p>
-          <a:p>
-            <a:r>
-              <a:t>Steps:</a:t>
-            </a:r>
-          </a:p>
-          <a:p>
-            <a:r>
-              <a:t>1. Draw the flow: ingress → buffer → compute → persistent store, each stage independently scalable.</a:t>
-            </a:r>
-          </a:p>
-          <a:p>
-            <a:r>
-              <a:t>2. Show high cohesion (one job) and loose coupling (the queue seam); place the store to honour residency.</a:t>
-            </a:r>
-          </a:p>
-          <a:p>
-            <a:r>
-              <a:t>3. Define the webhook contract — the fields, their meanings, and a version.</a:t>
-            </a:r>
-          </a:p>
-          <a:p>
-            <a:r>
-              <a:t>Must produce: a labelled architecture sketch (their own .drawio or on paper) PLUS a written payload contract.</a:t>
-            </a:r>
-          </a:p>
-          <a:p>
-            <a:r>
-              <a:t>Timing: ~30 min. Where they get stuck: they redraw the teaching diagram verbatim (push them to adapt it to THEIR scenario), they forget the contract (half the mark is the interface), and they omit the queue (ask "where's your decoupling seam?").</a:t>
-            </a:r>
-          </a:p>
-          <a:p>
-            <a:r>
-              <a:t>Share-back prompt: "Show your contract's fields and where the queue sits" — surface both loose coupling and the interface.</a:t>
-            </a:r>
-          </a:p>
-          <a:p>
-            <a:r>
-              <a:t>No-leakage note: practice scenario only (comparable, not identical); AT1 evidences the same design skill on the assessed system — keep them on the practice brief.</a:t>
-            </a:r>
-          </a:p>
-          <a:p>
-            <a:r>
-              <a:t>UoC/AT1 tie: [ICTCLD503 PC 2.3] · [ICTCLD503 PE 2] · [ICTCLD503 KE 4] — the full architecture-and-contract core of AT1 Part A's microservice strand.</a:t>
+              <a:t>Activity = practice workbook tasks 17–18.</a:t>
+            </a:r>
+          </a:p>
+          <a:p>
+            <a:r>
+              <a:t>The two common misses: redrawing the teaching diagram verbatim, and forgetting the queue seam.</a:t>
+            </a:r>
+          </a:p>
+        </p:txBody>
+      </p:sp>
+      <p:sp>
+        <p:nvSpPr>
+          <p:cNvPr id="4" name="Slide Number Placeholder 3"/>
+          <p:cNvSpPr>
+            <a:spLocks noGrp="1"/>
+          </p:cNvSpPr>
+          <p:nvPr>
+            <p:ph type="sldNum" idx="5" sz="quarter"/>
+          </p:nvPr>
+        </p:nvSpPr>
+        <p:spPr/>
+      </p:sp>
+    </p:spTree>
+  </p:cSld>
+  <p:clrMapOvr>
+    <a:masterClrMapping/>
+  </p:clrMapOvr>
+</p:notes>
+</file>
+
+<file path=ppt/notesSlides/notesSlide13.xml><?xml version="1.0" encoding="utf-8"?>
+<p:notes xmlns:a="http://schemas.openxmlformats.org/drawingml/2006/main" xmlns:p="http://schemas.openxmlformats.org/presentationml/2006/main" xmlns:r="http://schemas.openxmlformats.org/officeDocument/2006/relationships">
+  <p:cSld>
+    <p:spTree>
+      <p:nvGrpSpPr>
+        <p:cNvPr id="1" name=""/>
+        <p:cNvGrpSpPr/>
+        <p:nvPr/>
+      </p:nvGrpSpPr>
+      <p:grpSpPr>
+        <a:xfrm>
+          <a:off x="0" y="0"/>
+          <a:ext cx="0" cy="0"/>
+          <a:chOff x="0" y="0"/>
+          <a:chExt cx="0" cy="0"/>
+        </a:xfrm>
+      </p:grpSpPr>
+      <p:sp>
+        <p:nvSpPr>
+          <p:cNvPr id="2" name="Slide Image Placeholder 1"/>
+          <p:cNvSpPr>
+            <a:spLocks noGrp="1"/>
+          </p:cNvSpPr>
+          <p:nvPr>
+            <p:ph type="sldImg" idx="2"/>
+          </p:nvPr>
+        </p:nvSpPr>
+        <p:spPr/>
+      </p:sp>
+      <p:sp>
+        <p:nvSpPr>
+          <p:cNvPr id="3" name="Notes Placeholder 2"/>
+          <p:cNvSpPr>
+            <a:spLocks noGrp="1"/>
+          </p:cNvSpPr>
+          <p:nvPr>
+            <p:ph type="body" idx="3" sz="quarter"/>
+          </p:nvPr>
+        </p:nvSpPr>
+        <p:spPr/>
+        <p:txBody>
+          <a:bodyPr/>
+          <a:lstStyle/>
+          <a:p>
+            <a:r>
+              <a:t>Workbook task 19 — the written argument, same shape as the web-scale justification in Topic 1.</a:t>
+            </a:r>
+          </a:p>
+          <a:p>
+            <a:r>
+              <a:t>"Because it is best practice" is not a justification; requirement, option, why.</a:t>
+            </a:r>
+          </a:p>
+        </p:txBody>
+      </p:sp>
+      <p:sp>
+        <p:nvSpPr>
+          <p:cNvPr id="4" name="Slide Number Placeholder 3"/>
+          <p:cNvSpPr>
+            <a:spLocks noGrp="1"/>
+          </p:cNvSpPr>
+          <p:nvPr>
+            <p:ph type="sldNum" idx="5" sz="quarter"/>
+          </p:nvPr>
+        </p:nvSpPr>
+        <p:spPr/>
+      </p:sp>
+    </p:spTree>
+  </p:cSld>
+  <p:clrMapOvr>
+    <a:masterClrMapping/>
+  </p:clrMapOvr>
+</p:notes>
+</file>
+
+<file path=ppt/notesSlides/notesSlide14.xml><?xml version="1.0" encoding="utf-8"?>
+<p:notes xmlns:a="http://schemas.openxmlformats.org/drawingml/2006/main" xmlns:p="http://schemas.openxmlformats.org/presentationml/2006/main" xmlns:r="http://schemas.openxmlformats.org/officeDocument/2006/relationships">
+  <p:cSld>
+    <p:spTree>
+      <p:nvGrpSpPr>
+        <p:cNvPr id="1" name=""/>
+        <p:cNvGrpSpPr/>
+        <p:nvPr/>
+      </p:nvGrpSpPr>
+      <p:grpSpPr>
+        <a:xfrm>
+          <a:off x="0" y="0"/>
+          <a:ext cx="0" cy="0"/>
+          <a:chOff x="0" y="0"/>
+          <a:chExt cx="0" cy="0"/>
+        </a:xfrm>
+      </p:grpSpPr>
+      <p:sp>
+        <p:nvSpPr>
+          <p:cNvPr id="2" name="Slide Image Placeholder 1"/>
+          <p:cNvSpPr>
+            <a:spLocks noGrp="1"/>
+          </p:cNvSpPr>
+          <p:nvPr>
+            <p:ph type="sldImg" idx="2"/>
+          </p:nvPr>
+        </p:nvSpPr>
+        <p:spPr/>
+      </p:sp>
+      <p:sp>
+        <p:nvSpPr>
+          <p:cNvPr id="3" name="Notes Placeholder 2"/>
+          <p:cNvSpPr>
+            <a:spLocks noGrp="1"/>
+          </p:cNvSpPr>
+          <p:nvPr>
+            <p:ph type="body" idx="3" sz="quarter"/>
+          </p:nvPr>
+        </p:nvSpPr>
+        <p:spPr/>
+        <p:txBody>
+          <a:bodyPr/>
+          <a:lstStyle/>
+          <a:p>
+            <a:r>
+              <a:t>The assessment workbook carries Q1–Q4 at the end of Part A; the practice workbook carries none, so rehearse with the assessment's questions against the practice design.</a:t>
+            </a:r>
+          </a:p>
+          <a:p>
+            <a:r>
+              <a:t>The failure mode is textbook definitions — push every answer back to their own tables and drawings.</a:t>
+            </a:r>
+          </a:p>
+        </p:txBody>
+      </p:sp>
+      <p:sp>
+        <p:nvSpPr>
+          <p:cNvPr id="4" name="Slide Number Placeholder 3"/>
+          <p:cNvSpPr>
+            <a:spLocks noGrp="1"/>
+          </p:cNvSpPr>
+          <p:nvPr>
+            <p:ph type="sldNum" idx="5" sz="quarter"/>
+          </p:nvPr>
+        </p:nvSpPr>
+        <p:spPr/>
+      </p:sp>
+    </p:spTree>
+  </p:cSld>
+  <p:clrMapOvr>
+    <a:masterClrMapping/>
+  </p:clrMapOvr>
+</p:notes>
+</file>
+
+<file path=ppt/notesSlides/notesSlide15.xml><?xml version="1.0" encoding="utf-8"?>
+<p:notes xmlns:a="http://schemas.openxmlformats.org/drawingml/2006/main" xmlns:p="http://schemas.openxmlformats.org/presentationml/2006/main" xmlns:r="http://schemas.openxmlformats.org/officeDocument/2006/relationships">
+  <p:cSld>
+    <p:spTree>
+      <p:nvGrpSpPr>
+        <p:cNvPr id="1" name=""/>
+        <p:cNvGrpSpPr/>
+        <p:nvPr/>
+      </p:nvGrpSpPr>
+      <p:grpSpPr>
+        <a:xfrm>
+          <a:off x="0" y="0"/>
+          <a:ext cx="0" cy="0"/>
+          <a:chOff x="0" y="0"/>
+          <a:chExt cx="0" cy="0"/>
+        </a:xfrm>
+      </p:grpSpPr>
+      <p:sp>
+        <p:nvSpPr>
+          <p:cNvPr id="2" name="Slide Image Placeholder 1"/>
+          <p:cNvSpPr>
+            <a:spLocks noGrp="1"/>
+          </p:cNvSpPr>
+          <p:nvPr>
+            <p:ph type="sldImg" idx="2"/>
+          </p:nvPr>
+        </p:nvSpPr>
+        <p:spPr/>
+      </p:sp>
+      <p:sp>
+        <p:nvSpPr>
+          <p:cNvPr id="3" name="Notes Placeholder 2"/>
+          <p:cNvSpPr>
+            <a:spLocks noGrp="1"/>
+          </p:cNvSpPr>
+          <p:nvPr>
+            <p:ph type="body" idx="3" sz="quarter"/>
+          </p:nvPr>
+        </p:nvSpPr>
+        <p:spPr/>
+        <p:txBody>
+          <a:bodyPr/>
+          <a:lstStyle/>
+          <a:p>
+            <a:r>
+              <a:t>Activity = practice workbook task 19 + assessment Q1–Q4 rehearsed on the practice design.</a:t>
+            </a:r>
+          </a:p>
+          <a:p>
+            <a:r>
+              <a:t>Listen for answers that quote their own design decisions rather than recite definitions.</a:t>
             </a:r>
           </a:p>
         </p:txBody>
@@ -949,37 +1056,12 @@
           <a:lstStyle/>
           <a:p>
             <a:r>
-              <a:t>Install the microservice concept — vendor-neutral, no AWS yet. Keep it tight; it's the definition the whole Topic builds on.</a:t>
-            </a:r>
-          </a:p>
-          <a:p>
-            <a:r>
-              <a:t>• First bullet: a microservice does ONE thing well — small, independently deployable, single responsibility. Stress "single responsibility": that's the test for whether something should be its own service.</a:t>
-            </a:r>
-          </a:p>
-          <a:p>
-            <a:r>
-              <a:t>• Second bullet: it OWNS its data and exposes a NARROW interface — others talk to it only through that contract, never reach into its data directly. This is what keeps services decoupled.</a:t>
-            </a:r>
-          </a:p>
-          <a:p>
-            <a:r>
-              <a:t>• Third bullet: right-sized — big enough to be useful, small enough to reason about and scale on its own. Not "as small as possible"; sized to a responsibility.</a:t>
-            </a:r>
-          </a:p>
-          <a:p>
-            <a:r>
-              <a:t>Misconception to pre-empt: "microservices = lots of tiny services always." No — the win is single-responsibility and independent deploy/scale, not smallness for its own sake; over-splitting adds coupling and operational cost.</a:t>
-            </a:r>
-          </a:p>
-          <a:p>
-            <a:r>
-              <a:t>Question to pose: "If another system needs this service's data, how should it get it?" (through the service's interface/contract — never by reaching into its store).</a:t>
-            </a:r>
-          </a:p>
-          <a:p>
-            <a:r>
-              <a:t>UoC/AT1 tie: [ICTCLD503 PC 2.1] (identify microservices and the data transactions to meet business needs) — the concept students apply to the audit log next.</a:t>
+              <a:t>The definition the whole Topic builds on — single responsibility is the test for whether something is its own service.</a:t>
+            </a:r>
+          </a:p>
+          <a:p>
+            <a:r>
+              <a:t>If another system needs this service's data, it goes through the interface — never into the store directly.</a:t>
             </a:r>
           </a:p>
         </p:txBody>
@@ -1049,37 +1131,12 @@
           <a:lstStyle/>
           <a:p>
             <a:r>
-              <a:t>Make the concept concrete — THIS microservice, its single job. This is the design's first decision: what the service is responsible for.</a:t>
-            </a:r>
-          </a:p>
-          <a:p>
-            <a:r>
-              <a:t>• First bullet: the one job — capture each India-cohort access/enquiry event the website EMITS and record it DURABLY. One responsibility, stated as a sentence.</a:t>
-            </a:r>
-          </a:p>
-          <a:p>
-            <a:r>
-              <a:t>• Second bullet: the website is the PRODUCER; it knows ONLY the webhook contract, not the store behind it. This is the decoupling from the last slide, applied — the site can't and shouldn't know how the log is stored.</a:t>
-            </a:r>
-          </a:p>
-          <a:p>
-            <a:r>
-              <a:t>• Third bullet (accent it): RESIDENCY — India-cohort access logs land in an India-resident store (ap-south-1) per the requirements. This is the whole reason the service exists on its own; residency is an input constraint, not a design choice.</a:t>
-            </a:r>
-          </a:p>
-          <a:p>
-            <a:r>
-              <a:t>Misconception to pre-empt: "the website should just write the log itself." No — separating it gives single responsibility, independent scale, and lets the log live in a residency-compliant store the site needn't host. Coupling them would defeat all three.</a:t>
-            </a:r>
-          </a:p>
-          <a:p>
-            <a:r>
-              <a:t>Question to pose: "Why does the website only need to know the webhook, and not where the log ends up?" (loose coupling — the store can change, move region, or scale without touching the site).</a:t>
-            </a:r>
-          </a:p>
-          <a:p>
-            <a:r>
-              <a:t>UoC/AT1 tie: [ICTCLD503 PC 2.1] (identify the microservice to meet the business need) — AT1 Part A A8; residency is the business need it answers.</a:t>
+              <a:t>Workbook task 15's subject made concrete. The service's reason to exist is the residency need.</a:t>
+            </a:r>
+          </a:p>
+          <a:p>
+            <a:r>
+              <a:t>Question to pose: why build a separate service just to record events? (single job, independent scale, resident store).</a:t>
             </a:r>
           </a:p>
         </p:txBody>
@@ -1149,37 +1206,12 @@
           <a:lstStyle/>
           <a:p>
             <a:r>
-              <a:t>Teach the DATA-TRANSACTION half of C1 — what data moves through the service and how. Short and precise; this defines the store's shape.</a:t>
-            </a:r>
-          </a:p>
-          <a:p>
-            <a:r>
-              <a:t>• First bullet: ONE transaction — append an access event (who / what / when), WRITE-ONCE, never updated. An audit log is immutable by nature; you add records, you don't edit them.</a:t>
-            </a:r>
-          </a:p>
-          <a:p>
-            <a:r>
-              <a:t>• Second bullet: append-only buys you IDEMPOTENT writes (re-sending the same event is safe) and simple, high-scale READS for retrieval. The data pattern makes scaling trivial — no update contention.</a:t>
-            </a:r>
-          </a:p>
-          <a:p>
-            <a:r>
-              <a:t>• Third bullet: identify each transaction by the BUSINESS NEED it meets — here the CERT-In access-log obligation. A transaction exists because a requirement demands it, not because it's technically possible.</a:t>
-            </a:r>
-          </a:p>
-          <a:p>
-            <a:r>
-              <a:t>Misconception to pre-empt: "we'll need update and delete too." No — an audit log is append-only by design; mutability would break its evidentiary value. Fewer transactions, precisely justified, is the stronger design.</a:t>
-            </a:r>
-          </a:p>
-          <a:p>
-            <a:r>
-              <a:t>Question to pose: "Why is 'write-once, never updated' actually an advantage for scale and integrity?" (idempotent writes, no update contention, and a tamper-evident record).</a:t>
-            </a:r>
-          </a:p>
-          <a:p>
-            <a:r>
-              <a:t>UoC/AT1 tie: [ICTCLD503 PC 2.1] (data transactions to meet business needs) — AT1 Part A A8; each transaction traced to its business/compliance driver.</a:t>
+              <a:t>The data pattern defines the store's shape later. An audit log is immutable by nature — mutability would break its evidentiary value.</a:t>
+            </a:r>
+          </a:p>
+          <a:p>
+            <a:r>
+              <a:t>Press transaction-to-need traceability; the workbook table asks for it.</a:t>
             </a:r>
           </a:p>
         </p:txBody>
@@ -1249,57 +1281,12 @@
           <a:lstStyle/>
           <a:p>
             <a:r>
-              <a:t>Facilitation — the C1 practice: identify the service(s) and their transactions on the PRACTICE scenario. Rehearses AT1 Part A A8 in miniature.</a:t>
-            </a:r>
-          </a:p>
-          <a:p>
-            <a:r>
-              <a:t>Tell students: "On the practice scenario, identify the microservice(s) you need and, for each, the data transaction(s) it handles — then state the business need behind every transaction."</a:t>
-            </a:r>
-          </a:p>
-          <a:p>
-            <a:r>
-              <a:t>Steps (put on the board):</a:t>
-            </a:r>
-          </a:p>
-          <a:p>
-            <a:r>
-              <a:t>1. Identify the microservice(s) — one responsibility each; name what each is FOR.</a:t>
-            </a:r>
-          </a:p>
-          <a:p>
-            <a:r>
-              <a:t>2. For each, list its data transaction(s) — what data moves, in which direction (append / read).</a:t>
-            </a:r>
-          </a:p>
-          <a:p>
-            <a:r>
-              <a:t>3. Against every transaction, write the business need it meets — no orphan transactions.</a:t>
-            </a:r>
-          </a:p>
-          <a:p>
-            <a:r>
-              <a:t>Must produce: a short written list of microservice(s) with their transactions, each transaction tied to a business need.</a:t>
-            </a:r>
-          </a:p>
-          <a:p>
-            <a:r>
-              <a:t>Timing: ~20 min. Where they get stuck: they design one big service that does everything (push single-responsibility — split by job), and they list transactions with no business need behind them (make them name the requirement).</a:t>
-            </a:r>
-          </a:p>
-          <a:p>
-            <a:r>
-              <a:t>Share-back prompt: "Name one transaction and the exact business need it meets" — take two or three; listen for transaction→need traceability.</a:t>
-            </a:r>
-          </a:p>
-          <a:p>
-            <a:r>
-              <a:t>No-leakage note: this runs on the PRACTICE scenario (comparable, not identical); AT1 evidences the same identify-the-service skill on the assessed system — keep them on the practice brief.</a:t>
-            </a:r>
-          </a:p>
-          <a:p>
-            <a:r>
-              <a:t>UoC/AT1 tie: [ICTCLD503 PC 2.1] — identify microservices + data transactions to business needs, the opening move of AT1 Part A's microservice strand.</a:t>
+              <a:t>Activity = practice workbook task 15.</a:t>
+            </a:r>
+          </a:p>
+          <a:p>
+            <a:r>
+              <a:t>Watch for one big service that does everything — push single responsibility.</a:t>
             </a:r>
           </a:p>
         </p:txBody>
@@ -1369,42 +1356,12 @@
           <a:lstStyle/>
           <a:p>
             <a:r>
-              <a:t>Open C2 with the serverless toolkit — the four building-block TYPES, still vendor-neutral (name AWS only as the example). One block per line.</a:t>
-            </a:r>
-          </a:p>
-          <a:p>
-            <a:r>
-              <a:t>• COMPUTE: a function service runs your code ON DEMAND, no servers to manage (e.g. AWS Lambda). It runs when an event arrives, then stops — you pay per invocation.</a:t>
-            </a:r>
-          </a:p>
-          <a:p>
-            <a:r>
-              <a:t>• FRONT DOOR: an API gateway RECEIVES requests and routes them to the function — the public, managed entry point that speaks HTTPS.</a:t>
-            </a:r>
-          </a:p>
-          <a:p>
-            <a:r>
-              <a:t>• MESSAGING / QUEUING: a queue or topic BUFFERS events and DECOUPLES producer from consumer — the site can fire events faster than they're processed without anything breaking.</a:t>
-            </a:r>
-          </a:p>
-          <a:p>
-            <a:r>
-              <a:t>• PERSISTENCE: a managed datastore keeps the data WITHOUT you running a database server — no patching, no capacity planning.</a:t>
-            </a:r>
-          </a:p>
-          <a:p>
-            <a:r>
-              <a:t>Misconception to pre-empt: "serverless is just Lambda." No — it's a toolkit: gateway + queue + function + managed store, each a managed building block. The function is only one piece.</a:t>
-            </a:r>
-          </a:p>
-          <a:p>
-            <a:r>
-              <a:t>Question to pose: "Which block lets the website fire 1,000 events a second even if the logger can only write 200 a second?" (the queue — it buffers and decouples).</a:t>
-            </a:r>
-          </a:p>
-          <a:p>
-            <a:r>
-              <a:t>UoC/AT1 tie: [ICTCLD503 PC 2.2] (determine the cloud services that support the microservice architecture) — the palette students select from next.</a:t>
+              <a:t>The four building-block types, one per line — vendor-neutral, AWS named only as the example.</a:t>
+            </a:r>
+          </a:p>
+          <a:p>
+            <a:r>
+              <a:t>Question to pose: which block lets the platform fire a thousand events a second when the logger writes two hundred? (the queue).</a:t>
             </a:r>
           </a:p>
         </p:txBody>
@@ -1474,42 +1431,12 @@
           <a:lstStyle/>
           <a:p>
             <a:r>
-              <a:t>Apply the toolkit to OUR service — map each building block to a specific job in the audit log. This is the service-selection decision (PC 2.2) made concrete.</a:t>
-            </a:r>
-          </a:p>
-          <a:p>
-            <a:r>
-              <a:t>• INGRESS: an API gateway receives the website's webhook over HTTPS — the front door for the producer's events.</a:t>
-            </a:r>
-          </a:p>
-          <a:p>
-            <a:r>
-              <a:t>• BUFFER: a queue absorbs bursts and DECOUPLES the site from the logger — loose coupling, so a slow or failed logger never backs up the website.</a:t>
-            </a:r>
-          </a:p>
-          <a:p>
-            <a:r>
-              <a:t>• COMPUTE: a function VALIDATES and writes each event — the only custom code in the whole service; everything else is managed.</a:t>
-            </a:r>
-          </a:p>
-          <a:p>
-            <a:r>
-              <a:t>• STORE: a managed NoSQL datastore holds the APPEND-ONLY log, RESIDENT IN INDIA. NoSQL fits the write-once, high-scale-read pattern from C1; residency picks the region.</a:t>
-            </a:r>
-          </a:p>
-          <a:p>
-            <a:r>
-              <a:t>Misconception to pre-empt: "pick a relational database, it's the default." No — the access pattern (append-only, high-scale simple reads) and residency point to managed NoSQL; justify the choice against the requirement, don't default to SQL.</a:t>
-            </a:r>
-          </a:p>
-          <a:p>
-            <a:r>
-              <a:t>Question to pose: "Each service here is chosen for a reason — pick one and tell me the requirement it answers." (gateway→ingress, queue→decoupling/burst, NoSQL store→append pattern + residency).</a:t>
-            </a:r>
-          </a:p>
-          <a:p>
-            <a:r>
-              <a:t>UoC/AT1 tie: [ICTCLD503 PC 2.2] (determine cloud services to support the architecture) — AT1 Part A A9; each service justified against a requirement.</a:t>
+              <a:t>The selection decision made concrete — each block mapped to a job and a requirement.</a:t>
+            </a:r>
+          </a:p>
+          <a:p>
+            <a:r>
+              <a:t>Misconception: relational by default. The access pattern (append-only, simple high-scale reads) and residency drive the choice.</a:t>
             </a:r>
           </a:p>
         </p:txBody>
@@ -1579,57 +1506,12 @@
           <a:lstStyle/>
           <a:p>
             <a:r>
-              <a:t>Facilitation — the C2 practice: choose the supporting services for the practice-scenario microservice and JUSTIFY each. Rehearses AT1 Part A A9.</a:t>
-            </a:r>
-          </a:p>
-          <a:p>
-            <a:r>
-              <a:t>Tell students: "For the microservice you identified last activity, determine the cloud services that support it — and for EACH one, name the requirement it answers (scale, residency, or decoupling)."</a:t>
-            </a:r>
-          </a:p>
-          <a:p>
-            <a:r>
-              <a:t>Steps (put on the board):</a:t>
-            </a:r>
-          </a:p>
-          <a:p>
-            <a:r>
-              <a:t>1. Pick a service for each job: ingress, buffer/decouple, compute, persistence.</a:t>
-            </a:r>
-          </a:p>
-          <a:p>
-            <a:r>
-              <a:t>2. Against each choice, write the requirement it satisfies — scale, residency, or decoupling.</a:t>
-            </a:r>
-          </a:p>
-          <a:p>
-            <a:r>
-              <a:t>3. Prefer managed/serverless building blocks; note where a choice is forced by residency.</a:t>
-            </a:r>
-          </a:p>
-          <a:p>
-            <a:r>
-              <a:t>Must produce: a service list with a one-line justification per service, each tied to a requirement.</a:t>
-            </a:r>
-          </a:p>
-          <a:p>
-            <a:r>
-              <a:t>Timing: ~20 min. Where they get stuck: they name product names with no reason attached (make them state the requirement), and they skip the queue (ask "what absorbs a burst?").</a:t>
-            </a:r>
-          </a:p>
-          <a:p>
-            <a:r>
-              <a:t>Share-back prompt: "Name one service and the requirement that forced it" — spotlight choice→requirement traceability.</a:t>
-            </a:r>
-          </a:p>
-          <a:p>
-            <a:r>
-              <a:t>No-leakage note: practice scenario only (comparable, not identical); AT1 evidences the same service-selection skill on the assessed system — keep them on the practice brief.</a:t>
-            </a:r>
-          </a:p>
-          <a:p>
-            <a:r>
-              <a:t>UoC/AT1 tie: [ICTCLD503 PC 2.2] — determine the supporting cloud services, justified to requirements (AT1 Part A A9).</a:t>
+              <a:t>Activity = practice workbook task 16.</a:t>
+            </a:r>
+          </a:p>
+          <a:p>
+            <a:r>
+              <a:t>Product names with no reason attached is the common miss — every choice names its requirement.</a:t>
             </a:r>
           </a:p>
         </p:txBody>
@@ -1699,37 +1581,12 @@
           <a:lstStyle/>
           <a:p>
             <a:r>
-              <a:t>Open C3 with the three architecture PRINCIPLES the design must demonstrate — vendor-neutral, examinable. One principle per line.</a:t>
-            </a:r>
-          </a:p>
-          <a:p>
-            <a:r>
-              <a:t>• HIGH COHESION: everything in the service serves its ONE job. Nothing unrelated bolted on — cohesion is single-responsibility seen from inside the service.</a:t>
-            </a:r>
-          </a:p>
-          <a:p>
-            <a:r>
-              <a:t>• LOOSE COUPLING: the queue between producer and consumer means neither BREAKS the other — the site can fail, the logger can fail, independently. The queue is the coupling seam.</a:t>
-            </a:r>
-          </a:p>
-          <a:p>
-            <a:r>
-              <a:t>• PERSISTENT DATASTORE: the record SURVIVES independently of the compute that wrote it. The function is ephemeral (it runs and stops); the data must outlive it.</a:t>
-            </a:r>
-          </a:p>
-          <a:p>
-            <a:r>
-              <a:t>Misconception to pre-empt: "cohesion and coupling are the same idea." No — cohesion is WITHIN a service (does it do one job?); coupling is BETWEEN services (how tightly do they depend?). You want high cohesion AND loose coupling.</a:t>
-            </a:r>
-          </a:p>
-          <a:p>
-            <a:r>
-              <a:t>Question to pose: "The function runs for 200ms then disappears — so where does the audit record live?" (in the persistent datastore — compute is ephemeral, storage is durable).</a:t>
-            </a:r>
-          </a:p>
-          <a:p>
-            <a:r>
-              <a:t>UoC/AT1 tie: [ICTCLD503 KE 4] (features of web-scale infrastructure: cohesion/coupling, persistent datastore, API/messaging/queuing) and [ICTCLD503 PC 2.3]/[ICTCLD503 PE 2] — the principles the architecture on the next slide must show.</a:t>
+              <a:t>Three examinable principles — cohesion is within a service, coupling is between services; you want high cohesion and loose coupling.</a:t>
+            </a:r>
+          </a:p>
+          <a:p>
+            <a:r>
+              <a:t>The function runs for milliseconds then disappears; the datastore is why the record outlives it.</a:t>
             </a:r>
           </a:p>
         </p:txBody>
@@ -4848,7 +4705,7 @@
                 </a:solidFill>
                 <a:latin typeface="Roboto Light"/>
               </a:rPr>
-              <a:t>Design the serverless audit-log microservice and its integration contract</a:t>
+              <a:t>Design the serverless microservice, its contract, and answer for the whole design</a:t>
             </a:r>
           </a:p>
         </p:txBody>
@@ -4951,7 +4808,7 @@
                 </a:solidFill>
                 <a:latin typeface="Roboto"/>
               </a:rPr>
-              <a:t>Choosing services for the audit log</a:t>
+              <a:t>The serverless building blocks</a:t>
             </a:r>
           </a:p>
         </p:txBody>
@@ -5049,7 +4906,7 @@
                 </a:solidFill>
                 <a:latin typeface="Roboto"/>
               </a:rPr>
-              <a:t>Ingress: an API gateway receives the website's webhook over HTTPS.</a:t>
+              <a:t>Compute: a function service runs your code on demand, no servers to manage.</a:t>
             </a:r>
           </a:p>
           <a:p>
@@ -5080,7 +4937,7 @@
                 </a:solidFill>
                 <a:latin typeface="Roboto"/>
               </a:rPr>
-              <a:t>Buffer: a queue absorbs bursts and decouples the site from the logger (loose coupling).</a:t>
+              <a:t>Front door: an API gateway receives requests and routes them to the function.</a:t>
             </a:r>
           </a:p>
           <a:p>
@@ -5111,7 +4968,7 @@
                 </a:solidFill>
                 <a:latin typeface="Roboto"/>
               </a:rPr>
-              <a:t>Compute: a function validates and writes each event.</a:t>
+              <a:t>Messaging: a queue buffers events and decouples producer from consumer.</a:t>
             </a:r>
           </a:p>
           <a:p>
@@ -5142,7 +4999,7 @@
                 </a:solidFill>
                 <a:latin typeface="Roboto"/>
               </a:rPr>
-              <a:t>Store: a managed NoSQL datastore holds the append-only log, resident in India.</a:t>
+              <a:t>Persistence: a managed datastore keeps the data without you running a database server.</a:t>
             </a:r>
           </a:p>
         </p:txBody>
@@ -5297,14 +5154,48 @@
       <p:grpSpPr/>
       <p:sp>
         <p:nvSpPr>
-          <p:cNvPr id="2" name="Rectangle 1"/>
+          <p:cNvPr id="2" name="TextBox 1"/>
+          <p:cNvSpPr txBox="1"/>
+          <p:nvPr/>
+        </p:nvSpPr>
+        <p:spPr>
+          <a:xfrm>
+            <a:off x="640080" y="457200"/>
+            <a:ext cx="10881360" cy="960120"/>
+          </a:xfrm>
+          <a:prstGeom prst="rect">
+            <a:avLst/>
+          </a:prstGeom>
+          <a:noFill/>
+        </p:spPr>
+        <p:txBody>
+          <a:bodyPr wrap="square" anchor="t" lIns="0" rIns="0" tIns="0" bIns="0">
+            <a:spAutoFit/>
+          </a:bodyPr>
+          <a:lstStyle/>
+          <a:p>
+            <a:r>
+              <a:rPr sz="2800" b="1" i="0">
+                <a:solidFill>
+                  <a:srgbClr val="2A2929"/>
+                </a:solidFill>
+                <a:latin typeface="Roboto"/>
+              </a:rPr>
+              <a:t>Choosing services for the audit log</a:t>
+            </a:r>
+          </a:p>
+        </p:txBody>
+      </p:sp>
+      <p:sp>
+        <p:nvSpPr>
+          <p:cNvPr id="3" name="Rectangle 2"/>
           <p:cNvSpPr/>
           <p:nvPr/>
         </p:nvSpPr>
         <p:spPr>
           <a:xfrm>
-            <a:off x="0" y="0"/>
-            <a:ext cx="12191695" cy="1234440"/>
+            <a:off x="658368" y="1371600"/>
+            <a:ext cx="1463040" cy="50800"/>
           </a:xfrm>
           <a:prstGeom prst="rect">
             <a:avLst/>
@@ -5341,67 +5232,14 @@
       </p:sp>
       <p:sp>
         <p:nvSpPr>
-          <p:cNvPr id="3" name="Rounded Rectangle 2"/>
-          <p:cNvSpPr/>
-          <p:nvPr/>
-        </p:nvSpPr>
-        <p:spPr>
-          <a:xfrm>
-            <a:off x="640080" y="384048"/>
-            <a:ext cx="1691640" cy="457200"/>
-          </a:xfrm>
-          <a:prstGeom prst="roundRect">
-            <a:avLst/>
-          </a:prstGeom>
-          <a:solidFill>
-            <a:srgbClr val="2A2929"/>
-          </a:solidFill>
-          <a:ln>
-            <a:noFill/>
-          </a:ln>
-          <a:effectLst/>
-        </p:spPr>
-        <p:style>
-          <a:lnRef idx="1">
-            <a:schemeClr val="accent1"/>
-          </a:lnRef>
-          <a:fillRef idx="3">
-            <a:schemeClr val="accent1"/>
-          </a:fillRef>
-          <a:effectRef idx="2">
-            <a:schemeClr val="accent1"/>
-          </a:effectRef>
-          <a:fontRef idx="minor">
-            <a:schemeClr val="lt1"/>
-          </a:fontRef>
-        </p:style>
-        <p:txBody>
-          <a:bodyPr rtlCol="0" anchor="ctr"/>
-          <a:lstStyle/>
-          <a:p>
-            <a:pPr algn="ctr"/>
-            <a:r>
-              <a:rPr sz="1400" b="1" i="0">
-                <a:solidFill>
-                  <a:srgbClr val="FBB900"/>
-                </a:solidFill>
-                <a:latin typeface="Roboto"/>
-              </a:rPr>
-              <a:t>ACTIVITY</a:t>
-            </a:r>
-          </a:p>
-        </p:txBody>
-      </p:sp>
-      <p:sp>
-        <p:nvSpPr>
           <p:cNvPr id="4" name="TextBox 3"/>
           <p:cNvSpPr txBox="1"/>
           <p:nvPr/>
         </p:nvSpPr>
         <p:spPr>
           <a:xfrm>
-            <a:off x="2560320" y="310896"/>
-            <a:ext cx="8961120" cy="685800"/>
+            <a:off x="658368" y="1691640"/>
+            <a:ext cx="10881360" cy="4480560"/>
           </a:xfrm>
           <a:prstGeom prst="rect">
             <a:avLst/>
@@ -5410,40 +5248,6 @@
         </p:spPr>
         <p:txBody>
           <a:bodyPr wrap="square" anchor="ctr" lIns="0" rIns="0" tIns="0" bIns="0">
-            <a:spAutoFit/>
-          </a:bodyPr>
-          <a:lstStyle/>
-          <a:p>
-            <a:r>
-              <a:rPr sz="2600" b="1" i="0">
-                <a:solidFill>
-                  <a:srgbClr val="FFFFFF"/>
-                </a:solidFill>
-                <a:latin typeface="Roboto"/>
-              </a:rPr>
-              <a:t>Determine the supporting services</a:t>
-            </a:r>
-          </a:p>
-        </p:txBody>
-      </p:sp>
-      <p:sp>
-        <p:nvSpPr>
-          <p:cNvPr id="5" name="TextBox 4"/>
-          <p:cNvSpPr txBox="1"/>
-          <p:nvPr/>
-        </p:nvSpPr>
-        <p:spPr>
-          <a:xfrm>
-            <a:off x="658368" y="1554480"/>
-            <a:ext cx="10881360" cy="4297680"/>
-          </a:xfrm>
-          <a:prstGeom prst="rect">
-            <a:avLst/>
-          </a:prstGeom>
-          <a:noFill/>
-        </p:spPr>
-        <p:txBody>
-          <a:bodyPr wrap="square" anchor="t" lIns="0" rIns="0" tIns="0" bIns="0">
             <a:spAutoFit/>
           </a:bodyPr>
           <a:lstStyle/>
@@ -5460,7 +5264,7 @@
               </a:spcAft>
             </a:pPr>
             <a:r>
-              <a:rPr sz="1700" b="1" i="0">
+              <a:rPr sz="2400" b="1" i="0">
                 <a:solidFill>
                   <a:srgbClr val="EDAB0C"/>
                 </a:solidFill>
@@ -5469,13 +5273,13 @@
               <a:t>■  </a:t>
             </a:r>
             <a:r>
-              <a:rPr sz="1700" b="0" i="0">
+              <a:rPr sz="2400" b="0" i="0">
                 <a:solidFill>
                   <a:srgbClr val="2A2929"/>
                 </a:solidFill>
                 <a:latin typeface="Roboto"/>
               </a:rPr>
-              <a:t>For the practice scenario, determine the cloud services that support your microservice.</a:t>
+              <a:t>Ingress: an API gateway receives the webhook over HTTPS.</a:t>
             </a:r>
           </a:p>
           <a:p>
@@ -5491,7 +5295,7 @@
               </a:spcAft>
             </a:pPr>
             <a:r>
-              <a:rPr sz="1700" b="1" i="0">
+              <a:rPr sz="2400" b="1" i="0">
                 <a:solidFill>
                   <a:srgbClr val="EDAB0C"/>
                 </a:solidFill>
@@ -5500,100 +5304,82 @@
               <a:t>■  </a:t>
             </a:r>
             <a:r>
-              <a:rPr sz="1700" b="0" i="0">
+              <a:rPr sz="2400" b="0" i="0">
                 <a:solidFill>
                   <a:srgbClr val="2A2929"/>
                 </a:solidFill>
                 <a:latin typeface="Roboto"/>
               </a:rPr>
-              <a:t>Justify each choice against a requirement (scale, residency, decoupling).</a:t>
-            </a:r>
-          </a:p>
-        </p:txBody>
-      </p:sp>
-      <p:sp>
-        <p:nvSpPr>
-          <p:cNvPr id="6" name="Rounded Rectangle 5"/>
-          <p:cNvSpPr/>
-          <p:nvPr/>
-        </p:nvSpPr>
-        <p:spPr>
-          <a:xfrm>
-            <a:off x="640080" y="5897880"/>
-            <a:ext cx="4023360" cy="457200"/>
-          </a:xfrm>
-          <a:prstGeom prst="roundRect">
-            <a:avLst/>
-          </a:prstGeom>
-          <a:solidFill>
-            <a:srgbClr val="F9F9F9"/>
-          </a:solidFill>
-          <a:ln w="12700">
-            <a:solidFill>
-              <a:srgbClr val="CCCCCC"/>
-            </a:solidFill>
-          </a:ln>
-          <a:effectLst/>
-        </p:spPr>
-        <p:style>
-          <a:lnRef idx="1">
-            <a:schemeClr val="accent1"/>
-          </a:lnRef>
-          <a:fillRef idx="3">
-            <a:schemeClr val="accent1"/>
-          </a:fillRef>
-          <a:effectRef idx="2">
-            <a:schemeClr val="accent1"/>
-          </a:effectRef>
-          <a:fontRef idx="minor">
-            <a:schemeClr val="lt1"/>
-          </a:fontRef>
-        </p:style>
-        <p:txBody>
-          <a:bodyPr rtlCol="0" anchor="ctr"/>
-          <a:lstStyle/>
-          <a:p>
-            <a:pPr algn="ctr"/>
-          </a:p>
-        </p:txBody>
-      </p:sp>
-      <p:sp>
-        <p:nvSpPr>
-          <p:cNvPr id="7" name="TextBox 6"/>
-          <p:cNvSpPr txBox="1"/>
-          <p:nvPr/>
-        </p:nvSpPr>
-        <p:spPr>
-          <a:xfrm>
-            <a:off x="822960" y="5943600"/>
-            <a:ext cx="3657600" cy="365760"/>
-          </a:xfrm>
-          <a:prstGeom prst="rect">
-            <a:avLst/>
-          </a:prstGeom>
-          <a:noFill/>
-        </p:spPr>
-        <p:txBody>
-          <a:bodyPr wrap="square" anchor="ctr" lIns="0" rIns="0" tIns="0" bIns="0">
-            <a:spAutoFit/>
-          </a:bodyPr>
-          <a:lstStyle/>
-          <a:p>
-            <a:r>
-              <a:rPr sz="1500" b="1" i="0">
+              <a:t>Buffer: a queue absorbs bursts and decouples the platform from the logger.</a:t>
+            </a:r>
+          </a:p>
+          <a:p>
+            <a:pPr marL="0" indent="0">
+              <a:lnSpc>
+                <a:spcPct val="105000"/>
+              </a:lnSpc>
+              <a:spcBef>
+                <a:spcPts val="0"/>
+              </a:spcBef>
+              <a:spcAft>
+                <a:spcPts val="1000"/>
+              </a:spcAft>
+            </a:pPr>
+            <a:r>
+              <a:rPr sz="2400" b="1" i="0">
+                <a:solidFill>
+                  <a:srgbClr val="EDAB0C"/>
+                </a:solidFill>
+                <a:latin typeface="Roboto"/>
+              </a:rPr>
+              <a:t>■  </a:t>
+            </a:r>
+            <a:r>
+              <a:rPr sz="2400" b="0" i="0">
                 <a:solidFill>
                   <a:srgbClr val="2A2929"/>
                 </a:solidFill>
                 <a:latin typeface="Roboto"/>
               </a:rPr>
-              <a:t>⏱  ~20 min</a:t>
-            </a:r>
-          </a:p>
-        </p:txBody>
-      </p:sp>
-      <p:sp>
-        <p:nvSpPr>
-          <p:cNvPr id="8" name="Rectangle 7"/>
+              <a:t>Compute: a function validates and writes each event — the only custom code in the service.</a:t>
+            </a:r>
+          </a:p>
+          <a:p>
+            <a:pPr marL="0" indent="0">
+              <a:lnSpc>
+                <a:spcPct val="105000"/>
+              </a:lnSpc>
+              <a:spcBef>
+                <a:spcPts val="0"/>
+              </a:spcBef>
+              <a:spcAft>
+                <a:spcPts val="1000"/>
+              </a:spcAft>
+            </a:pPr>
+            <a:r>
+              <a:rPr sz="2400" b="1" i="0">
+                <a:solidFill>
+                  <a:srgbClr val="EDAB0C"/>
+                </a:solidFill>
+                <a:latin typeface="Roboto"/>
+              </a:rPr>
+              <a:t>■  </a:t>
+            </a:r>
+            <a:r>
+              <a:rPr sz="2400" b="0" i="0">
+                <a:solidFill>
+                  <a:srgbClr val="2A2929"/>
+                </a:solidFill>
+                <a:latin typeface="Roboto"/>
+              </a:rPr>
+              <a:t>Store: a managed NoSQL datastore holds the append-only log, placed to honour residency.</a:t>
+            </a:r>
+          </a:p>
+        </p:txBody>
+      </p:sp>
+      <p:sp>
+        <p:nvSpPr>
+          <p:cNvPr id="5" name="Rectangle 4"/>
           <p:cNvSpPr/>
           <p:nvPr/>
         </p:nvSpPr>
@@ -5637,7 +5423,7 @@
       </p:sp>
       <p:sp>
         <p:nvSpPr>
-          <p:cNvPr id="9" name="TextBox 8"/>
+          <p:cNvPr id="6" name="TextBox 5"/>
           <p:cNvSpPr txBox="1"/>
           <p:nvPr/>
         </p:nvSpPr>
@@ -5680,7 +5466,7 @@
       </p:sp>
       <p:sp>
         <p:nvSpPr>
-          <p:cNvPr id="10" name="TextBox 9"/>
+          <p:cNvPr id="7" name="TextBox 6"/>
           <p:cNvSpPr txBox="1"/>
           <p:nvPr/>
         </p:nvSpPr>
@@ -5748,13 +5534,13 @@
         <p:spPr>
           <a:xfrm>
             <a:off x="0" y="0"/>
-            <a:ext cx="3931920" cy="6858000"/>
+            <a:ext cx="12191695" cy="1234440"/>
           </a:xfrm>
           <a:prstGeom prst="rect">
             <a:avLst/>
           </a:prstGeom>
           <a:solidFill>
-            <a:srgbClr val="205F61"/>
+            <a:srgbClr val="27B5CE"/>
           </a:solidFill>
           <a:ln>
             <a:noFill/>
@@ -5785,120 +5571,20 @@
       </p:sp>
       <p:sp>
         <p:nvSpPr>
-          <p:cNvPr id="3" name="TextBox 2"/>
-          <p:cNvSpPr txBox="1"/>
-          <p:nvPr/>
-        </p:nvSpPr>
-        <p:spPr>
-          <a:xfrm>
-            <a:off x="365760" y="2103120"/>
-            <a:ext cx="3291840" cy="2194560"/>
-          </a:xfrm>
-          <a:prstGeom prst="rect">
-            <a:avLst/>
-          </a:prstGeom>
-          <a:noFill/>
-        </p:spPr>
-        <p:txBody>
-          <a:bodyPr wrap="square" anchor="t" lIns="0" rIns="0" tIns="0" bIns="0">
-            <a:spAutoFit/>
-          </a:bodyPr>
-          <a:lstStyle/>
-          <a:p>
-            <a:r>
-              <a:rPr sz="13000" b="1" i="0">
-                <a:solidFill>
-                  <a:srgbClr val="FFFFFF"/>
-                </a:solidFill>
-                <a:latin typeface="Roboto"/>
-              </a:rPr>
-              <a:t>03</a:t>
-            </a:r>
-          </a:p>
-        </p:txBody>
-      </p:sp>
-      <p:sp>
-        <p:nvSpPr>
-          <p:cNvPr id="4" name="TextBox 3"/>
-          <p:cNvSpPr txBox="1"/>
-          <p:nvPr/>
-        </p:nvSpPr>
-        <p:spPr>
-          <a:xfrm>
-            <a:off x="4480560" y="2468880"/>
-            <a:ext cx="7132320" cy="2194560"/>
-          </a:xfrm>
-          <a:prstGeom prst="rect">
-            <a:avLst/>
-          </a:prstGeom>
-          <a:noFill/>
-        </p:spPr>
-        <p:txBody>
-          <a:bodyPr wrap="square" anchor="t" lIns="0" rIns="0" tIns="0" bIns="0">
-            <a:spAutoFit/>
-          </a:bodyPr>
-          <a:lstStyle/>
-          <a:p>
-            <a:r>
-              <a:rPr sz="1600" b="1" i="0">
-                <a:solidFill>
-                  <a:srgbClr val="205F61"/>
-                </a:solidFill>
-                <a:latin typeface="Roboto"/>
-              </a:rPr>
-              <a:t>SECTION</a:t>
-            </a:r>
-          </a:p>
-          <a:p>
-            <a:pPr>
-              <a:spcBef>
-                <a:spcPts val="600"/>
-              </a:spcBef>
-            </a:pPr>
-            <a:r>
-              <a:rPr sz="3800" b="1" i="0">
-                <a:solidFill>
-                  <a:srgbClr val="2A2929"/>
-                </a:solidFill>
-                <a:latin typeface="Roboto"/>
-              </a:rPr>
-              <a:t>Microservice architecture &amp; contract</a:t>
-            </a:r>
-          </a:p>
-          <a:p>
-            <a:pPr>
-              <a:spcBef>
-                <a:spcPts val="1000"/>
-              </a:spcBef>
-            </a:pPr>
-            <a:r>
-              <a:rPr sz="2000" b="0" i="1">
-                <a:solidFill>
-                  <a:srgbClr val="484848"/>
-                </a:solidFill>
-                <a:latin typeface="Roboto Light"/>
-              </a:rPr>
-              <a:t>cohesive, loosely coupled, contract-first</a:t>
-            </a:r>
-          </a:p>
-        </p:txBody>
-      </p:sp>
-      <p:sp>
-        <p:nvSpPr>
-          <p:cNvPr id="5" name="Rectangle 4"/>
+          <p:cNvPr id="3" name="Rounded Rectangle 2"/>
           <p:cNvSpPr/>
           <p:nvPr/>
         </p:nvSpPr>
         <p:spPr>
           <a:xfrm>
-            <a:off x="0" y="6565392"/>
-            <a:ext cx="12191695" cy="38100"/>
-          </a:xfrm>
-          <a:prstGeom prst="rect">
+            <a:off x="640080" y="384048"/>
+            <a:ext cx="1691640" cy="457200"/>
+          </a:xfrm>
+          <a:prstGeom prst="roundRect">
             <a:avLst/>
           </a:prstGeom>
           <a:solidFill>
-            <a:srgbClr val="205F61"/>
+            <a:srgbClr val="2A2929"/>
           </a:solidFill>
           <a:ln>
             <a:noFill/>
@@ -5924,19 +5610,62 @@
           <a:lstStyle/>
           <a:p>
             <a:pPr algn="ctr"/>
-          </a:p>
-        </p:txBody>
-      </p:sp>
-      <p:sp>
-        <p:nvSpPr>
-          <p:cNvPr id="6" name="TextBox 5"/>
+            <a:r>
+              <a:rPr sz="1400" b="1" i="0">
+                <a:solidFill>
+                  <a:srgbClr val="FBB900"/>
+                </a:solidFill>
+                <a:latin typeface="Roboto"/>
+              </a:rPr>
+              <a:t>ACTIVITY</a:t>
+            </a:r>
+          </a:p>
+        </p:txBody>
+      </p:sp>
+      <p:sp>
+        <p:nvSpPr>
+          <p:cNvPr id="4" name="TextBox 3"/>
           <p:cNvSpPr txBox="1"/>
           <p:nvPr/>
         </p:nvSpPr>
         <p:spPr>
           <a:xfrm>
-            <a:off x="502920" y="6400800"/>
-            <a:ext cx="5486400" cy="320040"/>
+            <a:off x="2560320" y="310896"/>
+            <a:ext cx="8961120" cy="685800"/>
+          </a:xfrm>
+          <a:prstGeom prst="rect">
+            <a:avLst/>
+          </a:prstGeom>
+          <a:noFill/>
+        </p:spPr>
+        <p:txBody>
+          <a:bodyPr wrap="square" anchor="ctr" lIns="0" rIns="0" tIns="0" bIns="0">
+            <a:spAutoFit/>
+          </a:bodyPr>
+          <a:lstStyle/>
+          <a:p>
+            <a:r>
+              <a:rPr sz="2600" b="1" i="0">
+                <a:solidFill>
+                  <a:srgbClr val="FFFFFF"/>
+                </a:solidFill>
+                <a:latin typeface="Roboto"/>
+              </a:rPr>
+              <a:t>Determine the supporting services</a:t>
+            </a:r>
+          </a:p>
+        </p:txBody>
+      </p:sp>
+      <p:sp>
+        <p:nvSpPr>
+          <p:cNvPr id="5" name="TextBox 4"/>
+          <p:cNvSpPr txBox="1"/>
+          <p:nvPr/>
+        </p:nvSpPr>
+        <p:spPr>
+          <a:xfrm>
+            <a:off x="658368" y="1554480"/>
+            <a:ext cx="10881360" cy="4297680"/>
           </a:xfrm>
           <a:prstGeom prst="rect">
             <a:avLst/>
@@ -5949,24 +5678,112 @@
           </a:bodyPr>
           <a:lstStyle/>
           <a:p>
-            <a:r>
-              <a:rPr sz="1100" b="1" i="0">
+            <a:pPr marL="0" indent="0">
+              <a:lnSpc>
+                <a:spcPct val="105000"/>
+              </a:lnSpc>
+              <a:spcBef>
+                <a:spcPts val="0"/>
+              </a:spcBef>
+              <a:spcAft>
+                <a:spcPts val="1000"/>
+              </a:spcAft>
+            </a:pPr>
+            <a:r>
+              <a:rPr sz="1700" b="1" i="0">
+                <a:solidFill>
+                  <a:srgbClr val="EDAB0C"/>
+                </a:solidFill>
+                <a:latin typeface="Roboto"/>
+              </a:rPr>
+              <a:t>■  </a:t>
+            </a:r>
+            <a:r>
+              <a:rPr sz="1700" b="0" i="0">
                 <a:solidFill>
                   <a:srgbClr val="2A2929"/>
                 </a:solidFill>
                 <a:latin typeface="Roboto"/>
               </a:rPr>
-              <a:t>Kangan </a:t>
-            </a:r>
-            <a:r>
-              <a:rPr sz="1100" b="1" i="0">
-                <a:solidFill>
-                  <a:srgbClr val="D68E10"/>
-                </a:solidFill>
-                <a:latin typeface="Roboto"/>
-              </a:rPr>
-              <a:t>Institute</a:t>
-            </a:r>
+              <a:t>Workbook — task 16.</a:t>
+            </a:r>
+          </a:p>
+          <a:p>
+            <a:pPr marL="0" indent="0">
+              <a:lnSpc>
+                <a:spcPct val="105000"/>
+              </a:lnSpc>
+              <a:spcBef>
+                <a:spcPts val="0"/>
+              </a:spcBef>
+              <a:spcAft>
+                <a:spcPts val="1000"/>
+              </a:spcAft>
+            </a:pPr>
+            <a:r>
+              <a:rPr sz="1700" b="1" i="0">
+                <a:solidFill>
+                  <a:srgbClr val="EDAB0C"/>
+                </a:solidFill>
+                <a:latin typeface="Roboto"/>
+              </a:rPr>
+              <a:t>■  </a:t>
+            </a:r>
+            <a:r>
+              <a:rPr sz="1700" b="0" i="0">
+                <a:solidFill>
+                  <a:srgbClr val="2A2929"/>
+                </a:solidFill>
+                <a:latin typeface="Roboto"/>
+              </a:rPr>
+              <a:t>Determine the cloud services that support your microservice, and justify each against a requirement.</a:t>
+            </a:r>
+          </a:p>
+        </p:txBody>
+      </p:sp>
+      <p:sp>
+        <p:nvSpPr>
+          <p:cNvPr id="6" name="Rounded Rectangle 5"/>
+          <p:cNvSpPr/>
+          <p:nvPr/>
+        </p:nvSpPr>
+        <p:spPr>
+          <a:xfrm>
+            <a:off x="640080" y="5897880"/>
+            <a:ext cx="4023360" cy="457200"/>
+          </a:xfrm>
+          <a:prstGeom prst="roundRect">
+            <a:avLst/>
+          </a:prstGeom>
+          <a:solidFill>
+            <a:srgbClr val="F9F9F9"/>
+          </a:solidFill>
+          <a:ln w="12700">
+            <a:solidFill>
+              <a:srgbClr val="CCCCCC"/>
+            </a:solidFill>
+          </a:ln>
+          <a:effectLst/>
+        </p:spPr>
+        <p:style>
+          <a:lnRef idx="1">
+            <a:schemeClr val="accent1"/>
+          </a:lnRef>
+          <a:fillRef idx="3">
+            <a:schemeClr val="accent1"/>
+          </a:fillRef>
+          <a:effectRef idx="2">
+            <a:schemeClr val="accent1"/>
+          </a:effectRef>
+          <a:fontRef idx="minor">
+            <a:schemeClr val="lt1"/>
+          </a:fontRef>
+        </p:style>
+        <p:txBody>
+          <a:bodyPr rtlCol="0" anchor="ctr"/>
+          <a:lstStyle/>
+          <a:p>
+            <a:pPr algn="ctr"/>
           </a:p>
         </p:txBody>
       </p:sp>
@@ -5978,8 +5795,86 @@
         </p:nvSpPr>
         <p:spPr>
           <a:xfrm>
-            <a:off x="10515600" y="6400800"/>
-            <a:ext cx="1188720" cy="320040"/>
+            <a:off x="822960" y="5943600"/>
+            <a:ext cx="3657600" cy="365760"/>
+          </a:xfrm>
+          <a:prstGeom prst="rect">
+            <a:avLst/>
+          </a:prstGeom>
+          <a:noFill/>
+        </p:spPr>
+        <p:txBody>
+          <a:bodyPr wrap="square" anchor="ctr" lIns="0" rIns="0" tIns="0" bIns="0">
+            <a:spAutoFit/>
+          </a:bodyPr>
+          <a:lstStyle/>
+          <a:p>
+            <a:r>
+              <a:rPr sz="1500" b="1" i="0">
+                <a:solidFill>
+                  <a:srgbClr val="2A2929"/>
+                </a:solidFill>
+                <a:latin typeface="Roboto"/>
+              </a:rPr>
+              <a:t>⏱  ~20 min</a:t>
+            </a:r>
+          </a:p>
+        </p:txBody>
+      </p:sp>
+      <p:sp>
+        <p:nvSpPr>
+          <p:cNvPr id="8" name="Rectangle 7"/>
+          <p:cNvSpPr/>
+          <p:nvPr/>
+        </p:nvSpPr>
+        <p:spPr>
+          <a:xfrm>
+            <a:off x="0" y="6565392"/>
+            <a:ext cx="12191695" cy="38100"/>
+          </a:xfrm>
+          <a:prstGeom prst="rect">
+            <a:avLst/>
+          </a:prstGeom>
+          <a:solidFill>
+            <a:srgbClr val="27B5CE"/>
+          </a:solidFill>
+          <a:ln>
+            <a:noFill/>
+          </a:ln>
+          <a:effectLst/>
+        </p:spPr>
+        <p:style>
+          <a:lnRef idx="1">
+            <a:schemeClr val="accent1"/>
+          </a:lnRef>
+          <a:fillRef idx="3">
+            <a:schemeClr val="accent1"/>
+          </a:fillRef>
+          <a:effectRef idx="2">
+            <a:schemeClr val="accent1"/>
+          </a:effectRef>
+          <a:fontRef idx="minor">
+            <a:schemeClr val="lt1"/>
+          </a:fontRef>
+        </p:style>
+        <p:txBody>
+          <a:bodyPr rtlCol="0" anchor="ctr"/>
+          <a:lstStyle/>
+          <a:p>
+            <a:pPr algn="ctr"/>
+          </a:p>
+        </p:txBody>
+      </p:sp>
+      <p:sp>
+        <p:nvSpPr>
+          <p:cNvPr id="9" name="TextBox 8"/>
+          <p:cNvSpPr txBox="1"/>
+          <p:nvPr/>
+        </p:nvSpPr>
+        <p:spPr>
+          <a:xfrm>
+            <a:off x="502920" y="6400800"/>
+            <a:ext cx="5486400" cy="320040"/>
           </a:xfrm>
           <a:prstGeom prst="rect">
             <a:avLst/>
@@ -5992,6 +5887,49 @@
           </a:bodyPr>
           <a:lstStyle/>
           <a:p>
+            <a:r>
+              <a:rPr sz="1100" b="1" i="0">
+                <a:solidFill>
+                  <a:srgbClr val="2A2929"/>
+                </a:solidFill>
+                <a:latin typeface="Roboto"/>
+              </a:rPr>
+              <a:t>Kangan </a:t>
+            </a:r>
+            <a:r>
+              <a:rPr sz="1100" b="1" i="0">
+                <a:solidFill>
+                  <a:srgbClr val="D68E10"/>
+                </a:solidFill>
+                <a:latin typeface="Roboto"/>
+              </a:rPr>
+              <a:t>Institute</a:t>
+            </a:r>
+          </a:p>
+        </p:txBody>
+      </p:sp>
+      <p:sp>
+        <p:nvSpPr>
+          <p:cNvPr id="10" name="TextBox 9"/>
+          <p:cNvSpPr txBox="1"/>
+          <p:nvPr/>
+        </p:nvSpPr>
+        <p:spPr>
+          <a:xfrm>
+            <a:off x="10515600" y="6400800"/>
+            <a:ext cx="1188720" cy="320040"/>
+          </a:xfrm>
+          <a:prstGeom prst="rect">
+            <a:avLst/>
+          </a:prstGeom>
+          <a:noFill/>
+        </p:spPr>
+        <p:txBody>
+          <a:bodyPr wrap="square" anchor="t" lIns="0" rIns="0" tIns="0" bIns="0">
+            <a:spAutoFit/>
+          </a:bodyPr>
+          <a:lstStyle/>
+          <a:p>
             <a:pPr algn="r"/>
             <a:r>
               <a:rPr sz="1100" b="0" i="0">
@@ -6000,7 +5938,7 @@
                 </a:solidFill>
                 <a:latin typeface="Roboto"/>
               </a:rPr>
-              <a:t/>
+              <a:t>9</a:t>
             </a:r>
           </a:p>
         </p:txBody>
@@ -6019,7 +5957,7 @@
     <p:bg>
       <p:bgPr>
         <a:solidFill>
-          <a:srgbClr val="FFFFFF"/>
+          <a:srgbClr val="F9F9F9"/>
         </a:solidFill>
         <a:effectLst/>
       </p:bgPr>
@@ -6039,8 +5977,8 @@
         </p:nvSpPr>
         <p:spPr>
           <a:xfrm>
-            <a:off x="640080" y="457200"/>
-            <a:ext cx="10881360" cy="960120"/>
+            <a:off x="640080" y="548640"/>
+            <a:ext cx="10881360" cy="1097280"/>
           </a:xfrm>
           <a:prstGeom prst="rect">
             <a:avLst/>
@@ -6054,13 +5992,29 @@
           <a:lstStyle/>
           <a:p>
             <a:r>
-              <a:rPr sz="2800" b="1" i="0">
+              <a:rPr sz="3200" b="1" i="0">
                 <a:solidFill>
                   <a:srgbClr val="2A2929"/>
                 </a:solidFill>
                 <a:latin typeface="Roboto"/>
               </a:rPr>
-              <a:t>Cohesion, coupling &amp; the datastore</a:t>
+              <a:t>Key takeaways</a:t>
+            </a:r>
+          </a:p>
+          <a:p>
+            <a:pPr>
+              <a:spcBef>
+                <a:spcPts val="200"/>
+              </a:spcBef>
+            </a:pPr>
+            <a:r>
+              <a:rPr sz="1800" b="1" i="0">
+                <a:solidFill>
+                  <a:srgbClr val="27B5CE"/>
+                </a:solidFill>
+                <a:latin typeface="Roboto"/>
+              </a:rPr>
+              <a:t>Section 2 · The services</a:t>
             </a:r>
           </a:p>
         </p:txBody>
@@ -6073,14 +6027,14 @@
         </p:nvSpPr>
         <p:spPr>
           <a:xfrm>
-            <a:off x="658368" y="1371600"/>
+            <a:off x="658368" y="1600200"/>
             <a:ext cx="1463040" cy="50800"/>
           </a:xfrm>
           <a:prstGeom prst="rect">
             <a:avLst/>
           </a:prstGeom>
           <a:solidFill>
-            <a:srgbClr val="205F61"/>
+            <a:srgbClr val="27B5CE"/>
           </a:solidFill>
           <a:ln>
             <a:noFill/>
@@ -6111,117 +6065,47 @@
       </p:sp>
       <p:sp>
         <p:nvSpPr>
-          <p:cNvPr id="4" name="TextBox 3"/>
-          <p:cNvSpPr txBox="1"/>
-          <p:nvPr/>
-        </p:nvSpPr>
-        <p:spPr>
-          <a:xfrm>
-            <a:off x="658368" y="1691640"/>
-            <a:ext cx="10881360" cy="4480560"/>
-          </a:xfrm>
-          <a:prstGeom prst="rect">
-            <a:avLst/>
-          </a:prstGeom>
-          <a:noFill/>
-        </p:spPr>
-        <p:txBody>
-          <a:bodyPr wrap="square" anchor="ctr" lIns="0" rIns="0" tIns="0" bIns="0">
-            <a:spAutoFit/>
-          </a:bodyPr>
-          <a:lstStyle/>
-          <a:p>
-            <a:pPr marL="0" indent="0">
-              <a:lnSpc>
-                <a:spcPct val="105000"/>
-              </a:lnSpc>
-              <a:spcBef>
-                <a:spcPts val="0"/>
-              </a:spcBef>
-              <a:spcAft>
-                <a:spcPts val="1000"/>
-              </a:spcAft>
-            </a:pPr>
-            <a:r>
-              <a:rPr sz="2400" b="1" i="0">
-                <a:solidFill>
-                  <a:srgbClr val="EDAB0C"/>
-                </a:solidFill>
-                <a:latin typeface="Roboto"/>
-              </a:rPr>
-              <a:t>■  </a:t>
-            </a:r>
-            <a:r>
-              <a:rPr sz="2400" b="0" i="0">
-                <a:solidFill>
-                  <a:srgbClr val="2A2929"/>
-                </a:solidFill>
-                <a:latin typeface="Roboto"/>
-              </a:rPr>
-              <a:t>High cohesion: everything in the service serves its one job.</a:t>
-            </a:r>
-          </a:p>
-          <a:p>
-            <a:pPr marL="0" indent="0">
-              <a:lnSpc>
-                <a:spcPct val="105000"/>
-              </a:lnSpc>
-              <a:spcBef>
-                <a:spcPts val="0"/>
-              </a:spcBef>
-              <a:spcAft>
-                <a:spcPts val="1000"/>
-              </a:spcAft>
-            </a:pPr>
-            <a:r>
-              <a:rPr sz="2400" b="1" i="0">
-                <a:solidFill>
-                  <a:srgbClr val="EDAB0C"/>
-                </a:solidFill>
-                <a:latin typeface="Roboto"/>
-              </a:rPr>
-              <a:t>■  </a:t>
-            </a:r>
-            <a:r>
-              <a:rPr sz="2400" b="0" i="0">
-                <a:solidFill>
-                  <a:srgbClr val="2A2929"/>
-                </a:solidFill>
-                <a:latin typeface="Roboto"/>
-              </a:rPr>
-              <a:t>Loose coupling: the queue between producer and consumer means neither breaks the other.</a:t>
-            </a:r>
-          </a:p>
-          <a:p>
-            <a:pPr marL="0" indent="0">
-              <a:lnSpc>
-                <a:spcPct val="105000"/>
-              </a:lnSpc>
-              <a:spcBef>
-                <a:spcPts val="0"/>
-              </a:spcBef>
-              <a:spcAft>
-                <a:spcPts val="1000"/>
-              </a:spcAft>
-            </a:pPr>
-            <a:r>
-              <a:rPr sz="2400" b="1" i="0">
-                <a:solidFill>
-                  <a:srgbClr val="EDAB0C"/>
-                </a:solidFill>
-                <a:latin typeface="Roboto"/>
-              </a:rPr>
-              <a:t>■  </a:t>
-            </a:r>
-            <a:r>
-              <a:rPr sz="2400" b="0" i="0">
-                <a:solidFill>
-                  <a:srgbClr val="2A2929"/>
-                </a:solidFill>
-                <a:latin typeface="Roboto"/>
-              </a:rPr>
-              <a:t>Persistent datastore: the record survives independently of the compute that wrote it.</a:t>
-            </a:r>
+          <p:cNvPr id="4" name="Rectangle 3"/>
+          <p:cNvSpPr/>
+          <p:nvPr/>
+        </p:nvSpPr>
+        <p:spPr>
+          <a:xfrm>
+            <a:off x="640080" y="1965960"/>
+            <a:ext cx="10927080" cy="841248"/>
+          </a:xfrm>
+          <a:prstGeom prst="rect">
+            <a:avLst/>
+          </a:prstGeom>
+          <a:solidFill>
+            <a:srgbClr val="FFFFFF"/>
+          </a:solidFill>
+          <a:ln w="12700">
+            <a:solidFill>
+              <a:srgbClr val="CCCCCC"/>
+            </a:solidFill>
+          </a:ln>
+          <a:effectLst/>
+        </p:spPr>
+        <p:style>
+          <a:lnRef idx="1">
+            <a:schemeClr val="accent1"/>
+          </a:lnRef>
+          <a:fillRef idx="3">
+            <a:schemeClr val="accent1"/>
+          </a:fillRef>
+          <a:effectRef idx="2">
+            <a:schemeClr val="accent1"/>
+          </a:effectRef>
+          <a:fontRef idx="minor">
+            <a:schemeClr val="lt1"/>
+          </a:fontRef>
+        </p:style>
+        <p:txBody>
+          <a:bodyPr rtlCol="0" anchor="ctr"/>
+          <a:lstStyle/>
+          <a:p>
+            <a:pPr algn="ctr"/>
           </a:p>
         </p:txBody>
       </p:sp>
@@ -6233,14 +6117,14 @@
         </p:nvSpPr>
         <p:spPr>
           <a:xfrm>
-            <a:off x="0" y="6565392"/>
-            <a:ext cx="12191695" cy="38100"/>
+            <a:off x="640080" y="1965960"/>
+            <a:ext cx="109728" cy="841248"/>
           </a:xfrm>
           <a:prstGeom prst="rect">
             <a:avLst/>
           </a:prstGeom>
           <a:solidFill>
-            <a:srgbClr val="205F61"/>
+            <a:srgbClr val="27B5CE"/>
           </a:solidFill>
           <a:ln>
             <a:noFill/>
@@ -6277,6 +6161,218 @@
         </p:nvSpPr>
         <p:spPr>
           <a:xfrm>
+            <a:off x="960120" y="1965960"/>
+            <a:ext cx="10424160" cy="841248"/>
+          </a:xfrm>
+          <a:prstGeom prst="rect">
+            <a:avLst/>
+          </a:prstGeom>
+          <a:noFill/>
+        </p:spPr>
+        <p:txBody>
+          <a:bodyPr wrap="square" anchor="ctr" lIns="0" rIns="0" tIns="0" bIns="0">
+            <a:spAutoFit/>
+          </a:bodyPr>
+          <a:lstStyle/>
+          <a:p>
+            <a:pPr>
+              <a:lnSpc>
+                <a:spcPct val="100000"/>
+              </a:lnSpc>
+            </a:pPr>
+            <a:r>
+              <a:rPr sz="1700" b="0" i="0">
+                <a:solidFill>
+                  <a:srgbClr val="2A2929"/>
+                </a:solidFill>
+                <a:latin typeface="Roboto"/>
+              </a:rPr>
+              <a:t>Gateway, queue, function, managed store — each chosen for a named job.</a:t>
+            </a:r>
+          </a:p>
+        </p:txBody>
+      </p:sp>
+      <p:sp>
+        <p:nvSpPr>
+          <p:cNvPr id="7" name="Rectangle 6"/>
+          <p:cNvSpPr/>
+          <p:nvPr/>
+        </p:nvSpPr>
+        <p:spPr>
+          <a:xfrm>
+            <a:off x="640080" y="2916936"/>
+            <a:ext cx="10927080" cy="841248"/>
+          </a:xfrm>
+          <a:prstGeom prst="rect">
+            <a:avLst/>
+          </a:prstGeom>
+          <a:solidFill>
+            <a:srgbClr val="FFFFFF"/>
+          </a:solidFill>
+          <a:ln w="12700">
+            <a:solidFill>
+              <a:srgbClr val="CCCCCC"/>
+            </a:solidFill>
+          </a:ln>
+          <a:effectLst/>
+        </p:spPr>
+        <p:style>
+          <a:lnRef idx="1">
+            <a:schemeClr val="accent1"/>
+          </a:lnRef>
+          <a:fillRef idx="3">
+            <a:schemeClr val="accent1"/>
+          </a:fillRef>
+          <a:effectRef idx="2">
+            <a:schemeClr val="accent1"/>
+          </a:effectRef>
+          <a:fontRef idx="minor">
+            <a:schemeClr val="lt1"/>
+          </a:fontRef>
+        </p:style>
+        <p:txBody>
+          <a:bodyPr rtlCol="0" anchor="ctr"/>
+          <a:lstStyle/>
+          <a:p>
+            <a:pPr algn="ctr"/>
+          </a:p>
+        </p:txBody>
+      </p:sp>
+      <p:sp>
+        <p:nvSpPr>
+          <p:cNvPr id="8" name="Rectangle 7"/>
+          <p:cNvSpPr/>
+          <p:nvPr/>
+        </p:nvSpPr>
+        <p:spPr>
+          <a:xfrm>
+            <a:off x="640080" y="2916936"/>
+            <a:ext cx="109728" cy="841248"/>
+          </a:xfrm>
+          <a:prstGeom prst="rect">
+            <a:avLst/>
+          </a:prstGeom>
+          <a:solidFill>
+            <a:srgbClr val="27B5CE"/>
+          </a:solidFill>
+          <a:ln>
+            <a:noFill/>
+          </a:ln>
+          <a:effectLst/>
+        </p:spPr>
+        <p:style>
+          <a:lnRef idx="1">
+            <a:schemeClr val="accent1"/>
+          </a:lnRef>
+          <a:fillRef idx="3">
+            <a:schemeClr val="accent1"/>
+          </a:fillRef>
+          <a:effectRef idx="2">
+            <a:schemeClr val="accent1"/>
+          </a:effectRef>
+          <a:fontRef idx="minor">
+            <a:schemeClr val="lt1"/>
+          </a:fontRef>
+        </p:style>
+        <p:txBody>
+          <a:bodyPr rtlCol="0" anchor="ctr"/>
+          <a:lstStyle/>
+          <a:p>
+            <a:pPr algn="ctr"/>
+          </a:p>
+        </p:txBody>
+      </p:sp>
+      <p:sp>
+        <p:nvSpPr>
+          <p:cNvPr id="9" name="TextBox 8"/>
+          <p:cNvSpPr txBox="1"/>
+          <p:nvPr/>
+        </p:nvSpPr>
+        <p:spPr>
+          <a:xfrm>
+            <a:off x="960120" y="2916936"/>
+            <a:ext cx="10424160" cy="841248"/>
+          </a:xfrm>
+          <a:prstGeom prst="rect">
+            <a:avLst/>
+          </a:prstGeom>
+          <a:noFill/>
+        </p:spPr>
+        <p:txBody>
+          <a:bodyPr wrap="square" anchor="ctr" lIns="0" rIns="0" tIns="0" bIns="0">
+            <a:spAutoFit/>
+          </a:bodyPr>
+          <a:lstStyle/>
+          <a:p>
+            <a:pPr>
+              <a:lnSpc>
+                <a:spcPct val="100000"/>
+              </a:lnSpc>
+            </a:pPr>
+            <a:r>
+              <a:rPr sz="1700" b="0" i="0">
+                <a:solidFill>
+                  <a:srgbClr val="2A2929"/>
+                </a:solidFill>
+                <a:latin typeface="Roboto"/>
+              </a:rPr>
+              <a:t>The queue is the decoupling seam, not an optional extra.</a:t>
+            </a:r>
+          </a:p>
+        </p:txBody>
+      </p:sp>
+      <p:sp>
+        <p:nvSpPr>
+          <p:cNvPr id="10" name="Rectangle 9"/>
+          <p:cNvSpPr/>
+          <p:nvPr/>
+        </p:nvSpPr>
+        <p:spPr>
+          <a:xfrm>
+            <a:off x="0" y="6565392"/>
+            <a:ext cx="12191695" cy="38100"/>
+          </a:xfrm>
+          <a:prstGeom prst="rect">
+            <a:avLst/>
+          </a:prstGeom>
+          <a:solidFill>
+            <a:srgbClr val="27B5CE"/>
+          </a:solidFill>
+          <a:ln>
+            <a:noFill/>
+          </a:ln>
+          <a:effectLst/>
+        </p:spPr>
+        <p:style>
+          <a:lnRef idx="1">
+            <a:schemeClr val="accent1"/>
+          </a:lnRef>
+          <a:fillRef idx="3">
+            <a:schemeClr val="accent1"/>
+          </a:fillRef>
+          <a:effectRef idx="2">
+            <a:schemeClr val="accent1"/>
+          </a:effectRef>
+          <a:fontRef idx="minor">
+            <a:schemeClr val="lt1"/>
+          </a:fontRef>
+        </p:style>
+        <p:txBody>
+          <a:bodyPr rtlCol="0" anchor="ctr"/>
+          <a:lstStyle/>
+          <a:p>
+            <a:pPr algn="ctr"/>
+          </a:p>
+        </p:txBody>
+      </p:sp>
+      <p:sp>
+        <p:nvSpPr>
+          <p:cNvPr id="11" name="TextBox 10"/>
+          <p:cNvSpPr txBox="1"/>
+          <p:nvPr/>
+        </p:nvSpPr>
+        <p:spPr>
+          <a:xfrm>
             <a:off x="502920" y="6400800"/>
             <a:ext cx="5486400" cy="320040"/>
           </a:xfrm>
@@ -6314,7 +6410,7 @@
       </p:sp>
       <p:sp>
         <p:nvSpPr>
-          <p:cNvPr id="7" name="TextBox 6"/>
+          <p:cNvPr id="12" name="TextBox 11"/>
           <p:cNvSpPr txBox="1"/>
           <p:nvPr/>
         </p:nvSpPr>
@@ -6342,7 +6438,7 @@
                 </a:solidFill>
                 <a:latin typeface="Roboto"/>
               </a:rPr>
-              <a:t>9</a:t>
+              <a:t>10</a:t>
             </a:r>
           </a:p>
         </p:txBody>
@@ -6375,48 +6471,14 @@
       <p:grpSpPr/>
       <p:sp>
         <p:nvSpPr>
-          <p:cNvPr id="2" name="TextBox 1"/>
-          <p:cNvSpPr txBox="1"/>
-          <p:nvPr/>
-        </p:nvSpPr>
-        <p:spPr>
-          <a:xfrm>
-            <a:off x="640080" y="457200"/>
-            <a:ext cx="10881360" cy="960120"/>
-          </a:xfrm>
-          <a:prstGeom prst="rect">
-            <a:avLst/>
-          </a:prstGeom>
-          <a:noFill/>
-        </p:spPr>
-        <p:txBody>
-          <a:bodyPr wrap="square" anchor="t" lIns="0" rIns="0" tIns="0" bIns="0">
-            <a:spAutoFit/>
-          </a:bodyPr>
-          <a:lstStyle/>
-          <a:p>
-            <a:r>
-              <a:rPr sz="2800" b="1" i="0">
-                <a:solidFill>
-                  <a:srgbClr val="2A2929"/>
-                </a:solidFill>
-                <a:latin typeface="Roboto"/>
-              </a:rPr>
-              <a:t>The target architecture</a:t>
-            </a:r>
-          </a:p>
-        </p:txBody>
-      </p:sp>
-      <p:sp>
-        <p:nvSpPr>
-          <p:cNvPr id="3" name="Rectangle 2"/>
+          <p:cNvPr id="2" name="Rectangle 1"/>
           <p:cNvSpPr/>
           <p:nvPr/>
         </p:nvSpPr>
         <p:spPr>
           <a:xfrm>
-            <a:off x="658368" y="1371600"/>
-            <a:ext cx="1463040" cy="50800"/>
+            <a:off x="0" y="0"/>
+            <a:ext cx="3931920" cy="6858000"/>
           </a:xfrm>
           <a:prstGeom prst="rect">
             <a:avLst/>
@@ -6453,14 +6515,14 @@
       </p:sp>
       <p:sp>
         <p:nvSpPr>
-          <p:cNvPr id="4" name="TextBox 3"/>
+          <p:cNvPr id="3" name="TextBox 2"/>
           <p:cNvSpPr txBox="1"/>
           <p:nvPr/>
         </p:nvSpPr>
         <p:spPr>
           <a:xfrm>
-            <a:off x="658368" y="1737360"/>
-            <a:ext cx="5486400" cy="4297680"/>
+            <a:off x="365760" y="2103120"/>
+            <a:ext cx="3291840" cy="2194560"/>
           </a:xfrm>
           <a:prstGeom prst="rect">
             <a:avLst/>
@@ -6473,127 +6535,87 @@
           </a:bodyPr>
           <a:lstStyle/>
           <a:p>
-            <a:pPr marL="0" indent="0">
-              <a:lnSpc>
-                <a:spcPct val="105000"/>
-              </a:lnSpc>
+            <a:r>
+              <a:rPr sz="13000" b="1" i="0">
+                <a:solidFill>
+                  <a:srgbClr val="FFFFFF"/>
+                </a:solidFill>
+                <a:latin typeface="Roboto"/>
+              </a:rPr>
+              <a:t>03</a:t>
+            </a:r>
+          </a:p>
+        </p:txBody>
+      </p:sp>
+      <p:sp>
+        <p:nvSpPr>
+          <p:cNvPr id="4" name="TextBox 3"/>
+          <p:cNvSpPr txBox="1"/>
+          <p:nvPr/>
+        </p:nvSpPr>
+        <p:spPr>
+          <a:xfrm>
+            <a:off x="4480560" y="2468880"/>
+            <a:ext cx="7132320" cy="2194560"/>
+          </a:xfrm>
+          <a:prstGeom prst="rect">
+            <a:avLst/>
+          </a:prstGeom>
+          <a:noFill/>
+        </p:spPr>
+        <p:txBody>
+          <a:bodyPr wrap="square" anchor="t" lIns="0" rIns="0" tIns="0" bIns="0">
+            <a:spAutoFit/>
+          </a:bodyPr>
+          <a:lstStyle/>
+          <a:p>
+            <a:r>
+              <a:rPr sz="1600" b="1" i="0">
+                <a:solidFill>
+                  <a:srgbClr val="205F61"/>
+                </a:solidFill>
+                <a:latin typeface="Roboto"/>
+              </a:rPr>
+              <a:t>SECTION</a:t>
+            </a:r>
+          </a:p>
+          <a:p>
+            <a:pPr>
               <a:spcBef>
-                <a:spcPts val="0"/>
+                <a:spcPts val="600"/>
               </a:spcBef>
-              <a:spcAft>
+            </a:pPr>
+            <a:r>
+              <a:rPr sz="3800" b="1" i="0">
+                <a:solidFill>
+                  <a:srgbClr val="2A2929"/>
+                </a:solidFill>
+                <a:latin typeface="Roboto"/>
+              </a:rPr>
+              <a:t>The architecture, drawn, and its contract</a:t>
+            </a:r>
+          </a:p>
+          <a:p>
+            <a:pPr>
+              <a:spcBef>
                 <a:spcPts val="1000"/>
-              </a:spcAft>
+              </a:spcBef>
             </a:pPr>
             <a:r>
-              <a:rPr sz="1700" b="1" i="0">
-                <a:solidFill>
-                  <a:srgbClr val="EDAB0C"/>
-                </a:solidFill>
-                <a:latin typeface="Roboto"/>
-              </a:rPr>
-              <a:t>■  </a:t>
-            </a:r>
-            <a:r>
-              <a:rPr sz="1700" b="0" i="0">
-                <a:solidFill>
-                  <a:srgbClr val="2A2929"/>
-                </a:solidFill>
-                <a:latin typeface="Roboto"/>
-              </a:rPr>
-              <a:t>Flow: website webhook -&gt; API gateway -&gt; queue -&gt; function -&gt; NoSQL datastore.</a:t>
-            </a:r>
-          </a:p>
-          <a:p>
-            <a:pPr marL="0" indent="0">
-              <a:lnSpc>
-                <a:spcPct val="105000"/>
-              </a:lnSpc>
-              <a:spcBef>
-                <a:spcPts val="0"/>
-              </a:spcBef>
-              <a:spcAft>
-                <a:spcPts val="1000"/>
-              </a:spcAft>
-            </a:pPr>
-            <a:r>
-              <a:rPr sz="1700" b="1" i="0">
-                <a:solidFill>
-                  <a:srgbClr val="EDAB0C"/>
-                </a:solidFill>
-                <a:latin typeface="Roboto"/>
-              </a:rPr>
-              <a:t>■  </a:t>
-            </a:r>
-            <a:r>
-              <a:rPr sz="1700" b="0" i="0">
-                <a:solidFill>
-                  <a:srgbClr val="2A2929"/>
-                </a:solidFill>
-                <a:latin typeface="Roboto"/>
-              </a:rPr>
-              <a:t>The website knows only the webhook; each stage is independently scalable and replaceable.</a:t>
-            </a:r>
-          </a:p>
-          <a:p>
-            <a:pPr marL="0" indent="0">
-              <a:lnSpc>
-                <a:spcPct val="105000"/>
-              </a:lnSpc>
-              <a:spcBef>
-                <a:spcPts val="0"/>
-              </a:spcBef>
-              <a:spcAft>
-                <a:spcPts val="1000"/>
-              </a:spcAft>
-            </a:pPr>
-            <a:r>
-              <a:rPr sz="1700" b="1" i="0">
-                <a:solidFill>
-                  <a:srgbClr val="EDAB0C"/>
-                </a:solidFill>
-                <a:latin typeface="Roboto"/>
-              </a:rPr>
-              <a:t>■  </a:t>
-            </a:r>
-            <a:r>
-              <a:rPr sz="1700" b="0" i="0">
-                <a:solidFill>
-                  <a:srgbClr val="2A2929"/>
-                </a:solidFill>
-                <a:latin typeface="Roboto"/>
-              </a:rPr>
-              <a:t>The store sits in the India region (ap-south-1) so the access logs are resident by construction.</a:t>
-            </a:r>
-          </a:p>
-        </p:txBody>
-      </p:sp>
-      <p:pic>
-        <p:nvPicPr>
-          <p:cNvPr id="5" name="Picture 4" descr="microservice-arch.png"/>
-          <p:cNvPicPr>
-            <a:picLocks noChangeAspect="1"/>
-          </p:cNvPicPr>
-          <p:nvPr/>
-        </p:nvPicPr>
-        <p:blipFill>
-          <a:blip r:embed="rId2"/>
-          <a:stretch>
-            <a:fillRect/>
-          </a:stretch>
-        </p:blipFill>
-        <p:spPr>
-          <a:xfrm>
-            <a:off x="8167781" y="1783080"/>
-            <a:ext cx="1586677" cy="4023360"/>
-          </a:xfrm>
-          <a:prstGeom prst="rect">
-            <a:avLst/>
-          </a:prstGeom>
-        </p:spPr>
-      </p:pic>
-      <p:sp>
-        <p:nvSpPr>
-          <p:cNvPr id="6" name="Rectangle 5"/>
+              <a:rPr sz="2000" b="0" i="1">
+                <a:solidFill>
+                  <a:srgbClr val="484848"/>
+                </a:solidFill>
+                <a:latin typeface="Roboto Light"/>
+              </a:rPr>
+              <a:t>cohesive, loosely coupled, contract-first</a:t>
+            </a:r>
+          </a:p>
+        </p:txBody>
+      </p:sp>
+      <p:sp>
+        <p:nvSpPr>
+          <p:cNvPr id="5" name="Rectangle 4"/>
           <p:cNvSpPr/>
           <p:nvPr/>
         </p:nvSpPr>
@@ -6637,7 +6659,7 @@
       </p:sp>
       <p:sp>
         <p:nvSpPr>
-          <p:cNvPr id="7" name="TextBox 6"/>
+          <p:cNvPr id="6" name="TextBox 5"/>
           <p:cNvSpPr txBox="1"/>
           <p:nvPr/>
         </p:nvSpPr>
@@ -6680,7 +6702,7 @@
       </p:sp>
       <p:sp>
         <p:nvSpPr>
-          <p:cNvPr id="8" name="TextBox 7"/>
+          <p:cNvPr id="7" name="TextBox 6"/>
           <p:cNvSpPr txBox="1"/>
           <p:nvPr/>
         </p:nvSpPr>
@@ -6708,7 +6730,7 @@
                 </a:solidFill>
                 <a:latin typeface="Roboto"/>
               </a:rPr>
-              <a:t>10</a:t>
+              <a:t/>
             </a:r>
           </a:p>
         </p:txBody>
@@ -6768,7 +6790,7 @@
                 </a:solidFill>
                 <a:latin typeface="Roboto"/>
               </a:rPr>
-              <a:t>The integration contract</a:t>
+              <a:t>Cohesion, coupling and the datastore</a:t>
             </a:r>
           </a:p>
         </p:txBody>
@@ -6866,7 +6888,7 @@
                 </a:solidFill>
                 <a:latin typeface="Roboto"/>
               </a:rPr>
-              <a:t>Define the webhook payload contract: the fields the website sends and what each means.</a:t>
+              <a:t>High cohesion: everything in the service serves its one job.</a:t>
             </a:r>
           </a:p>
           <a:p>
@@ -6897,7 +6919,7 @@
                 </a:solidFill>
                 <a:latin typeface="Roboto"/>
               </a:rPr>
-              <a:t>Version it and validate it — producer and consumer agree on this and nothing else.</a:t>
+              <a:t>Loose coupling: the queue between producer and consumer means neither breaks the other.</a:t>
             </a:r>
           </a:p>
           <a:p>
@@ -6928,7 +6950,7 @@
                 </a:solidFill>
                 <a:latin typeface="Roboto"/>
               </a:rPr>
-              <a:t>A clear contract is what lets the two sides evolve independently.</a:t>
+              <a:t>Persistent datastore: the record survives independently of the compute that wrote it.</a:t>
             </a:r>
           </a:p>
         </p:txBody>
@@ -7083,14 +7105,48 @@
       <p:grpSpPr/>
       <p:sp>
         <p:nvSpPr>
-          <p:cNvPr id="2" name="Rectangle 1"/>
+          <p:cNvPr id="2" name="TextBox 1"/>
+          <p:cNvSpPr txBox="1"/>
+          <p:nvPr/>
+        </p:nvSpPr>
+        <p:spPr>
+          <a:xfrm>
+            <a:off x="640080" y="457200"/>
+            <a:ext cx="10881360" cy="960120"/>
+          </a:xfrm>
+          <a:prstGeom prst="rect">
+            <a:avLst/>
+          </a:prstGeom>
+          <a:noFill/>
+        </p:spPr>
+        <p:txBody>
+          <a:bodyPr wrap="square" anchor="t" lIns="0" rIns="0" tIns="0" bIns="0">
+            <a:spAutoFit/>
+          </a:bodyPr>
+          <a:lstStyle/>
+          <a:p>
+            <a:r>
+              <a:rPr sz="2800" b="1" i="0">
+                <a:solidFill>
+                  <a:srgbClr val="2A2929"/>
+                </a:solidFill>
+                <a:latin typeface="Roboto"/>
+              </a:rPr>
+              <a:t>The target architecture</a:t>
+            </a:r>
+          </a:p>
+        </p:txBody>
+      </p:sp>
+      <p:sp>
+        <p:nvSpPr>
+          <p:cNvPr id="3" name="Rectangle 2"/>
           <p:cNvSpPr/>
           <p:nvPr/>
         </p:nvSpPr>
         <p:spPr>
           <a:xfrm>
-            <a:off x="0" y="0"/>
-            <a:ext cx="12191695" cy="1234440"/>
+            <a:off x="658368" y="1371600"/>
+            <a:ext cx="1463040" cy="50800"/>
           </a:xfrm>
           <a:prstGeom prst="rect">
             <a:avLst/>
@@ -7127,101 +7183,14 @@
       </p:sp>
       <p:sp>
         <p:nvSpPr>
-          <p:cNvPr id="3" name="Rounded Rectangle 2"/>
-          <p:cNvSpPr/>
-          <p:nvPr/>
-        </p:nvSpPr>
-        <p:spPr>
-          <a:xfrm>
-            <a:off x="640080" y="384048"/>
-            <a:ext cx="1691640" cy="457200"/>
-          </a:xfrm>
-          <a:prstGeom prst="roundRect">
-            <a:avLst/>
-          </a:prstGeom>
-          <a:solidFill>
-            <a:srgbClr val="2A2929"/>
-          </a:solidFill>
-          <a:ln>
-            <a:noFill/>
-          </a:ln>
-          <a:effectLst/>
-        </p:spPr>
-        <p:style>
-          <a:lnRef idx="1">
-            <a:schemeClr val="accent1"/>
-          </a:lnRef>
-          <a:fillRef idx="3">
-            <a:schemeClr val="accent1"/>
-          </a:fillRef>
-          <a:effectRef idx="2">
-            <a:schemeClr val="accent1"/>
-          </a:effectRef>
-          <a:fontRef idx="minor">
-            <a:schemeClr val="lt1"/>
-          </a:fontRef>
-        </p:style>
-        <p:txBody>
-          <a:bodyPr rtlCol="0" anchor="ctr"/>
-          <a:lstStyle/>
-          <a:p>
-            <a:pPr algn="ctr"/>
-            <a:r>
-              <a:rPr sz="1400" b="1" i="0">
-                <a:solidFill>
-                  <a:srgbClr val="FBB900"/>
-                </a:solidFill>
-                <a:latin typeface="Roboto"/>
-              </a:rPr>
-              <a:t>ACTIVITY</a:t>
-            </a:r>
-          </a:p>
-        </p:txBody>
-      </p:sp>
-      <p:sp>
-        <p:nvSpPr>
           <p:cNvPr id="4" name="TextBox 3"/>
           <p:cNvSpPr txBox="1"/>
           <p:nvPr/>
         </p:nvSpPr>
         <p:spPr>
           <a:xfrm>
-            <a:off x="2560320" y="310896"/>
-            <a:ext cx="8961120" cy="685800"/>
-          </a:xfrm>
-          <a:prstGeom prst="rect">
-            <a:avLst/>
-          </a:prstGeom>
-          <a:noFill/>
-        </p:spPr>
-        <p:txBody>
-          <a:bodyPr wrap="square" anchor="ctr" lIns="0" rIns="0" tIns="0" bIns="0">
-            <a:spAutoFit/>
-          </a:bodyPr>
-          <a:lstStyle/>
-          <a:p>
-            <a:r>
-              <a:rPr sz="2600" b="1" i="0">
-                <a:solidFill>
-                  <a:srgbClr val="FFFFFF"/>
-                </a:solidFill>
-                <a:latin typeface="Roboto"/>
-              </a:rPr>
-              <a:t>Design the architecture &amp; contract</a:t>
-            </a:r>
-          </a:p>
-        </p:txBody>
-      </p:sp>
-      <p:sp>
-        <p:nvSpPr>
-          <p:cNvPr id="5" name="TextBox 4"/>
-          <p:cNvSpPr txBox="1"/>
-          <p:nvPr/>
-        </p:nvSpPr>
-        <p:spPr>
-          <a:xfrm>
-            <a:off x="658368" y="1554480"/>
-            <a:ext cx="10881360" cy="4297680"/>
+            <a:off x="658368" y="1737360"/>
+            <a:ext cx="5486400" cy="4297680"/>
           </a:xfrm>
           <a:prstGeom prst="rect">
             <a:avLst/>
@@ -7261,7 +7230,7 @@
                 </a:solidFill>
                 <a:latin typeface="Roboto"/>
               </a:rPr>
-              <a:t>For the practice scenario, design the microservice architecture (cohesive, loosely coupled, persistent, API / messaging).</a:t>
+              <a:t>The flow: webhook, then gateway, then queue, then function, then datastore.</a:t>
             </a:r>
           </a:p>
           <a:p>
@@ -7292,7 +7261,768 @@
                 </a:solidFill>
                 <a:latin typeface="Roboto"/>
               </a:rPr>
-              <a:t>Define the webhook integration contract.</a:t>
+              <a:t>The platform knows only the webhook; each stage is independently scalable and replaceable.</a:t>
+            </a:r>
+          </a:p>
+          <a:p>
+            <a:pPr marL="0" indent="0">
+              <a:lnSpc>
+                <a:spcPct val="105000"/>
+              </a:lnSpc>
+              <a:spcBef>
+                <a:spcPts val="0"/>
+              </a:spcBef>
+              <a:spcAft>
+                <a:spcPts val="1000"/>
+              </a:spcAft>
+            </a:pPr>
+            <a:r>
+              <a:rPr sz="1700" b="1" i="0">
+                <a:solidFill>
+                  <a:srgbClr val="EDAB0C"/>
+                </a:solidFill>
+                <a:latin typeface="Roboto"/>
+              </a:rPr>
+              <a:t>■  </a:t>
+            </a:r>
+            <a:r>
+              <a:rPr sz="1700" b="0" i="0">
+                <a:solidFill>
+                  <a:srgbClr val="2A2929"/>
+                </a:solidFill>
+                <a:latin typeface="Roboto"/>
+              </a:rPr>
+              <a:t>The store sits in the region the obligation names — resident by construction, not by policy.</a:t>
+            </a:r>
+          </a:p>
+        </p:txBody>
+      </p:sp>
+      <p:pic>
+        <p:nvPicPr>
+          <p:cNvPr id="5" name="Picture 4" descr="microservice-arch.png"/>
+          <p:cNvPicPr>
+            <a:picLocks noChangeAspect="1"/>
+          </p:cNvPicPr>
+          <p:nvPr/>
+        </p:nvPicPr>
+        <p:blipFill>
+          <a:blip r:embed="rId2"/>
+          <a:stretch>
+            <a:fillRect/>
+          </a:stretch>
+        </p:blipFill>
+        <p:spPr>
+          <a:xfrm>
+            <a:off x="8167781" y="1783080"/>
+            <a:ext cx="1586677" cy="4023360"/>
+          </a:xfrm>
+          <a:prstGeom prst="rect">
+            <a:avLst/>
+          </a:prstGeom>
+        </p:spPr>
+      </p:pic>
+      <p:sp>
+        <p:nvSpPr>
+          <p:cNvPr id="6" name="Rectangle 5"/>
+          <p:cNvSpPr/>
+          <p:nvPr/>
+        </p:nvSpPr>
+        <p:spPr>
+          <a:xfrm>
+            <a:off x="0" y="6565392"/>
+            <a:ext cx="12191695" cy="38100"/>
+          </a:xfrm>
+          <a:prstGeom prst="rect">
+            <a:avLst/>
+          </a:prstGeom>
+          <a:solidFill>
+            <a:srgbClr val="205F61"/>
+          </a:solidFill>
+          <a:ln>
+            <a:noFill/>
+          </a:ln>
+          <a:effectLst/>
+        </p:spPr>
+        <p:style>
+          <a:lnRef idx="1">
+            <a:schemeClr val="accent1"/>
+          </a:lnRef>
+          <a:fillRef idx="3">
+            <a:schemeClr val="accent1"/>
+          </a:fillRef>
+          <a:effectRef idx="2">
+            <a:schemeClr val="accent1"/>
+          </a:effectRef>
+          <a:fontRef idx="minor">
+            <a:schemeClr val="lt1"/>
+          </a:fontRef>
+        </p:style>
+        <p:txBody>
+          <a:bodyPr rtlCol="0" anchor="ctr"/>
+          <a:lstStyle/>
+          <a:p>
+            <a:pPr algn="ctr"/>
+          </a:p>
+        </p:txBody>
+      </p:sp>
+      <p:sp>
+        <p:nvSpPr>
+          <p:cNvPr id="7" name="TextBox 6"/>
+          <p:cNvSpPr txBox="1"/>
+          <p:nvPr/>
+        </p:nvSpPr>
+        <p:spPr>
+          <a:xfrm>
+            <a:off x="502920" y="6400800"/>
+            <a:ext cx="5486400" cy="320040"/>
+          </a:xfrm>
+          <a:prstGeom prst="rect">
+            <a:avLst/>
+          </a:prstGeom>
+          <a:noFill/>
+        </p:spPr>
+        <p:txBody>
+          <a:bodyPr wrap="square" anchor="t" lIns="0" rIns="0" tIns="0" bIns="0">
+            <a:spAutoFit/>
+          </a:bodyPr>
+          <a:lstStyle/>
+          <a:p>
+            <a:r>
+              <a:rPr sz="1100" b="1" i="0">
+                <a:solidFill>
+                  <a:srgbClr val="2A2929"/>
+                </a:solidFill>
+                <a:latin typeface="Roboto"/>
+              </a:rPr>
+              <a:t>Kangan </a:t>
+            </a:r>
+            <a:r>
+              <a:rPr sz="1100" b="1" i="0">
+                <a:solidFill>
+                  <a:srgbClr val="D68E10"/>
+                </a:solidFill>
+                <a:latin typeface="Roboto"/>
+              </a:rPr>
+              <a:t>Institute</a:t>
+            </a:r>
+          </a:p>
+        </p:txBody>
+      </p:sp>
+      <p:sp>
+        <p:nvSpPr>
+          <p:cNvPr id="8" name="TextBox 7"/>
+          <p:cNvSpPr txBox="1"/>
+          <p:nvPr/>
+        </p:nvSpPr>
+        <p:spPr>
+          <a:xfrm>
+            <a:off x="10515600" y="6400800"/>
+            <a:ext cx="1188720" cy="320040"/>
+          </a:xfrm>
+          <a:prstGeom prst="rect">
+            <a:avLst/>
+          </a:prstGeom>
+          <a:noFill/>
+        </p:spPr>
+        <p:txBody>
+          <a:bodyPr wrap="square" anchor="t" lIns="0" rIns="0" tIns="0" bIns="0">
+            <a:spAutoFit/>
+          </a:bodyPr>
+          <a:lstStyle/>
+          <a:p>
+            <a:pPr algn="r"/>
+            <a:r>
+              <a:rPr sz="1100" b="0" i="0">
+                <a:solidFill>
+                  <a:srgbClr val="7A7A7A"/>
+                </a:solidFill>
+                <a:latin typeface="Roboto"/>
+              </a:rPr>
+              <a:t>12</a:t>
+            </a:r>
+          </a:p>
+        </p:txBody>
+      </p:sp>
+    </p:spTree>
+  </p:cSld>
+  <p:clrMapOvr>
+    <a:masterClrMapping/>
+  </p:clrMapOvr>
+</p:sld>
+</file>
+
+<file path=ppt/slides/slide17.xml><?xml version="1.0" encoding="utf-8"?>
+<p:sld xmlns:a="http://schemas.openxmlformats.org/drawingml/2006/main" xmlns:p="http://schemas.openxmlformats.org/presentationml/2006/main" xmlns:r="http://schemas.openxmlformats.org/officeDocument/2006/relationships">
+  <p:cSld>
+    <p:bg>
+      <p:bgPr>
+        <a:solidFill>
+          <a:srgbClr val="FFFFFF"/>
+        </a:solidFill>
+        <a:effectLst/>
+      </p:bgPr>
+    </p:bg>
+    <p:spTree>
+      <p:nvGrpSpPr>
+        <p:cNvPr id="1" name=""/>
+        <p:cNvGrpSpPr/>
+        <p:nvPr/>
+      </p:nvGrpSpPr>
+      <p:grpSpPr/>
+      <p:sp>
+        <p:nvSpPr>
+          <p:cNvPr id="2" name="TextBox 1"/>
+          <p:cNvSpPr txBox="1"/>
+          <p:nvPr/>
+        </p:nvSpPr>
+        <p:spPr>
+          <a:xfrm>
+            <a:off x="640080" y="457200"/>
+            <a:ext cx="10881360" cy="960120"/>
+          </a:xfrm>
+          <a:prstGeom prst="rect">
+            <a:avLst/>
+          </a:prstGeom>
+          <a:noFill/>
+        </p:spPr>
+        <p:txBody>
+          <a:bodyPr wrap="square" anchor="t" lIns="0" rIns="0" tIns="0" bIns="0">
+            <a:spAutoFit/>
+          </a:bodyPr>
+          <a:lstStyle/>
+          <a:p>
+            <a:r>
+              <a:rPr sz="2800" b="1" i="0">
+                <a:solidFill>
+                  <a:srgbClr val="2A2929"/>
+                </a:solidFill>
+                <a:latin typeface="Roboto"/>
+              </a:rPr>
+              <a:t>The integration contract</a:t>
+            </a:r>
+          </a:p>
+        </p:txBody>
+      </p:sp>
+      <p:sp>
+        <p:nvSpPr>
+          <p:cNvPr id="3" name="Rectangle 2"/>
+          <p:cNvSpPr/>
+          <p:nvPr/>
+        </p:nvSpPr>
+        <p:spPr>
+          <a:xfrm>
+            <a:off x="658368" y="1371600"/>
+            <a:ext cx="1463040" cy="50800"/>
+          </a:xfrm>
+          <a:prstGeom prst="rect">
+            <a:avLst/>
+          </a:prstGeom>
+          <a:solidFill>
+            <a:srgbClr val="205F61"/>
+          </a:solidFill>
+          <a:ln>
+            <a:noFill/>
+          </a:ln>
+          <a:effectLst/>
+        </p:spPr>
+        <p:style>
+          <a:lnRef idx="1">
+            <a:schemeClr val="accent1"/>
+          </a:lnRef>
+          <a:fillRef idx="3">
+            <a:schemeClr val="accent1"/>
+          </a:fillRef>
+          <a:effectRef idx="2">
+            <a:schemeClr val="accent1"/>
+          </a:effectRef>
+          <a:fontRef idx="minor">
+            <a:schemeClr val="lt1"/>
+          </a:fontRef>
+        </p:style>
+        <p:txBody>
+          <a:bodyPr rtlCol="0" anchor="ctr"/>
+          <a:lstStyle/>
+          <a:p>
+            <a:pPr algn="ctr"/>
+          </a:p>
+        </p:txBody>
+      </p:sp>
+      <p:sp>
+        <p:nvSpPr>
+          <p:cNvPr id="4" name="TextBox 3"/>
+          <p:cNvSpPr txBox="1"/>
+          <p:nvPr/>
+        </p:nvSpPr>
+        <p:spPr>
+          <a:xfrm>
+            <a:off x="658368" y="1691640"/>
+            <a:ext cx="10881360" cy="4480560"/>
+          </a:xfrm>
+          <a:prstGeom prst="rect">
+            <a:avLst/>
+          </a:prstGeom>
+          <a:noFill/>
+        </p:spPr>
+        <p:txBody>
+          <a:bodyPr wrap="square" anchor="ctr" lIns="0" rIns="0" tIns="0" bIns="0">
+            <a:spAutoFit/>
+          </a:bodyPr>
+          <a:lstStyle/>
+          <a:p>
+            <a:pPr marL="0" indent="0">
+              <a:lnSpc>
+                <a:spcPct val="105000"/>
+              </a:lnSpc>
+              <a:spcBef>
+                <a:spcPts val="0"/>
+              </a:spcBef>
+              <a:spcAft>
+                <a:spcPts val="1000"/>
+              </a:spcAft>
+            </a:pPr>
+            <a:r>
+              <a:rPr sz="2400" b="1" i="0">
+                <a:solidFill>
+                  <a:srgbClr val="EDAB0C"/>
+                </a:solidFill>
+                <a:latin typeface="Roboto"/>
+              </a:rPr>
+              <a:t>■  </a:t>
+            </a:r>
+            <a:r>
+              <a:rPr sz="2400" b="0" i="0">
+                <a:solidFill>
+                  <a:srgbClr val="2A2929"/>
+                </a:solidFill>
+                <a:latin typeface="Roboto"/>
+              </a:rPr>
+              <a:t>Define the webhook payload: the fields the platform sends and what each means.</a:t>
+            </a:r>
+          </a:p>
+          <a:p>
+            <a:pPr marL="0" indent="0">
+              <a:lnSpc>
+                <a:spcPct val="105000"/>
+              </a:lnSpc>
+              <a:spcBef>
+                <a:spcPts val="0"/>
+              </a:spcBef>
+              <a:spcAft>
+                <a:spcPts val="1000"/>
+              </a:spcAft>
+            </a:pPr>
+            <a:r>
+              <a:rPr sz="2400" b="1" i="0">
+                <a:solidFill>
+                  <a:srgbClr val="EDAB0C"/>
+                </a:solidFill>
+                <a:latin typeface="Roboto"/>
+              </a:rPr>
+              <a:t>■  </a:t>
+            </a:r>
+            <a:r>
+              <a:rPr sz="2400" b="0" i="0">
+                <a:solidFill>
+                  <a:srgbClr val="2A2929"/>
+                </a:solidFill>
+                <a:latin typeface="Roboto"/>
+              </a:rPr>
+              <a:t>Version it and validate it — producer and consumer agree on this and nothing else.</a:t>
+            </a:r>
+          </a:p>
+          <a:p>
+            <a:pPr marL="0" indent="0">
+              <a:lnSpc>
+                <a:spcPct val="105000"/>
+              </a:lnSpc>
+              <a:spcBef>
+                <a:spcPts val="0"/>
+              </a:spcBef>
+              <a:spcAft>
+                <a:spcPts val="1000"/>
+              </a:spcAft>
+            </a:pPr>
+            <a:r>
+              <a:rPr sz="2400" b="1" i="0">
+                <a:solidFill>
+                  <a:srgbClr val="EDAB0C"/>
+                </a:solidFill>
+                <a:latin typeface="Roboto"/>
+              </a:rPr>
+              <a:t>■  </a:t>
+            </a:r>
+            <a:r>
+              <a:rPr sz="2400" b="0" i="0">
+                <a:solidFill>
+                  <a:srgbClr val="2A2929"/>
+                </a:solidFill>
+                <a:latin typeface="Roboto"/>
+              </a:rPr>
+              <a:t>A clear contract is what lets the two sides evolve independently.</a:t>
+            </a:r>
+          </a:p>
+        </p:txBody>
+      </p:sp>
+      <p:sp>
+        <p:nvSpPr>
+          <p:cNvPr id="5" name="Rectangle 4"/>
+          <p:cNvSpPr/>
+          <p:nvPr/>
+        </p:nvSpPr>
+        <p:spPr>
+          <a:xfrm>
+            <a:off x="0" y="6565392"/>
+            <a:ext cx="12191695" cy="38100"/>
+          </a:xfrm>
+          <a:prstGeom prst="rect">
+            <a:avLst/>
+          </a:prstGeom>
+          <a:solidFill>
+            <a:srgbClr val="205F61"/>
+          </a:solidFill>
+          <a:ln>
+            <a:noFill/>
+          </a:ln>
+          <a:effectLst/>
+        </p:spPr>
+        <p:style>
+          <a:lnRef idx="1">
+            <a:schemeClr val="accent1"/>
+          </a:lnRef>
+          <a:fillRef idx="3">
+            <a:schemeClr val="accent1"/>
+          </a:fillRef>
+          <a:effectRef idx="2">
+            <a:schemeClr val="accent1"/>
+          </a:effectRef>
+          <a:fontRef idx="minor">
+            <a:schemeClr val="lt1"/>
+          </a:fontRef>
+        </p:style>
+        <p:txBody>
+          <a:bodyPr rtlCol="0" anchor="ctr"/>
+          <a:lstStyle/>
+          <a:p>
+            <a:pPr algn="ctr"/>
+          </a:p>
+        </p:txBody>
+      </p:sp>
+      <p:sp>
+        <p:nvSpPr>
+          <p:cNvPr id="6" name="TextBox 5"/>
+          <p:cNvSpPr txBox="1"/>
+          <p:nvPr/>
+        </p:nvSpPr>
+        <p:spPr>
+          <a:xfrm>
+            <a:off x="502920" y="6400800"/>
+            <a:ext cx="5486400" cy="320040"/>
+          </a:xfrm>
+          <a:prstGeom prst="rect">
+            <a:avLst/>
+          </a:prstGeom>
+          <a:noFill/>
+        </p:spPr>
+        <p:txBody>
+          <a:bodyPr wrap="square" anchor="t" lIns="0" rIns="0" tIns="0" bIns="0">
+            <a:spAutoFit/>
+          </a:bodyPr>
+          <a:lstStyle/>
+          <a:p>
+            <a:r>
+              <a:rPr sz="1100" b="1" i="0">
+                <a:solidFill>
+                  <a:srgbClr val="2A2929"/>
+                </a:solidFill>
+                <a:latin typeface="Roboto"/>
+              </a:rPr>
+              <a:t>Kangan </a:t>
+            </a:r>
+            <a:r>
+              <a:rPr sz="1100" b="1" i="0">
+                <a:solidFill>
+                  <a:srgbClr val="D68E10"/>
+                </a:solidFill>
+                <a:latin typeface="Roboto"/>
+              </a:rPr>
+              <a:t>Institute</a:t>
+            </a:r>
+          </a:p>
+        </p:txBody>
+      </p:sp>
+      <p:sp>
+        <p:nvSpPr>
+          <p:cNvPr id="7" name="TextBox 6"/>
+          <p:cNvSpPr txBox="1"/>
+          <p:nvPr/>
+        </p:nvSpPr>
+        <p:spPr>
+          <a:xfrm>
+            <a:off x="10515600" y="6400800"/>
+            <a:ext cx="1188720" cy="320040"/>
+          </a:xfrm>
+          <a:prstGeom prst="rect">
+            <a:avLst/>
+          </a:prstGeom>
+          <a:noFill/>
+        </p:spPr>
+        <p:txBody>
+          <a:bodyPr wrap="square" anchor="t" lIns="0" rIns="0" tIns="0" bIns="0">
+            <a:spAutoFit/>
+          </a:bodyPr>
+          <a:lstStyle/>
+          <a:p>
+            <a:pPr algn="r"/>
+            <a:r>
+              <a:rPr sz="1100" b="0" i="0">
+                <a:solidFill>
+                  <a:srgbClr val="7A7A7A"/>
+                </a:solidFill>
+                <a:latin typeface="Roboto"/>
+              </a:rPr>
+              <a:t>13</a:t>
+            </a:r>
+          </a:p>
+        </p:txBody>
+      </p:sp>
+    </p:spTree>
+  </p:cSld>
+  <p:clrMapOvr>
+    <a:masterClrMapping/>
+  </p:clrMapOvr>
+</p:sld>
+</file>
+
+<file path=ppt/slides/slide18.xml><?xml version="1.0" encoding="utf-8"?>
+<p:sld xmlns:a="http://schemas.openxmlformats.org/drawingml/2006/main" xmlns:p="http://schemas.openxmlformats.org/presentationml/2006/main" xmlns:r="http://schemas.openxmlformats.org/officeDocument/2006/relationships">
+  <p:cSld>
+    <p:bg>
+      <p:bgPr>
+        <a:solidFill>
+          <a:srgbClr val="FFFFFF"/>
+        </a:solidFill>
+        <a:effectLst/>
+      </p:bgPr>
+    </p:bg>
+    <p:spTree>
+      <p:nvGrpSpPr>
+        <p:cNvPr id="1" name=""/>
+        <p:cNvGrpSpPr/>
+        <p:nvPr/>
+      </p:nvGrpSpPr>
+      <p:grpSpPr/>
+      <p:sp>
+        <p:nvSpPr>
+          <p:cNvPr id="2" name="Rectangle 1"/>
+          <p:cNvSpPr/>
+          <p:nvPr/>
+        </p:nvSpPr>
+        <p:spPr>
+          <a:xfrm>
+            <a:off x="0" y="0"/>
+            <a:ext cx="12191695" cy="1234440"/>
+          </a:xfrm>
+          <a:prstGeom prst="rect">
+            <a:avLst/>
+          </a:prstGeom>
+          <a:solidFill>
+            <a:srgbClr val="205F61"/>
+          </a:solidFill>
+          <a:ln>
+            <a:noFill/>
+          </a:ln>
+          <a:effectLst/>
+        </p:spPr>
+        <p:style>
+          <a:lnRef idx="1">
+            <a:schemeClr val="accent1"/>
+          </a:lnRef>
+          <a:fillRef idx="3">
+            <a:schemeClr val="accent1"/>
+          </a:fillRef>
+          <a:effectRef idx="2">
+            <a:schemeClr val="accent1"/>
+          </a:effectRef>
+          <a:fontRef idx="minor">
+            <a:schemeClr val="lt1"/>
+          </a:fontRef>
+        </p:style>
+        <p:txBody>
+          <a:bodyPr rtlCol="0" anchor="ctr"/>
+          <a:lstStyle/>
+          <a:p>
+            <a:pPr algn="ctr"/>
+          </a:p>
+        </p:txBody>
+      </p:sp>
+      <p:sp>
+        <p:nvSpPr>
+          <p:cNvPr id="3" name="Rounded Rectangle 2"/>
+          <p:cNvSpPr/>
+          <p:nvPr/>
+        </p:nvSpPr>
+        <p:spPr>
+          <a:xfrm>
+            <a:off x="640080" y="384048"/>
+            <a:ext cx="1691640" cy="457200"/>
+          </a:xfrm>
+          <a:prstGeom prst="roundRect">
+            <a:avLst/>
+          </a:prstGeom>
+          <a:solidFill>
+            <a:srgbClr val="2A2929"/>
+          </a:solidFill>
+          <a:ln>
+            <a:noFill/>
+          </a:ln>
+          <a:effectLst/>
+        </p:spPr>
+        <p:style>
+          <a:lnRef idx="1">
+            <a:schemeClr val="accent1"/>
+          </a:lnRef>
+          <a:fillRef idx="3">
+            <a:schemeClr val="accent1"/>
+          </a:fillRef>
+          <a:effectRef idx="2">
+            <a:schemeClr val="accent1"/>
+          </a:effectRef>
+          <a:fontRef idx="minor">
+            <a:schemeClr val="lt1"/>
+          </a:fontRef>
+        </p:style>
+        <p:txBody>
+          <a:bodyPr rtlCol="0" anchor="ctr"/>
+          <a:lstStyle/>
+          <a:p>
+            <a:pPr algn="ctr"/>
+            <a:r>
+              <a:rPr sz="1400" b="1" i="0">
+                <a:solidFill>
+                  <a:srgbClr val="FBB900"/>
+                </a:solidFill>
+                <a:latin typeface="Roboto"/>
+              </a:rPr>
+              <a:t>ACTIVITY</a:t>
+            </a:r>
+          </a:p>
+        </p:txBody>
+      </p:sp>
+      <p:sp>
+        <p:nvSpPr>
+          <p:cNvPr id="4" name="TextBox 3"/>
+          <p:cNvSpPr txBox="1"/>
+          <p:nvPr/>
+        </p:nvSpPr>
+        <p:spPr>
+          <a:xfrm>
+            <a:off x="2560320" y="310896"/>
+            <a:ext cx="8961120" cy="685800"/>
+          </a:xfrm>
+          <a:prstGeom prst="rect">
+            <a:avLst/>
+          </a:prstGeom>
+          <a:noFill/>
+        </p:spPr>
+        <p:txBody>
+          <a:bodyPr wrap="square" anchor="ctr" lIns="0" rIns="0" tIns="0" bIns="0">
+            <a:spAutoFit/>
+          </a:bodyPr>
+          <a:lstStyle/>
+          <a:p>
+            <a:r>
+              <a:rPr sz="2600" b="1" i="0">
+                <a:solidFill>
+                  <a:srgbClr val="FFFFFF"/>
+                </a:solidFill>
+                <a:latin typeface="Roboto"/>
+              </a:rPr>
+              <a:t>Draw the architecture and define the contract</a:t>
+            </a:r>
+          </a:p>
+        </p:txBody>
+      </p:sp>
+      <p:sp>
+        <p:nvSpPr>
+          <p:cNvPr id="5" name="TextBox 4"/>
+          <p:cNvSpPr txBox="1"/>
+          <p:nvPr/>
+        </p:nvSpPr>
+        <p:spPr>
+          <a:xfrm>
+            <a:off x="658368" y="1554480"/>
+            <a:ext cx="10881360" cy="4297680"/>
+          </a:xfrm>
+          <a:prstGeom prst="rect">
+            <a:avLst/>
+          </a:prstGeom>
+          <a:noFill/>
+        </p:spPr>
+        <p:txBody>
+          <a:bodyPr wrap="square" anchor="t" lIns="0" rIns="0" tIns="0" bIns="0">
+            <a:spAutoFit/>
+          </a:bodyPr>
+          <a:lstStyle/>
+          <a:p>
+            <a:pPr marL="0" indent="0">
+              <a:lnSpc>
+                <a:spcPct val="105000"/>
+              </a:lnSpc>
+              <a:spcBef>
+                <a:spcPts val="0"/>
+              </a:spcBef>
+              <a:spcAft>
+                <a:spcPts val="1000"/>
+              </a:spcAft>
+            </a:pPr>
+            <a:r>
+              <a:rPr sz="1700" b="1" i="0">
+                <a:solidFill>
+                  <a:srgbClr val="EDAB0C"/>
+                </a:solidFill>
+                <a:latin typeface="Roboto"/>
+              </a:rPr>
+              <a:t>■  </a:t>
+            </a:r>
+            <a:r>
+              <a:rPr sz="1700" b="0" i="0">
+                <a:solidFill>
+                  <a:srgbClr val="2A2929"/>
+                </a:solidFill>
+                <a:latin typeface="Roboto"/>
+              </a:rPr>
+              <a:t>Workbook — tasks 17 and 18.</a:t>
+            </a:r>
+          </a:p>
+          <a:p>
+            <a:pPr marL="0" indent="0">
+              <a:lnSpc>
+                <a:spcPct val="105000"/>
+              </a:lnSpc>
+              <a:spcBef>
+                <a:spcPts val="0"/>
+              </a:spcBef>
+              <a:spcAft>
+                <a:spcPts val="1000"/>
+              </a:spcAft>
+            </a:pPr>
+            <a:r>
+              <a:rPr sz="1700" b="1" i="0">
+                <a:solidFill>
+                  <a:srgbClr val="EDAB0C"/>
+                </a:solidFill>
+                <a:latin typeface="Roboto"/>
+              </a:rPr>
+              <a:t>■  </a:t>
+            </a:r>
+            <a:r>
+              <a:rPr sz="1700" b="0" i="0">
+                <a:solidFill>
+                  <a:srgbClr val="2A2929"/>
+                </a:solidFill>
+                <a:latin typeface="Roboto"/>
+              </a:rPr>
+              <a:t>Draw your microservice architecture, then define the webhook integration contract it hinges on.</a:t>
             </a:r>
           </a:p>
         </p:txBody>
@@ -7494,7 +8224,7 @@
                 </a:solidFill>
                 <a:latin typeface="Roboto"/>
               </a:rPr>
-              <a:t>12</a:t>
+              <a:t>14</a:t>
             </a:r>
           </a:p>
         </p:txBody>
@@ -7507,7 +8237,7 @@
 </p:sld>
 </file>
 
-<file path=ppt/slides/slide17.xml><?xml version="1.0" encoding="utf-8"?>
+<file path=ppt/slides/slide19.xml><?xml version="1.0" encoding="utf-8"?>
 <p:sld xmlns:a="http://schemas.openxmlformats.org/drawingml/2006/main" xmlns:p="http://schemas.openxmlformats.org/presentationml/2006/main" xmlns:r="http://schemas.openxmlformats.org/officeDocument/2006/relationships">
   <p:cSld>
     <p:bg>
@@ -7570,7 +8300,7 @@
                 </a:solidFill>
                 <a:latin typeface="Roboto"/>
               </a:rPr>
-              <a:t>Topic 2 · Key takeaways</a:t>
+              <a:t>Section 3 · Architecture and contract</a:t>
             </a:r>
           </a:p>
         </p:txBody>
@@ -7743,7 +8473,7 @@
                 </a:solidFill>
                 <a:latin typeface="Roboto"/>
               </a:rPr>
-              <a:t>A microservice does one job, owns its data, and exposes a narrow contract.</a:t>
+              <a:t>Every stage independently scalable; the platform knows only the webhook.</a:t>
             </a:r>
           </a:p>
         </p:txBody>
@@ -7872,7 +8602,7 @@
                 </a:solidFill>
                 <a:latin typeface="Roboto"/>
               </a:rPr>
-              <a:t>Serverless building blocks: API gateway, queue / topic, function, managed datastore.</a:t>
+              <a:t>Residency is where you put the box, not a policy you add later.</a:t>
             </a:r>
           </a:p>
         </p:txBody>
@@ -8001,7 +8731,7 @@
                 </a:solidFill>
                 <a:latin typeface="Roboto"/>
               </a:rPr>
-              <a:t>Design for high cohesion and loose coupling; the queue decouples producer from consumer.</a:t>
+              <a:t>Contract-first keeps the two sides independent.</a:t>
             </a:r>
           </a:p>
         </p:txBody>
@@ -8014,54 +8744,8 @@
         </p:nvSpPr>
         <p:spPr>
           <a:xfrm>
-            <a:off x="640080" y="4818888"/>
-            <a:ext cx="10927080" cy="841248"/>
-          </a:xfrm>
-          <a:prstGeom prst="rect">
-            <a:avLst/>
-          </a:prstGeom>
-          <a:solidFill>
-            <a:srgbClr val="FFFFFF"/>
-          </a:solidFill>
-          <a:ln w="12700">
-            <a:solidFill>
-              <a:srgbClr val="CCCCCC"/>
-            </a:solidFill>
-          </a:ln>
-          <a:effectLst/>
-        </p:spPr>
-        <p:style>
-          <a:lnRef idx="1">
-            <a:schemeClr val="accent1"/>
-          </a:lnRef>
-          <a:fillRef idx="3">
-            <a:schemeClr val="accent1"/>
-          </a:fillRef>
-          <a:effectRef idx="2">
-            <a:schemeClr val="accent1"/>
-          </a:effectRef>
-          <a:fontRef idx="minor">
-            <a:schemeClr val="lt1"/>
-          </a:fontRef>
-        </p:style>
-        <p:txBody>
-          <a:bodyPr rtlCol="0" anchor="ctr"/>
-          <a:lstStyle/>
-          <a:p>
-            <a:pPr algn="ctr"/>
-          </a:p>
-        </p:txBody>
-      </p:sp>
-      <p:sp>
-        <p:nvSpPr>
-          <p:cNvPr id="14" name="Rectangle 13"/>
-          <p:cNvSpPr/>
-          <p:nvPr/>
-        </p:nvSpPr>
-        <p:spPr>
-          <a:xfrm>
-            <a:off x="640080" y="4818888"/>
-            <a:ext cx="109728" cy="841248"/>
+            <a:off x="0" y="6565392"/>
+            <a:ext cx="12191695" cy="38100"/>
           </a:xfrm>
           <a:prstGeom prst="rect">
             <a:avLst/>
@@ -8098,90 +8782,7 @@
       </p:sp>
       <p:sp>
         <p:nvSpPr>
-          <p:cNvPr id="15" name="TextBox 14"/>
-          <p:cNvSpPr txBox="1"/>
-          <p:nvPr/>
-        </p:nvSpPr>
-        <p:spPr>
-          <a:xfrm>
-            <a:off x="960120" y="4818888"/>
-            <a:ext cx="10424160" cy="841248"/>
-          </a:xfrm>
-          <a:prstGeom prst="rect">
-            <a:avLst/>
-          </a:prstGeom>
-          <a:noFill/>
-        </p:spPr>
-        <p:txBody>
-          <a:bodyPr wrap="square" anchor="ctr" lIns="0" rIns="0" tIns="0" bIns="0">
-            <a:spAutoFit/>
-          </a:bodyPr>
-          <a:lstStyle/>
-          <a:p>
-            <a:pPr>
-              <a:lnSpc>
-                <a:spcPct val="100000"/>
-              </a:lnSpc>
-            </a:pPr>
-            <a:r>
-              <a:rPr sz="1700" b="0" i="0">
-                <a:solidFill>
-                  <a:srgbClr val="2A2929"/>
-                </a:solidFill>
-                <a:latin typeface="Roboto"/>
-              </a:rPr>
-              <a:t>Contract-first: the webhook payload contract is what keeps the two sides independent.</a:t>
-            </a:r>
-          </a:p>
-        </p:txBody>
-      </p:sp>
-      <p:sp>
-        <p:nvSpPr>
-          <p:cNvPr id="16" name="Rectangle 15"/>
-          <p:cNvSpPr/>
-          <p:nvPr/>
-        </p:nvSpPr>
-        <p:spPr>
-          <a:xfrm>
-            <a:off x="0" y="6565392"/>
-            <a:ext cx="12191695" cy="38100"/>
-          </a:xfrm>
-          <a:prstGeom prst="rect">
-            <a:avLst/>
-          </a:prstGeom>
-          <a:solidFill>
-            <a:srgbClr val="205F61"/>
-          </a:solidFill>
-          <a:ln>
-            <a:noFill/>
-          </a:ln>
-          <a:effectLst/>
-        </p:spPr>
-        <p:style>
-          <a:lnRef idx="1">
-            <a:schemeClr val="accent1"/>
-          </a:lnRef>
-          <a:fillRef idx="3">
-            <a:schemeClr val="accent1"/>
-          </a:fillRef>
-          <a:effectRef idx="2">
-            <a:schemeClr val="accent1"/>
-          </a:effectRef>
-          <a:fontRef idx="minor">
-            <a:schemeClr val="lt1"/>
-          </a:fontRef>
-        </p:style>
-        <p:txBody>
-          <a:bodyPr rtlCol="0" anchor="ctr"/>
-          <a:lstStyle/>
-          <a:p>
-            <a:pPr algn="ctr"/>
-          </a:p>
-        </p:txBody>
-      </p:sp>
-      <p:sp>
-        <p:nvSpPr>
-          <p:cNvPr id="17" name="TextBox 16"/>
+          <p:cNvPr id="14" name="TextBox 13"/>
           <p:cNvSpPr txBox="1"/>
           <p:nvPr/>
         </p:nvSpPr>
@@ -8224,7 +8825,7 @@
       </p:sp>
       <p:sp>
         <p:nvSpPr>
-          <p:cNvPr id="18" name="TextBox 17"/>
+          <p:cNvPr id="15" name="TextBox 14"/>
           <p:cNvSpPr txBox="1"/>
           <p:nvPr/>
         </p:nvSpPr>
@@ -8252,149 +8853,7 @@
                 </a:solidFill>
                 <a:latin typeface="Roboto"/>
               </a:rPr>
-              <a:t>13</a:t>
-            </a:r>
-          </a:p>
-        </p:txBody>
-      </p:sp>
-    </p:spTree>
-  </p:cSld>
-  <p:clrMapOvr>
-    <a:masterClrMapping/>
-  </p:clrMapOvr>
-</p:sld>
-</file>
-
-<file path=ppt/slides/slide18.xml><?xml version="1.0" encoding="utf-8"?>
-<p:sld xmlns:a="http://schemas.openxmlformats.org/drawingml/2006/main" xmlns:p="http://schemas.openxmlformats.org/presentationml/2006/main" xmlns:r="http://schemas.openxmlformats.org/officeDocument/2006/relationships">
-  <p:cSld>
-    <p:bg>
-      <p:bgPr>
-        <a:solidFill>
-          <a:srgbClr val="2A2929"/>
-        </a:solidFill>
-        <a:effectLst/>
-      </p:bgPr>
-    </p:bg>
-    <p:spTree>
-      <p:nvGrpSpPr>
-        <p:cNvPr id="1" name=""/>
-        <p:cNvGrpSpPr/>
-        <p:nvPr/>
-      </p:nvGrpSpPr>
-      <p:grpSpPr/>
-      <p:sp>
-        <p:nvSpPr>
-          <p:cNvPr id="2" name="Rectangle 1"/>
-          <p:cNvSpPr/>
-          <p:nvPr/>
-        </p:nvSpPr>
-        <p:spPr>
-          <a:xfrm>
-            <a:off x="0" y="0"/>
-            <a:ext cx="411480" cy="6858000"/>
-          </a:xfrm>
-          <a:prstGeom prst="rect">
-            <a:avLst/>
-          </a:prstGeom>
-          <a:solidFill>
-            <a:srgbClr val="EDAB0C"/>
-          </a:solidFill>
-          <a:ln>
-            <a:noFill/>
-          </a:ln>
-          <a:effectLst/>
-        </p:spPr>
-        <p:style>
-          <a:lnRef idx="1">
-            <a:schemeClr val="accent1"/>
-          </a:lnRef>
-          <a:fillRef idx="3">
-            <a:schemeClr val="accent1"/>
-          </a:fillRef>
-          <a:effectRef idx="2">
-            <a:schemeClr val="accent1"/>
-          </a:effectRef>
-          <a:fontRef idx="minor">
-            <a:schemeClr val="lt1"/>
-          </a:fontRef>
-        </p:style>
-        <p:txBody>
-          <a:bodyPr rtlCol="0" anchor="ctr"/>
-          <a:lstStyle/>
-          <a:p>
-            <a:pPr algn="ctr"/>
-          </a:p>
-        </p:txBody>
-      </p:sp>
-      <p:sp>
-        <p:nvSpPr>
-          <p:cNvPr id="3" name="TextBox 2"/>
-          <p:cNvSpPr txBox="1"/>
-          <p:nvPr/>
-        </p:nvSpPr>
-        <p:spPr>
-          <a:xfrm>
-            <a:off x="914400" y="1463040"/>
-            <a:ext cx="10515600" cy="4023360"/>
-          </a:xfrm>
-          <a:prstGeom prst="rect">
-            <a:avLst/>
-          </a:prstGeom>
-          <a:noFill/>
-        </p:spPr>
-        <p:txBody>
-          <a:bodyPr wrap="square" anchor="t" lIns="0" rIns="0" tIns="0" bIns="0">
-            <a:spAutoFit/>
-          </a:bodyPr>
-          <a:lstStyle/>
-          <a:p>
-            <a:r>
-              <a:rPr sz="4000" b="1" i="0">
-                <a:solidFill>
-                  <a:srgbClr val="FFFFFF"/>
-                </a:solidFill>
-                <a:latin typeface="Roboto"/>
-              </a:rPr>
-              <a:t>Next: Topic 3 — DR requirements</a:t>
-            </a:r>
-          </a:p>
-          <a:p>
-            <a:pPr>
-              <a:lnSpc>
-                <a:spcPct val="105000"/>
-              </a:lnSpc>
-              <a:spcBef>
-                <a:spcPts val="1200"/>
-              </a:spcBef>
-            </a:pPr>
-            <a:r>
-              <a:rPr sz="1900" b="0" i="0">
-                <a:solidFill>
-                  <a:srgbClr val="E8E8E8"/>
-                </a:solidFill>
-                <a:latin typeface="Roboto Light"/>
-              </a:rPr>
-              <a:t>You've designed the web-scale site (Topic 1) and the microservice (Topic 2) — Part A's build strands.</a:t>
-            </a:r>
-          </a:p>
-          <a:p>
-            <a:pPr>
-              <a:lnSpc>
-                <a:spcPct val="105000"/>
-              </a:lnSpc>
-              <a:spcBef>
-                <a:spcPts val="1200"/>
-              </a:spcBef>
-            </a:pPr>
-            <a:r>
-              <a:rPr sz="1900" b="0" i="0">
-                <a:solidFill>
-                  <a:srgbClr val="E8E8E8"/>
-                </a:solidFill>
-                <a:latin typeface="Roboto Light"/>
-              </a:rPr>
-              <a:t>Next you turn to disaster recovery: the requirements, impact analysis, strategy and plan.</a:t>
+              <a:t>15</a:t>
             </a:r>
           </a:p>
         </p:txBody>
@@ -8552,7 +9011,7 @@
                 </a:solidFill>
                 <a:latin typeface="Roboto"/>
               </a:rPr>
-              <a:t>Topic 1 designed the web-scale site; Topic 2 designs the serverless audit-log microservice that plugs into it.</a:t>
+              <a:t>Topic 1 designed the web-scale platform; Topic 2 designs the small service that plugs into it.</a:t>
             </a:r>
           </a:p>
           <a:p>
@@ -8583,7 +9042,7 @@
                 </a:solidFill>
                 <a:latin typeface="Roboto"/>
               </a:rPr>
-              <a:t>The microservice records India-cohort access events to a residency-compliant store — the localisation hook from the requirements.</a:t>
+              <a:t>The service records access events to a residency-compliant store — the localisation hook straight from the requirements.</a:t>
             </a:r>
           </a:p>
           <a:p>
@@ -8614,7 +9073,7 @@
                 </a:solidFill>
                 <a:latin typeface="Roboto"/>
               </a:rPr>
-              <a:t>Serverless: no servers to manage, event-driven, scales with demand — you pay per request.</a:t>
+              <a:t>Serverless: no servers to manage, event-driven, scales with demand, pay per request.</a:t>
             </a:r>
           </a:p>
           <a:p>
@@ -8645,7 +9104,7 @@
                 </a:solidFill>
                 <a:latin typeface="Roboto"/>
               </a:rPr>
-              <a:t>Design only, to the supplied requirements — the build is AT2 (Topic 8).</a:t>
+              <a:t>Design only — the build is AT2.</a:t>
             </a:r>
           </a:p>
         </p:txBody>
@@ -8792,6 +9251,2197 @@
                 <a:latin typeface="Roboto"/>
               </a:rPr>
               <a:t>1</a:t>
+            </a:r>
+          </a:p>
+        </p:txBody>
+      </p:sp>
+    </p:spTree>
+  </p:cSld>
+  <p:clrMapOvr>
+    <a:masterClrMapping/>
+  </p:clrMapOvr>
+</p:sld>
+</file>
+
+<file path=ppt/slides/slide20.xml><?xml version="1.0" encoding="utf-8"?>
+<p:sld xmlns:a="http://schemas.openxmlformats.org/drawingml/2006/main" xmlns:p="http://schemas.openxmlformats.org/presentationml/2006/main" xmlns:r="http://schemas.openxmlformats.org/officeDocument/2006/relationships">
+  <p:cSld>
+    <p:bg>
+      <p:bgPr>
+        <a:solidFill>
+          <a:srgbClr val="FFFFFF"/>
+        </a:solidFill>
+        <a:effectLst/>
+      </p:bgPr>
+    </p:bg>
+    <p:spTree>
+      <p:nvGrpSpPr>
+        <p:cNvPr id="1" name=""/>
+        <p:cNvGrpSpPr/>
+        <p:nvPr/>
+      </p:nvGrpSpPr>
+      <p:grpSpPr/>
+      <p:sp>
+        <p:nvSpPr>
+          <p:cNvPr id="2" name="Rectangle 1"/>
+          <p:cNvSpPr/>
+          <p:nvPr/>
+        </p:nvSpPr>
+        <p:spPr>
+          <a:xfrm>
+            <a:off x="0" y="0"/>
+            <a:ext cx="3931920" cy="6858000"/>
+          </a:xfrm>
+          <a:prstGeom prst="rect">
+            <a:avLst/>
+          </a:prstGeom>
+          <a:solidFill>
+            <a:srgbClr val="004488"/>
+          </a:solidFill>
+          <a:ln>
+            <a:noFill/>
+          </a:ln>
+          <a:effectLst/>
+        </p:spPr>
+        <p:style>
+          <a:lnRef idx="1">
+            <a:schemeClr val="accent1"/>
+          </a:lnRef>
+          <a:fillRef idx="3">
+            <a:schemeClr val="accent1"/>
+          </a:fillRef>
+          <a:effectRef idx="2">
+            <a:schemeClr val="accent1"/>
+          </a:effectRef>
+          <a:fontRef idx="minor">
+            <a:schemeClr val="lt1"/>
+          </a:fontRef>
+        </p:style>
+        <p:txBody>
+          <a:bodyPr rtlCol="0" anchor="ctr"/>
+          <a:lstStyle/>
+          <a:p>
+            <a:pPr algn="ctr"/>
+          </a:p>
+        </p:txBody>
+      </p:sp>
+      <p:sp>
+        <p:nvSpPr>
+          <p:cNvPr id="3" name="TextBox 2"/>
+          <p:cNvSpPr txBox="1"/>
+          <p:nvPr/>
+        </p:nvSpPr>
+        <p:spPr>
+          <a:xfrm>
+            <a:off x="365760" y="2103120"/>
+            <a:ext cx="3291840" cy="2194560"/>
+          </a:xfrm>
+          <a:prstGeom prst="rect">
+            <a:avLst/>
+          </a:prstGeom>
+          <a:noFill/>
+        </p:spPr>
+        <p:txBody>
+          <a:bodyPr wrap="square" anchor="t" lIns="0" rIns="0" tIns="0" bIns="0">
+            <a:spAutoFit/>
+          </a:bodyPr>
+          <a:lstStyle/>
+          <a:p>
+            <a:r>
+              <a:rPr sz="13000" b="1" i="0">
+                <a:solidFill>
+                  <a:srgbClr val="FFFFFF"/>
+                </a:solidFill>
+                <a:latin typeface="Roboto"/>
+              </a:rPr>
+              <a:t>04</a:t>
+            </a:r>
+          </a:p>
+        </p:txBody>
+      </p:sp>
+      <p:sp>
+        <p:nvSpPr>
+          <p:cNvPr id="4" name="TextBox 3"/>
+          <p:cNvSpPr txBox="1"/>
+          <p:nvPr/>
+        </p:nvSpPr>
+        <p:spPr>
+          <a:xfrm>
+            <a:off x="4480560" y="2468880"/>
+            <a:ext cx="7132320" cy="2194560"/>
+          </a:xfrm>
+          <a:prstGeom prst="rect">
+            <a:avLst/>
+          </a:prstGeom>
+          <a:noFill/>
+        </p:spPr>
+        <p:txBody>
+          <a:bodyPr wrap="square" anchor="t" lIns="0" rIns="0" tIns="0" bIns="0">
+            <a:spAutoFit/>
+          </a:bodyPr>
+          <a:lstStyle/>
+          <a:p>
+            <a:r>
+              <a:rPr sz="1600" b="1" i="0">
+                <a:solidFill>
+                  <a:srgbClr val="004488"/>
+                </a:solidFill>
+                <a:latin typeface="Roboto"/>
+              </a:rPr>
+              <a:t>SECTION</a:t>
+            </a:r>
+          </a:p>
+          <a:p>
+            <a:pPr>
+              <a:spcBef>
+                <a:spcPts val="600"/>
+              </a:spcBef>
+            </a:pPr>
+            <a:r>
+              <a:rPr sz="3800" b="1" i="0">
+                <a:solidFill>
+                  <a:srgbClr val="2A2929"/>
+                </a:solidFill>
+                <a:latin typeface="Roboto"/>
+              </a:rPr>
+              <a:t>Justify it, and answer for it</a:t>
+            </a:r>
+          </a:p>
+          <a:p>
+            <a:pPr>
+              <a:spcBef>
+                <a:spcPts val="1000"/>
+              </a:spcBef>
+            </a:pPr>
+            <a:r>
+              <a:rPr sz="2000" b="0" i="1">
+                <a:solidFill>
+                  <a:srgbClr val="484848"/>
+                </a:solidFill>
+                <a:latin typeface="Roboto Light"/>
+              </a:rPr>
+              <a:t>your design, your argument</a:t>
+            </a:r>
+          </a:p>
+        </p:txBody>
+      </p:sp>
+      <p:sp>
+        <p:nvSpPr>
+          <p:cNvPr id="5" name="Rectangle 4"/>
+          <p:cNvSpPr/>
+          <p:nvPr/>
+        </p:nvSpPr>
+        <p:spPr>
+          <a:xfrm>
+            <a:off x="0" y="6565392"/>
+            <a:ext cx="12191695" cy="38100"/>
+          </a:xfrm>
+          <a:prstGeom prst="rect">
+            <a:avLst/>
+          </a:prstGeom>
+          <a:solidFill>
+            <a:srgbClr val="004488"/>
+          </a:solidFill>
+          <a:ln>
+            <a:noFill/>
+          </a:ln>
+          <a:effectLst/>
+        </p:spPr>
+        <p:style>
+          <a:lnRef idx="1">
+            <a:schemeClr val="accent1"/>
+          </a:lnRef>
+          <a:fillRef idx="3">
+            <a:schemeClr val="accent1"/>
+          </a:fillRef>
+          <a:effectRef idx="2">
+            <a:schemeClr val="accent1"/>
+          </a:effectRef>
+          <a:fontRef idx="minor">
+            <a:schemeClr val="lt1"/>
+          </a:fontRef>
+        </p:style>
+        <p:txBody>
+          <a:bodyPr rtlCol="0" anchor="ctr"/>
+          <a:lstStyle/>
+          <a:p>
+            <a:pPr algn="ctr"/>
+          </a:p>
+        </p:txBody>
+      </p:sp>
+      <p:sp>
+        <p:nvSpPr>
+          <p:cNvPr id="6" name="TextBox 5"/>
+          <p:cNvSpPr txBox="1"/>
+          <p:nvPr/>
+        </p:nvSpPr>
+        <p:spPr>
+          <a:xfrm>
+            <a:off x="502920" y="6400800"/>
+            <a:ext cx="5486400" cy="320040"/>
+          </a:xfrm>
+          <a:prstGeom prst="rect">
+            <a:avLst/>
+          </a:prstGeom>
+          <a:noFill/>
+        </p:spPr>
+        <p:txBody>
+          <a:bodyPr wrap="square" anchor="t" lIns="0" rIns="0" tIns="0" bIns="0">
+            <a:spAutoFit/>
+          </a:bodyPr>
+          <a:lstStyle/>
+          <a:p>
+            <a:r>
+              <a:rPr sz="1100" b="1" i="0">
+                <a:solidFill>
+                  <a:srgbClr val="2A2929"/>
+                </a:solidFill>
+                <a:latin typeface="Roboto"/>
+              </a:rPr>
+              <a:t>Kangan </a:t>
+            </a:r>
+            <a:r>
+              <a:rPr sz="1100" b="1" i="0">
+                <a:solidFill>
+                  <a:srgbClr val="D68E10"/>
+                </a:solidFill>
+                <a:latin typeface="Roboto"/>
+              </a:rPr>
+              <a:t>Institute</a:t>
+            </a:r>
+          </a:p>
+        </p:txBody>
+      </p:sp>
+      <p:sp>
+        <p:nvSpPr>
+          <p:cNvPr id="7" name="TextBox 6"/>
+          <p:cNvSpPr txBox="1"/>
+          <p:nvPr/>
+        </p:nvSpPr>
+        <p:spPr>
+          <a:xfrm>
+            <a:off x="10515600" y="6400800"/>
+            <a:ext cx="1188720" cy="320040"/>
+          </a:xfrm>
+          <a:prstGeom prst="rect">
+            <a:avLst/>
+          </a:prstGeom>
+          <a:noFill/>
+        </p:spPr>
+        <p:txBody>
+          <a:bodyPr wrap="square" anchor="t" lIns="0" rIns="0" tIns="0" bIns="0">
+            <a:spAutoFit/>
+          </a:bodyPr>
+          <a:lstStyle/>
+          <a:p>
+            <a:pPr algn="r"/>
+            <a:r>
+              <a:rPr sz="1100" b="0" i="0">
+                <a:solidFill>
+                  <a:srgbClr val="7A7A7A"/>
+                </a:solidFill>
+                <a:latin typeface="Roboto"/>
+              </a:rPr>
+              <a:t/>
+            </a:r>
+          </a:p>
+        </p:txBody>
+      </p:sp>
+    </p:spTree>
+  </p:cSld>
+  <p:clrMapOvr>
+    <a:masterClrMapping/>
+  </p:clrMapOvr>
+</p:sld>
+</file>
+
+<file path=ppt/slides/slide21.xml><?xml version="1.0" encoding="utf-8"?>
+<p:sld xmlns:a="http://schemas.openxmlformats.org/drawingml/2006/main" xmlns:p="http://schemas.openxmlformats.org/presentationml/2006/main" xmlns:r="http://schemas.openxmlformats.org/officeDocument/2006/relationships">
+  <p:cSld>
+    <p:bg>
+      <p:bgPr>
+        <a:solidFill>
+          <a:srgbClr val="FFFFFF"/>
+        </a:solidFill>
+        <a:effectLst/>
+      </p:bgPr>
+    </p:bg>
+    <p:spTree>
+      <p:nvGrpSpPr>
+        <p:cNvPr id="1" name=""/>
+        <p:cNvGrpSpPr/>
+        <p:nvPr/>
+      </p:nvGrpSpPr>
+      <p:grpSpPr/>
+      <p:sp>
+        <p:nvSpPr>
+          <p:cNvPr id="2" name="TextBox 1"/>
+          <p:cNvSpPr txBox="1"/>
+          <p:nvPr/>
+        </p:nvSpPr>
+        <p:spPr>
+          <a:xfrm>
+            <a:off x="640080" y="457200"/>
+            <a:ext cx="10881360" cy="960120"/>
+          </a:xfrm>
+          <a:prstGeom prst="rect">
+            <a:avLst/>
+          </a:prstGeom>
+          <a:noFill/>
+        </p:spPr>
+        <p:txBody>
+          <a:bodyPr wrap="square" anchor="t" lIns="0" rIns="0" tIns="0" bIns="0">
+            <a:spAutoFit/>
+          </a:bodyPr>
+          <a:lstStyle/>
+          <a:p>
+            <a:r>
+              <a:rPr sz="2800" b="1" i="0">
+                <a:solidFill>
+                  <a:srgbClr val="2A2929"/>
+                </a:solidFill>
+                <a:latin typeface="Roboto"/>
+              </a:rPr>
+              <a:t>Justify the microservice design</a:t>
+            </a:r>
+          </a:p>
+        </p:txBody>
+      </p:sp>
+      <p:sp>
+        <p:nvSpPr>
+          <p:cNvPr id="3" name="Rectangle 2"/>
+          <p:cNvSpPr/>
+          <p:nvPr/>
+        </p:nvSpPr>
+        <p:spPr>
+          <a:xfrm>
+            <a:off x="658368" y="1371600"/>
+            <a:ext cx="1463040" cy="50800"/>
+          </a:xfrm>
+          <a:prstGeom prst="rect">
+            <a:avLst/>
+          </a:prstGeom>
+          <a:solidFill>
+            <a:srgbClr val="004488"/>
+          </a:solidFill>
+          <a:ln>
+            <a:noFill/>
+          </a:ln>
+          <a:effectLst/>
+        </p:spPr>
+        <p:style>
+          <a:lnRef idx="1">
+            <a:schemeClr val="accent1"/>
+          </a:lnRef>
+          <a:fillRef idx="3">
+            <a:schemeClr val="accent1"/>
+          </a:fillRef>
+          <a:effectRef idx="2">
+            <a:schemeClr val="accent1"/>
+          </a:effectRef>
+          <a:fontRef idx="minor">
+            <a:schemeClr val="lt1"/>
+          </a:fontRef>
+        </p:style>
+        <p:txBody>
+          <a:bodyPr rtlCol="0" anchor="ctr"/>
+          <a:lstStyle/>
+          <a:p>
+            <a:pPr algn="ctr"/>
+          </a:p>
+        </p:txBody>
+      </p:sp>
+      <p:sp>
+        <p:nvSpPr>
+          <p:cNvPr id="4" name="TextBox 3"/>
+          <p:cNvSpPr txBox="1"/>
+          <p:nvPr/>
+        </p:nvSpPr>
+        <p:spPr>
+          <a:xfrm>
+            <a:off x="658368" y="1691640"/>
+            <a:ext cx="10881360" cy="4480560"/>
+          </a:xfrm>
+          <a:prstGeom prst="rect">
+            <a:avLst/>
+          </a:prstGeom>
+          <a:noFill/>
+        </p:spPr>
+        <p:txBody>
+          <a:bodyPr wrap="square" anchor="ctr" lIns="0" rIns="0" tIns="0" bIns="0">
+            <a:spAutoFit/>
+          </a:bodyPr>
+          <a:lstStyle/>
+          <a:p>
+            <a:pPr marL="0" indent="0">
+              <a:lnSpc>
+                <a:spcPct val="105000"/>
+              </a:lnSpc>
+              <a:spcBef>
+                <a:spcPts val="0"/>
+              </a:spcBef>
+              <a:spcAft>
+                <a:spcPts val="1000"/>
+              </a:spcAft>
+            </a:pPr>
+            <a:r>
+              <a:rPr sz="2400" b="1" i="0">
+                <a:solidFill>
+                  <a:srgbClr val="EDAB0C"/>
+                </a:solidFill>
+                <a:latin typeface="Roboto"/>
+              </a:rPr>
+              <a:t>■  </a:t>
+            </a:r>
+            <a:r>
+              <a:rPr sz="2400" b="0" i="0">
+                <a:solidFill>
+                  <a:srgbClr val="2A2929"/>
+                </a:solidFill>
+                <a:latin typeface="Roboto"/>
+              </a:rPr>
+              <a:t>For each choice: the requirement it serves, the option you took, and why that option over the alternative.</a:t>
+            </a:r>
+          </a:p>
+          <a:p>
+            <a:pPr marL="0" indent="0">
+              <a:lnSpc>
+                <a:spcPct val="105000"/>
+              </a:lnSpc>
+              <a:spcBef>
+                <a:spcPts val="0"/>
+              </a:spcBef>
+              <a:spcAft>
+                <a:spcPts val="1000"/>
+              </a:spcAft>
+            </a:pPr>
+            <a:r>
+              <a:rPr sz="2400" b="1" i="0">
+                <a:solidFill>
+                  <a:srgbClr val="EDAB0C"/>
+                </a:solidFill>
+                <a:latin typeface="Roboto"/>
+              </a:rPr>
+              <a:t>■  </a:t>
+            </a:r>
+            <a:r>
+              <a:rPr sz="2400" b="0" i="0">
+                <a:solidFill>
+                  <a:srgbClr val="2A2929"/>
+                </a:solidFill>
+                <a:latin typeface="Roboto"/>
+              </a:rPr>
+              <a:t>The strongest justification names what you did not choose and why the simpler option wins.</a:t>
+            </a:r>
+          </a:p>
+          <a:p>
+            <a:pPr marL="0" indent="0">
+              <a:lnSpc>
+                <a:spcPct val="105000"/>
+              </a:lnSpc>
+              <a:spcBef>
+                <a:spcPts val="0"/>
+              </a:spcBef>
+              <a:spcAft>
+                <a:spcPts val="1000"/>
+              </a:spcAft>
+            </a:pPr>
+            <a:r>
+              <a:rPr sz="2400" b="1" i="0">
+                <a:solidFill>
+                  <a:srgbClr val="EDAB0C"/>
+                </a:solidFill>
+                <a:latin typeface="Roboto"/>
+              </a:rPr>
+              <a:t>■  </a:t>
+            </a:r>
+            <a:r>
+              <a:rPr sz="2400" b="0" i="0">
+                <a:solidFill>
+                  <a:srgbClr val="2A2929"/>
+                </a:solidFill>
+                <a:latin typeface="Roboto"/>
+              </a:rPr>
+              <a:t>Someone holding the requirements should be able to tick your justification off line by line.</a:t>
+            </a:r>
+          </a:p>
+        </p:txBody>
+      </p:sp>
+      <p:sp>
+        <p:nvSpPr>
+          <p:cNvPr id="5" name="Rectangle 4"/>
+          <p:cNvSpPr/>
+          <p:nvPr/>
+        </p:nvSpPr>
+        <p:spPr>
+          <a:xfrm>
+            <a:off x="0" y="6565392"/>
+            <a:ext cx="12191695" cy="38100"/>
+          </a:xfrm>
+          <a:prstGeom prst="rect">
+            <a:avLst/>
+          </a:prstGeom>
+          <a:solidFill>
+            <a:srgbClr val="004488"/>
+          </a:solidFill>
+          <a:ln>
+            <a:noFill/>
+          </a:ln>
+          <a:effectLst/>
+        </p:spPr>
+        <p:style>
+          <a:lnRef idx="1">
+            <a:schemeClr val="accent1"/>
+          </a:lnRef>
+          <a:fillRef idx="3">
+            <a:schemeClr val="accent1"/>
+          </a:fillRef>
+          <a:effectRef idx="2">
+            <a:schemeClr val="accent1"/>
+          </a:effectRef>
+          <a:fontRef idx="minor">
+            <a:schemeClr val="lt1"/>
+          </a:fontRef>
+        </p:style>
+        <p:txBody>
+          <a:bodyPr rtlCol="0" anchor="ctr"/>
+          <a:lstStyle/>
+          <a:p>
+            <a:pPr algn="ctr"/>
+          </a:p>
+        </p:txBody>
+      </p:sp>
+      <p:sp>
+        <p:nvSpPr>
+          <p:cNvPr id="6" name="TextBox 5"/>
+          <p:cNvSpPr txBox="1"/>
+          <p:nvPr/>
+        </p:nvSpPr>
+        <p:spPr>
+          <a:xfrm>
+            <a:off x="502920" y="6400800"/>
+            <a:ext cx="5486400" cy="320040"/>
+          </a:xfrm>
+          <a:prstGeom prst="rect">
+            <a:avLst/>
+          </a:prstGeom>
+          <a:noFill/>
+        </p:spPr>
+        <p:txBody>
+          <a:bodyPr wrap="square" anchor="t" lIns="0" rIns="0" tIns="0" bIns="0">
+            <a:spAutoFit/>
+          </a:bodyPr>
+          <a:lstStyle/>
+          <a:p>
+            <a:r>
+              <a:rPr sz="1100" b="1" i="0">
+                <a:solidFill>
+                  <a:srgbClr val="2A2929"/>
+                </a:solidFill>
+                <a:latin typeface="Roboto"/>
+              </a:rPr>
+              <a:t>Kangan </a:t>
+            </a:r>
+            <a:r>
+              <a:rPr sz="1100" b="1" i="0">
+                <a:solidFill>
+                  <a:srgbClr val="D68E10"/>
+                </a:solidFill>
+                <a:latin typeface="Roboto"/>
+              </a:rPr>
+              <a:t>Institute</a:t>
+            </a:r>
+          </a:p>
+        </p:txBody>
+      </p:sp>
+      <p:sp>
+        <p:nvSpPr>
+          <p:cNvPr id="7" name="TextBox 6"/>
+          <p:cNvSpPr txBox="1"/>
+          <p:nvPr/>
+        </p:nvSpPr>
+        <p:spPr>
+          <a:xfrm>
+            <a:off x="10515600" y="6400800"/>
+            <a:ext cx="1188720" cy="320040"/>
+          </a:xfrm>
+          <a:prstGeom prst="rect">
+            <a:avLst/>
+          </a:prstGeom>
+          <a:noFill/>
+        </p:spPr>
+        <p:txBody>
+          <a:bodyPr wrap="square" anchor="t" lIns="0" rIns="0" tIns="0" bIns="0">
+            <a:spAutoFit/>
+          </a:bodyPr>
+          <a:lstStyle/>
+          <a:p>
+            <a:pPr algn="r"/>
+            <a:r>
+              <a:rPr sz="1100" b="0" i="0">
+                <a:solidFill>
+                  <a:srgbClr val="7A7A7A"/>
+                </a:solidFill>
+                <a:latin typeface="Roboto"/>
+              </a:rPr>
+              <a:t>16</a:t>
+            </a:r>
+          </a:p>
+        </p:txBody>
+      </p:sp>
+    </p:spTree>
+  </p:cSld>
+  <p:clrMapOvr>
+    <a:masterClrMapping/>
+  </p:clrMapOvr>
+</p:sld>
+</file>
+
+<file path=ppt/slides/slide22.xml><?xml version="1.0" encoding="utf-8"?>
+<p:sld xmlns:a="http://schemas.openxmlformats.org/drawingml/2006/main" xmlns:p="http://schemas.openxmlformats.org/presentationml/2006/main" xmlns:r="http://schemas.openxmlformats.org/officeDocument/2006/relationships">
+  <p:cSld>
+    <p:bg>
+      <p:bgPr>
+        <a:solidFill>
+          <a:srgbClr val="FFFFFF"/>
+        </a:solidFill>
+        <a:effectLst/>
+      </p:bgPr>
+    </p:bg>
+    <p:spTree>
+      <p:nvGrpSpPr>
+        <p:cNvPr id="1" name=""/>
+        <p:cNvGrpSpPr/>
+        <p:nvPr/>
+      </p:nvGrpSpPr>
+      <p:grpSpPr/>
+      <p:sp>
+        <p:nvSpPr>
+          <p:cNvPr id="2" name="TextBox 1"/>
+          <p:cNvSpPr txBox="1"/>
+          <p:nvPr/>
+        </p:nvSpPr>
+        <p:spPr>
+          <a:xfrm>
+            <a:off x="640080" y="457200"/>
+            <a:ext cx="10881360" cy="960120"/>
+          </a:xfrm>
+          <a:prstGeom prst="rect">
+            <a:avLst/>
+          </a:prstGeom>
+          <a:noFill/>
+        </p:spPr>
+        <p:txBody>
+          <a:bodyPr wrap="square" anchor="t" lIns="0" rIns="0" tIns="0" bIns="0">
+            <a:spAutoFit/>
+          </a:bodyPr>
+          <a:lstStyle/>
+          <a:p>
+            <a:r>
+              <a:rPr sz="2800" b="1" i="0">
+                <a:solidFill>
+                  <a:srgbClr val="2A2929"/>
+                </a:solidFill>
+                <a:latin typeface="Roboto"/>
+              </a:rPr>
+              <a:t>The knowledge questions ask about your own design</a:t>
+            </a:r>
+          </a:p>
+        </p:txBody>
+      </p:sp>
+      <p:sp>
+        <p:nvSpPr>
+          <p:cNvPr id="3" name="Rectangle 2"/>
+          <p:cNvSpPr/>
+          <p:nvPr/>
+        </p:nvSpPr>
+        <p:spPr>
+          <a:xfrm>
+            <a:off x="658368" y="1371600"/>
+            <a:ext cx="1463040" cy="50800"/>
+          </a:xfrm>
+          <a:prstGeom prst="rect">
+            <a:avLst/>
+          </a:prstGeom>
+          <a:solidFill>
+            <a:srgbClr val="004488"/>
+          </a:solidFill>
+          <a:ln>
+            <a:noFill/>
+          </a:ln>
+          <a:effectLst/>
+        </p:spPr>
+        <p:style>
+          <a:lnRef idx="1">
+            <a:schemeClr val="accent1"/>
+          </a:lnRef>
+          <a:fillRef idx="3">
+            <a:schemeClr val="accent1"/>
+          </a:fillRef>
+          <a:effectRef idx="2">
+            <a:schemeClr val="accent1"/>
+          </a:effectRef>
+          <a:fontRef idx="minor">
+            <a:schemeClr val="lt1"/>
+          </a:fontRef>
+        </p:style>
+        <p:txBody>
+          <a:bodyPr rtlCol="0" anchor="ctr"/>
+          <a:lstStyle/>
+          <a:p>
+            <a:pPr algn="ctr"/>
+          </a:p>
+        </p:txBody>
+      </p:sp>
+      <p:sp>
+        <p:nvSpPr>
+          <p:cNvPr id="4" name="TextBox 3"/>
+          <p:cNvSpPr txBox="1"/>
+          <p:nvPr/>
+        </p:nvSpPr>
+        <p:spPr>
+          <a:xfrm>
+            <a:off x="658368" y="1691640"/>
+            <a:ext cx="10881360" cy="4480560"/>
+          </a:xfrm>
+          <a:prstGeom prst="rect">
+            <a:avLst/>
+          </a:prstGeom>
+          <a:noFill/>
+        </p:spPr>
+        <p:txBody>
+          <a:bodyPr wrap="square" anchor="ctr" lIns="0" rIns="0" tIns="0" bIns="0">
+            <a:spAutoFit/>
+          </a:bodyPr>
+          <a:lstStyle/>
+          <a:p>
+            <a:pPr marL="0" indent="0">
+              <a:lnSpc>
+                <a:spcPct val="105000"/>
+              </a:lnSpc>
+              <a:spcBef>
+                <a:spcPts val="0"/>
+              </a:spcBef>
+              <a:spcAft>
+                <a:spcPts val="1000"/>
+              </a:spcAft>
+            </a:pPr>
+            <a:r>
+              <a:rPr sz="2400" b="1" i="0">
+                <a:solidFill>
+                  <a:srgbClr val="EDAB0C"/>
+                </a:solidFill>
+                <a:latin typeface="Roboto"/>
+              </a:rPr>
+              <a:t>■  </a:t>
+            </a:r>
+            <a:r>
+              <a:rPr sz="2400" b="0" i="0">
+                <a:solidFill>
+                  <a:srgbClr val="2A2929"/>
+                </a:solidFill>
+                <a:latin typeface="Roboto"/>
+              </a:rPr>
+              <a:t>The Part A questions ask you to explain your component choices, your cohesion and coupling, the web-scaling principles you applied, and how the design keeps the residency option open.</a:t>
+            </a:r>
+          </a:p>
+          <a:p>
+            <a:pPr marL="0" indent="0">
+              <a:lnSpc>
+                <a:spcPct val="105000"/>
+              </a:lnSpc>
+              <a:spcBef>
+                <a:spcPts val="0"/>
+              </a:spcBef>
+              <a:spcAft>
+                <a:spcPts val="1000"/>
+              </a:spcAft>
+            </a:pPr>
+            <a:r>
+              <a:rPr sz="2400" b="1" i="0">
+                <a:solidFill>
+                  <a:srgbClr val="EDAB0C"/>
+                </a:solidFill>
+                <a:latin typeface="Roboto"/>
+              </a:rPr>
+              <a:t>■  </a:t>
+            </a:r>
+            <a:r>
+              <a:rPr sz="2400" b="0" i="0">
+                <a:solidFill>
+                  <a:srgbClr val="2A2929"/>
+                </a:solidFill>
+                <a:latin typeface="Roboto"/>
+              </a:rPr>
+              <a:t>Every answer cites your own design — the tables you filled in and the diagrams you drew are the material.</a:t>
+            </a:r>
+          </a:p>
+          <a:p>
+            <a:pPr marL="0" indent="0">
+              <a:lnSpc>
+                <a:spcPct val="105000"/>
+              </a:lnSpc>
+              <a:spcBef>
+                <a:spcPts val="0"/>
+              </a:spcBef>
+              <a:spcAft>
+                <a:spcPts val="1000"/>
+              </a:spcAft>
+            </a:pPr>
+            <a:r>
+              <a:rPr sz="2400" b="1" i="0">
+                <a:solidFill>
+                  <a:srgbClr val="EDAB0C"/>
+                </a:solidFill>
+                <a:latin typeface="Roboto"/>
+              </a:rPr>
+              <a:t>■  </a:t>
+            </a:r>
+            <a:r>
+              <a:rPr sz="2400" b="0" i="0">
+                <a:solidFill>
+                  <a:srgbClr val="2A2929"/>
+                </a:solidFill>
+                <a:latin typeface="Roboto"/>
+              </a:rPr>
+              <a:t>A definition with no reference to your design answers nothing.</a:t>
+            </a:r>
+          </a:p>
+        </p:txBody>
+      </p:sp>
+      <p:sp>
+        <p:nvSpPr>
+          <p:cNvPr id="5" name="Rectangle 4"/>
+          <p:cNvSpPr/>
+          <p:nvPr/>
+        </p:nvSpPr>
+        <p:spPr>
+          <a:xfrm>
+            <a:off x="0" y="6565392"/>
+            <a:ext cx="12191695" cy="38100"/>
+          </a:xfrm>
+          <a:prstGeom prst="rect">
+            <a:avLst/>
+          </a:prstGeom>
+          <a:solidFill>
+            <a:srgbClr val="004488"/>
+          </a:solidFill>
+          <a:ln>
+            <a:noFill/>
+          </a:ln>
+          <a:effectLst/>
+        </p:spPr>
+        <p:style>
+          <a:lnRef idx="1">
+            <a:schemeClr val="accent1"/>
+          </a:lnRef>
+          <a:fillRef idx="3">
+            <a:schemeClr val="accent1"/>
+          </a:fillRef>
+          <a:effectRef idx="2">
+            <a:schemeClr val="accent1"/>
+          </a:effectRef>
+          <a:fontRef idx="minor">
+            <a:schemeClr val="lt1"/>
+          </a:fontRef>
+        </p:style>
+        <p:txBody>
+          <a:bodyPr rtlCol="0" anchor="ctr"/>
+          <a:lstStyle/>
+          <a:p>
+            <a:pPr algn="ctr"/>
+          </a:p>
+        </p:txBody>
+      </p:sp>
+      <p:sp>
+        <p:nvSpPr>
+          <p:cNvPr id="6" name="TextBox 5"/>
+          <p:cNvSpPr txBox="1"/>
+          <p:nvPr/>
+        </p:nvSpPr>
+        <p:spPr>
+          <a:xfrm>
+            <a:off x="502920" y="6400800"/>
+            <a:ext cx="5486400" cy="320040"/>
+          </a:xfrm>
+          <a:prstGeom prst="rect">
+            <a:avLst/>
+          </a:prstGeom>
+          <a:noFill/>
+        </p:spPr>
+        <p:txBody>
+          <a:bodyPr wrap="square" anchor="t" lIns="0" rIns="0" tIns="0" bIns="0">
+            <a:spAutoFit/>
+          </a:bodyPr>
+          <a:lstStyle/>
+          <a:p>
+            <a:r>
+              <a:rPr sz="1100" b="1" i="0">
+                <a:solidFill>
+                  <a:srgbClr val="2A2929"/>
+                </a:solidFill>
+                <a:latin typeface="Roboto"/>
+              </a:rPr>
+              <a:t>Kangan </a:t>
+            </a:r>
+            <a:r>
+              <a:rPr sz="1100" b="1" i="0">
+                <a:solidFill>
+                  <a:srgbClr val="D68E10"/>
+                </a:solidFill>
+                <a:latin typeface="Roboto"/>
+              </a:rPr>
+              <a:t>Institute</a:t>
+            </a:r>
+          </a:p>
+        </p:txBody>
+      </p:sp>
+      <p:sp>
+        <p:nvSpPr>
+          <p:cNvPr id="7" name="TextBox 6"/>
+          <p:cNvSpPr txBox="1"/>
+          <p:nvPr/>
+        </p:nvSpPr>
+        <p:spPr>
+          <a:xfrm>
+            <a:off x="10515600" y="6400800"/>
+            <a:ext cx="1188720" cy="320040"/>
+          </a:xfrm>
+          <a:prstGeom prst="rect">
+            <a:avLst/>
+          </a:prstGeom>
+          <a:noFill/>
+        </p:spPr>
+        <p:txBody>
+          <a:bodyPr wrap="square" anchor="t" lIns="0" rIns="0" tIns="0" bIns="0">
+            <a:spAutoFit/>
+          </a:bodyPr>
+          <a:lstStyle/>
+          <a:p>
+            <a:pPr algn="r"/>
+            <a:r>
+              <a:rPr sz="1100" b="0" i="0">
+                <a:solidFill>
+                  <a:srgbClr val="7A7A7A"/>
+                </a:solidFill>
+                <a:latin typeface="Roboto"/>
+              </a:rPr>
+              <a:t>17</a:t>
+            </a:r>
+          </a:p>
+        </p:txBody>
+      </p:sp>
+    </p:spTree>
+  </p:cSld>
+  <p:clrMapOvr>
+    <a:masterClrMapping/>
+  </p:clrMapOvr>
+</p:sld>
+</file>
+
+<file path=ppt/slides/slide23.xml><?xml version="1.0" encoding="utf-8"?>
+<p:sld xmlns:a="http://schemas.openxmlformats.org/drawingml/2006/main" xmlns:p="http://schemas.openxmlformats.org/presentationml/2006/main" xmlns:r="http://schemas.openxmlformats.org/officeDocument/2006/relationships">
+  <p:cSld>
+    <p:bg>
+      <p:bgPr>
+        <a:solidFill>
+          <a:srgbClr val="FFFFFF"/>
+        </a:solidFill>
+        <a:effectLst/>
+      </p:bgPr>
+    </p:bg>
+    <p:spTree>
+      <p:nvGrpSpPr>
+        <p:cNvPr id="1" name=""/>
+        <p:cNvGrpSpPr/>
+        <p:nvPr/>
+      </p:nvGrpSpPr>
+      <p:grpSpPr/>
+      <p:sp>
+        <p:nvSpPr>
+          <p:cNvPr id="2" name="Rectangle 1"/>
+          <p:cNvSpPr/>
+          <p:nvPr/>
+        </p:nvSpPr>
+        <p:spPr>
+          <a:xfrm>
+            <a:off x="0" y="0"/>
+            <a:ext cx="12191695" cy="1234440"/>
+          </a:xfrm>
+          <a:prstGeom prst="rect">
+            <a:avLst/>
+          </a:prstGeom>
+          <a:solidFill>
+            <a:srgbClr val="004488"/>
+          </a:solidFill>
+          <a:ln>
+            <a:noFill/>
+          </a:ln>
+          <a:effectLst/>
+        </p:spPr>
+        <p:style>
+          <a:lnRef idx="1">
+            <a:schemeClr val="accent1"/>
+          </a:lnRef>
+          <a:fillRef idx="3">
+            <a:schemeClr val="accent1"/>
+          </a:fillRef>
+          <a:effectRef idx="2">
+            <a:schemeClr val="accent1"/>
+          </a:effectRef>
+          <a:fontRef idx="minor">
+            <a:schemeClr val="lt1"/>
+          </a:fontRef>
+        </p:style>
+        <p:txBody>
+          <a:bodyPr rtlCol="0" anchor="ctr"/>
+          <a:lstStyle/>
+          <a:p>
+            <a:pPr algn="ctr"/>
+          </a:p>
+        </p:txBody>
+      </p:sp>
+      <p:sp>
+        <p:nvSpPr>
+          <p:cNvPr id="3" name="Rounded Rectangle 2"/>
+          <p:cNvSpPr/>
+          <p:nvPr/>
+        </p:nvSpPr>
+        <p:spPr>
+          <a:xfrm>
+            <a:off x="640080" y="384048"/>
+            <a:ext cx="1691640" cy="457200"/>
+          </a:xfrm>
+          <a:prstGeom prst="roundRect">
+            <a:avLst/>
+          </a:prstGeom>
+          <a:solidFill>
+            <a:srgbClr val="2A2929"/>
+          </a:solidFill>
+          <a:ln>
+            <a:noFill/>
+          </a:ln>
+          <a:effectLst/>
+        </p:spPr>
+        <p:style>
+          <a:lnRef idx="1">
+            <a:schemeClr val="accent1"/>
+          </a:lnRef>
+          <a:fillRef idx="3">
+            <a:schemeClr val="accent1"/>
+          </a:fillRef>
+          <a:effectRef idx="2">
+            <a:schemeClr val="accent1"/>
+          </a:effectRef>
+          <a:fontRef idx="minor">
+            <a:schemeClr val="lt1"/>
+          </a:fontRef>
+        </p:style>
+        <p:txBody>
+          <a:bodyPr rtlCol="0" anchor="ctr"/>
+          <a:lstStyle/>
+          <a:p>
+            <a:pPr algn="ctr"/>
+            <a:r>
+              <a:rPr sz="1400" b="1" i="0">
+                <a:solidFill>
+                  <a:srgbClr val="FBB900"/>
+                </a:solidFill>
+                <a:latin typeface="Roboto"/>
+              </a:rPr>
+              <a:t>ACTIVITY</a:t>
+            </a:r>
+          </a:p>
+        </p:txBody>
+      </p:sp>
+      <p:sp>
+        <p:nvSpPr>
+          <p:cNvPr id="4" name="TextBox 3"/>
+          <p:cNvSpPr txBox="1"/>
+          <p:nvPr/>
+        </p:nvSpPr>
+        <p:spPr>
+          <a:xfrm>
+            <a:off x="2560320" y="310896"/>
+            <a:ext cx="8961120" cy="685800"/>
+          </a:xfrm>
+          <a:prstGeom prst="rect">
+            <a:avLst/>
+          </a:prstGeom>
+          <a:noFill/>
+        </p:spPr>
+        <p:txBody>
+          <a:bodyPr wrap="square" anchor="ctr" lIns="0" rIns="0" tIns="0" bIns="0">
+            <a:spAutoFit/>
+          </a:bodyPr>
+          <a:lstStyle/>
+          <a:p>
+            <a:r>
+              <a:rPr sz="2600" b="1" i="0">
+                <a:solidFill>
+                  <a:srgbClr val="FFFFFF"/>
+                </a:solidFill>
+                <a:latin typeface="Roboto"/>
+              </a:rPr>
+              <a:t>Justify the design and rehearse the questions</a:t>
+            </a:r>
+          </a:p>
+        </p:txBody>
+      </p:sp>
+      <p:sp>
+        <p:nvSpPr>
+          <p:cNvPr id="5" name="TextBox 4"/>
+          <p:cNvSpPr txBox="1"/>
+          <p:nvPr/>
+        </p:nvSpPr>
+        <p:spPr>
+          <a:xfrm>
+            <a:off x="658368" y="1554480"/>
+            <a:ext cx="10881360" cy="4297680"/>
+          </a:xfrm>
+          <a:prstGeom prst="rect">
+            <a:avLst/>
+          </a:prstGeom>
+          <a:noFill/>
+        </p:spPr>
+        <p:txBody>
+          <a:bodyPr wrap="square" anchor="t" lIns="0" rIns="0" tIns="0" bIns="0">
+            <a:spAutoFit/>
+          </a:bodyPr>
+          <a:lstStyle/>
+          <a:p>
+            <a:pPr marL="0" indent="0">
+              <a:lnSpc>
+                <a:spcPct val="105000"/>
+              </a:lnSpc>
+              <a:spcBef>
+                <a:spcPts val="0"/>
+              </a:spcBef>
+              <a:spcAft>
+                <a:spcPts val="1000"/>
+              </a:spcAft>
+            </a:pPr>
+            <a:r>
+              <a:rPr sz="1700" b="1" i="0">
+                <a:solidFill>
+                  <a:srgbClr val="EDAB0C"/>
+                </a:solidFill>
+                <a:latin typeface="Roboto"/>
+              </a:rPr>
+              <a:t>■  </a:t>
+            </a:r>
+            <a:r>
+              <a:rPr sz="1700" b="0" i="0">
+                <a:solidFill>
+                  <a:srgbClr val="2A2929"/>
+                </a:solidFill>
+                <a:latin typeface="Roboto"/>
+              </a:rPr>
+              <a:t>Workbook — task 19, then the assessment's Part A questions Q1 to Q4, answered from your practice design.</a:t>
+            </a:r>
+          </a:p>
+          <a:p>
+            <a:pPr marL="0" indent="0">
+              <a:lnSpc>
+                <a:spcPct val="105000"/>
+              </a:lnSpc>
+              <a:spcBef>
+                <a:spcPts val="0"/>
+              </a:spcBef>
+              <a:spcAft>
+                <a:spcPts val="1000"/>
+              </a:spcAft>
+            </a:pPr>
+            <a:r>
+              <a:rPr sz="1700" b="1" i="0">
+                <a:solidFill>
+                  <a:srgbClr val="EDAB0C"/>
+                </a:solidFill>
+                <a:latin typeface="Roboto"/>
+              </a:rPr>
+              <a:t>■  </a:t>
+            </a:r>
+            <a:r>
+              <a:rPr sz="1700" b="0" i="0">
+                <a:solidFill>
+                  <a:srgbClr val="2A2929"/>
+                </a:solidFill>
+                <a:latin typeface="Roboto"/>
+              </a:rPr>
+              <a:t>Justify the microservice design in writing, then answer the four knowledge questions citing your own choices.</a:t>
+            </a:r>
+          </a:p>
+        </p:txBody>
+      </p:sp>
+      <p:sp>
+        <p:nvSpPr>
+          <p:cNvPr id="6" name="Rounded Rectangle 5"/>
+          <p:cNvSpPr/>
+          <p:nvPr/>
+        </p:nvSpPr>
+        <p:spPr>
+          <a:xfrm>
+            <a:off x="640080" y="5897880"/>
+            <a:ext cx="4023360" cy="457200"/>
+          </a:xfrm>
+          <a:prstGeom prst="roundRect">
+            <a:avLst/>
+          </a:prstGeom>
+          <a:solidFill>
+            <a:srgbClr val="F9F9F9"/>
+          </a:solidFill>
+          <a:ln w="12700">
+            <a:solidFill>
+              <a:srgbClr val="CCCCCC"/>
+            </a:solidFill>
+          </a:ln>
+          <a:effectLst/>
+        </p:spPr>
+        <p:style>
+          <a:lnRef idx="1">
+            <a:schemeClr val="accent1"/>
+          </a:lnRef>
+          <a:fillRef idx="3">
+            <a:schemeClr val="accent1"/>
+          </a:fillRef>
+          <a:effectRef idx="2">
+            <a:schemeClr val="accent1"/>
+          </a:effectRef>
+          <a:fontRef idx="minor">
+            <a:schemeClr val="lt1"/>
+          </a:fontRef>
+        </p:style>
+        <p:txBody>
+          <a:bodyPr rtlCol="0" anchor="ctr"/>
+          <a:lstStyle/>
+          <a:p>
+            <a:pPr algn="ctr"/>
+          </a:p>
+        </p:txBody>
+      </p:sp>
+      <p:sp>
+        <p:nvSpPr>
+          <p:cNvPr id="7" name="TextBox 6"/>
+          <p:cNvSpPr txBox="1"/>
+          <p:nvPr/>
+        </p:nvSpPr>
+        <p:spPr>
+          <a:xfrm>
+            <a:off x="822960" y="5943600"/>
+            <a:ext cx="3657600" cy="365760"/>
+          </a:xfrm>
+          <a:prstGeom prst="rect">
+            <a:avLst/>
+          </a:prstGeom>
+          <a:noFill/>
+        </p:spPr>
+        <p:txBody>
+          <a:bodyPr wrap="square" anchor="ctr" lIns="0" rIns="0" tIns="0" bIns="0">
+            <a:spAutoFit/>
+          </a:bodyPr>
+          <a:lstStyle/>
+          <a:p>
+            <a:r>
+              <a:rPr sz="1500" b="1" i="0">
+                <a:solidFill>
+                  <a:srgbClr val="2A2929"/>
+                </a:solidFill>
+                <a:latin typeface="Roboto"/>
+              </a:rPr>
+              <a:t>⏱  ~30 min</a:t>
+            </a:r>
+          </a:p>
+        </p:txBody>
+      </p:sp>
+      <p:sp>
+        <p:nvSpPr>
+          <p:cNvPr id="8" name="Rectangle 7"/>
+          <p:cNvSpPr/>
+          <p:nvPr/>
+        </p:nvSpPr>
+        <p:spPr>
+          <a:xfrm>
+            <a:off x="0" y="6565392"/>
+            <a:ext cx="12191695" cy="38100"/>
+          </a:xfrm>
+          <a:prstGeom prst="rect">
+            <a:avLst/>
+          </a:prstGeom>
+          <a:solidFill>
+            <a:srgbClr val="004488"/>
+          </a:solidFill>
+          <a:ln>
+            <a:noFill/>
+          </a:ln>
+          <a:effectLst/>
+        </p:spPr>
+        <p:style>
+          <a:lnRef idx="1">
+            <a:schemeClr val="accent1"/>
+          </a:lnRef>
+          <a:fillRef idx="3">
+            <a:schemeClr val="accent1"/>
+          </a:fillRef>
+          <a:effectRef idx="2">
+            <a:schemeClr val="accent1"/>
+          </a:effectRef>
+          <a:fontRef idx="minor">
+            <a:schemeClr val="lt1"/>
+          </a:fontRef>
+        </p:style>
+        <p:txBody>
+          <a:bodyPr rtlCol="0" anchor="ctr"/>
+          <a:lstStyle/>
+          <a:p>
+            <a:pPr algn="ctr"/>
+          </a:p>
+        </p:txBody>
+      </p:sp>
+      <p:sp>
+        <p:nvSpPr>
+          <p:cNvPr id="9" name="TextBox 8"/>
+          <p:cNvSpPr txBox="1"/>
+          <p:nvPr/>
+        </p:nvSpPr>
+        <p:spPr>
+          <a:xfrm>
+            <a:off x="502920" y="6400800"/>
+            <a:ext cx="5486400" cy="320040"/>
+          </a:xfrm>
+          <a:prstGeom prst="rect">
+            <a:avLst/>
+          </a:prstGeom>
+          <a:noFill/>
+        </p:spPr>
+        <p:txBody>
+          <a:bodyPr wrap="square" anchor="t" lIns="0" rIns="0" tIns="0" bIns="0">
+            <a:spAutoFit/>
+          </a:bodyPr>
+          <a:lstStyle/>
+          <a:p>
+            <a:r>
+              <a:rPr sz="1100" b="1" i="0">
+                <a:solidFill>
+                  <a:srgbClr val="2A2929"/>
+                </a:solidFill>
+                <a:latin typeface="Roboto"/>
+              </a:rPr>
+              <a:t>Kangan </a:t>
+            </a:r>
+            <a:r>
+              <a:rPr sz="1100" b="1" i="0">
+                <a:solidFill>
+                  <a:srgbClr val="D68E10"/>
+                </a:solidFill>
+                <a:latin typeface="Roboto"/>
+              </a:rPr>
+              <a:t>Institute</a:t>
+            </a:r>
+          </a:p>
+        </p:txBody>
+      </p:sp>
+      <p:sp>
+        <p:nvSpPr>
+          <p:cNvPr id="10" name="TextBox 9"/>
+          <p:cNvSpPr txBox="1"/>
+          <p:nvPr/>
+        </p:nvSpPr>
+        <p:spPr>
+          <a:xfrm>
+            <a:off x="10515600" y="6400800"/>
+            <a:ext cx="1188720" cy="320040"/>
+          </a:xfrm>
+          <a:prstGeom prst="rect">
+            <a:avLst/>
+          </a:prstGeom>
+          <a:noFill/>
+        </p:spPr>
+        <p:txBody>
+          <a:bodyPr wrap="square" anchor="t" lIns="0" rIns="0" tIns="0" bIns="0">
+            <a:spAutoFit/>
+          </a:bodyPr>
+          <a:lstStyle/>
+          <a:p>
+            <a:pPr algn="r"/>
+            <a:r>
+              <a:rPr sz="1100" b="0" i="0">
+                <a:solidFill>
+                  <a:srgbClr val="7A7A7A"/>
+                </a:solidFill>
+                <a:latin typeface="Roboto"/>
+              </a:rPr>
+              <a:t>18</a:t>
+            </a:r>
+          </a:p>
+        </p:txBody>
+      </p:sp>
+    </p:spTree>
+  </p:cSld>
+  <p:clrMapOvr>
+    <a:masterClrMapping/>
+  </p:clrMapOvr>
+</p:sld>
+</file>
+
+<file path=ppt/slides/slide24.xml><?xml version="1.0" encoding="utf-8"?>
+<p:sld xmlns:a="http://schemas.openxmlformats.org/drawingml/2006/main" xmlns:p="http://schemas.openxmlformats.org/presentationml/2006/main" xmlns:r="http://schemas.openxmlformats.org/officeDocument/2006/relationships">
+  <p:cSld>
+    <p:bg>
+      <p:bgPr>
+        <a:solidFill>
+          <a:srgbClr val="F9F9F9"/>
+        </a:solidFill>
+        <a:effectLst/>
+      </p:bgPr>
+    </p:bg>
+    <p:spTree>
+      <p:nvGrpSpPr>
+        <p:cNvPr id="1" name=""/>
+        <p:cNvGrpSpPr/>
+        <p:nvPr/>
+      </p:nvGrpSpPr>
+      <p:grpSpPr/>
+      <p:sp>
+        <p:nvSpPr>
+          <p:cNvPr id="2" name="TextBox 1"/>
+          <p:cNvSpPr txBox="1"/>
+          <p:nvPr/>
+        </p:nvSpPr>
+        <p:spPr>
+          <a:xfrm>
+            <a:off x="640080" y="548640"/>
+            <a:ext cx="10881360" cy="1097280"/>
+          </a:xfrm>
+          <a:prstGeom prst="rect">
+            <a:avLst/>
+          </a:prstGeom>
+          <a:noFill/>
+        </p:spPr>
+        <p:txBody>
+          <a:bodyPr wrap="square" anchor="t" lIns="0" rIns="0" tIns="0" bIns="0">
+            <a:spAutoFit/>
+          </a:bodyPr>
+          <a:lstStyle/>
+          <a:p>
+            <a:r>
+              <a:rPr sz="3200" b="1" i="0">
+                <a:solidFill>
+                  <a:srgbClr val="2A2929"/>
+                </a:solidFill>
+                <a:latin typeface="Roboto"/>
+              </a:rPr>
+              <a:t>Key takeaways</a:t>
+            </a:r>
+          </a:p>
+          <a:p>
+            <a:pPr>
+              <a:spcBef>
+                <a:spcPts val="200"/>
+              </a:spcBef>
+            </a:pPr>
+            <a:r>
+              <a:rPr sz="1800" b="1" i="0">
+                <a:solidFill>
+                  <a:srgbClr val="004488"/>
+                </a:solidFill>
+                <a:latin typeface="Roboto"/>
+              </a:rPr>
+              <a:t>Topic 2 · Key takeaways</a:t>
+            </a:r>
+          </a:p>
+        </p:txBody>
+      </p:sp>
+      <p:sp>
+        <p:nvSpPr>
+          <p:cNvPr id="3" name="Rectangle 2"/>
+          <p:cNvSpPr/>
+          <p:nvPr/>
+        </p:nvSpPr>
+        <p:spPr>
+          <a:xfrm>
+            <a:off x="658368" y="1600200"/>
+            <a:ext cx="1463040" cy="50800"/>
+          </a:xfrm>
+          <a:prstGeom prst="rect">
+            <a:avLst/>
+          </a:prstGeom>
+          <a:solidFill>
+            <a:srgbClr val="004488"/>
+          </a:solidFill>
+          <a:ln>
+            <a:noFill/>
+          </a:ln>
+          <a:effectLst/>
+        </p:spPr>
+        <p:style>
+          <a:lnRef idx="1">
+            <a:schemeClr val="accent1"/>
+          </a:lnRef>
+          <a:fillRef idx="3">
+            <a:schemeClr val="accent1"/>
+          </a:fillRef>
+          <a:effectRef idx="2">
+            <a:schemeClr val="accent1"/>
+          </a:effectRef>
+          <a:fontRef idx="minor">
+            <a:schemeClr val="lt1"/>
+          </a:fontRef>
+        </p:style>
+        <p:txBody>
+          <a:bodyPr rtlCol="0" anchor="ctr"/>
+          <a:lstStyle/>
+          <a:p>
+            <a:pPr algn="ctr"/>
+          </a:p>
+        </p:txBody>
+      </p:sp>
+      <p:sp>
+        <p:nvSpPr>
+          <p:cNvPr id="4" name="Rectangle 3"/>
+          <p:cNvSpPr/>
+          <p:nvPr/>
+        </p:nvSpPr>
+        <p:spPr>
+          <a:xfrm>
+            <a:off x="640080" y="1965960"/>
+            <a:ext cx="10927080" cy="841248"/>
+          </a:xfrm>
+          <a:prstGeom prst="rect">
+            <a:avLst/>
+          </a:prstGeom>
+          <a:solidFill>
+            <a:srgbClr val="FFFFFF"/>
+          </a:solidFill>
+          <a:ln w="12700">
+            <a:solidFill>
+              <a:srgbClr val="CCCCCC"/>
+            </a:solidFill>
+          </a:ln>
+          <a:effectLst/>
+        </p:spPr>
+        <p:style>
+          <a:lnRef idx="1">
+            <a:schemeClr val="accent1"/>
+          </a:lnRef>
+          <a:fillRef idx="3">
+            <a:schemeClr val="accent1"/>
+          </a:fillRef>
+          <a:effectRef idx="2">
+            <a:schemeClr val="accent1"/>
+          </a:effectRef>
+          <a:fontRef idx="minor">
+            <a:schemeClr val="lt1"/>
+          </a:fontRef>
+        </p:style>
+        <p:txBody>
+          <a:bodyPr rtlCol="0" anchor="ctr"/>
+          <a:lstStyle/>
+          <a:p>
+            <a:pPr algn="ctr"/>
+          </a:p>
+        </p:txBody>
+      </p:sp>
+      <p:sp>
+        <p:nvSpPr>
+          <p:cNvPr id="5" name="Rectangle 4"/>
+          <p:cNvSpPr/>
+          <p:nvPr/>
+        </p:nvSpPr>
+        <p:spPr>
+          <a:xfrm>
+            <a:off x="640080" y="1965960"/>
+            <a:ext cx="109728" cy="841248"/>
+          </a:xfrm>
+          <a:prstGeom prst="rect">
+            <a:avLst/>
+          </a:prstGeom>
+          <a:solidFill>
+            <a:srgbClr val="004488"/>
+          </a:solidFill>
+          <a:ln>
+            <a:noFill/>
+          </a:ln>
+          <a:effectLst/>
+        </p:spPr>
+        <p:style>
+          <a:lnRef idx="1">
+            <a:schemeClr val="accent1"/>
+          </a:lnRef>
+          <a:fillRef idx="3">
+            <a:schemeClr val="accent1"/>
+          </a:fillRef>
+          <a:effectRef idx="2">
+            <a:schemeClr val="accent1"/>
+          </a:effectRef>
+          <a:fontRef idx="minor">
+            <a:schemeClr val="lt1"/>
+          </a:fontRef>
+        </p:style>
+        <p:txBody>
+          <a:bodyPr rtlCol="0" anchor="ctr"/>
+          <a:lstStyle/>
+          <a:p>
+            <a:pPr algn="ctr"/>
+          </a:p>
+        </p:txBody>
+      </p:sp>
+      <p:sp>
+        <p:nvSpPr>
+          <p:cNvPr id="6" name="TextBox 5"/>
+          <p:cNvSpPr txBox="1"/>
+          <p:nvPr/>
+        </p:nvSpPr>
+        <p:spPr>
+          <a:xfrm>
+            <a:off x="960120" y="1965960"/>
+            <a:ext cx="10424160" cy="841248"/>
+          </a:xfrm>
+          <a:prstGeom prst="rect">
+            <a:avLst/>
+          </a:prstGeom>
+          <a:noFill/>
+        </p:spPr>
+        <p:txBody>
+          <a:bodyPr wrap="square" anchor="ctr" lIns="0" rIns="0" tIns="0" bIns="0">
+            <a:spAutoFit/>
+          </a:bodyPr>
+          <a:lstStyle/>
+          <a:p>
+            <a:pPr>
+              <a:lnSpc>
+                <a:spcPct val="100000"/>
+              </a:lnSpc>
+            </a:pPr>
+            <a:r>
+              <a:rPr sz="1700" b="0" i="0">
+                <a:solidFill>
+                  <a:srgbClr val="2A2929"/>
+                </a:solidFill>
+                <a:latin typeface="Roboto"/>
+              </a:rPr>
+              <a:t>One job, its own data, a narrow versioned contract.</a:t>
+            </a:r>
+          </a:p>
+        </p:txBody>
+      </p:sp>
+      <p:sp>
+        <p:nvSpPr>
+          <p:cNvPr id="7" name="Rectangle 6"/>
+          <p:cNvSpPr/>
+          <p:nvPr/>
+        </p:nvSpPr>
+        <p:spPr>
+          <a:xfrm>
+            <a:off x="640080" y="2916936"/>
+            <a:ext cx="10927080" cy="841248"/>
+          </a:xfrm>
+          <a:prstGeom prst="rect">
+            <a:avLst/>
+          </a:prstGeom>
+          <a:solidFill>
+            <a:srgbClr val="FFFFFF"/>
+          </a:solidFill>
+          <a:ln w="12700">
+            <a:solidFill>
+              <a:srgbClr val="CCCCCC"/>
+            </a:solidFill>
+          </a:ln>
+          <a:effectLst/>
+        </p:spPr>
+        <p:style>
+          <a:lnRef idx="1">
+            <a:schemeClr val="accent1"/>
+          </a:lnRef>
+          <a:fillRef idx="3">
+            <a:schemeClr val="accent1"/>
+          </a:fillRef>
+          <a:effectRef idx="2">
+            <a:schemeClr val="accent1"/>
+          </a:effectRef>
+          <a:fontRef idx="minor">
+            <a:schemeClr val="lt1"/>
+          </a:fontRef>
+        </p:style>
+        <p:txBody>
+          <a:bodyPr rtlCol="0" anchor="ctr"/>
+          <a:lstStyle/>
+          <a:p>
+            <a:pPr algn="ctr"/>
+          </a:p>
+        </p:txBody>
+      </p:sp>
+      <p:sp>
+        <p:nvSpPr>
+          <p:cNvPr id="8" name="Rectangle 7"/>
+          <p:cNvSpPr/>
+          <p:nvPr/>
+        </p:nvSpPr>
+        <p:spPr>
+          <a:xfrm>
+            <a:off x="640080" y="2916936"/>
+            <a:ext cx="109728" cy="841248"/>
+          </a:xfrm>
+          <a:prstGeom prst="rect">
+            <a:avLst/>
+          </a:prstGeom>
+          <a:solidFill>
+            <a:srgbClr val="004488"/>
+          </a:solidFill>
+          <a:ln>
+            <a:noFill/>
+          </a:ln>
+          <a:effectLst/>
+        </p:spPr>
+        <p:style>
+          <a:lnRef idx="1">
+            <a:schemeClr val="accent1"/>
+          </a:lnRef>
+          <a:fillRef idx="3">
+            <a:schemeClr val="accent1"/>
+          </a:fillRef>
+          <a:effectRef idx="2">
+            <a:schemeClr val="accent1"/>
+          </a:effectRef>
+          <a:fontRef idx="minor">
+            <a:schemeClr val="lt1"/>
+          </a:fontRef>
+        </p:style>
+        <p:txBody>
+          <a:bodyPr rtlCol="0" anchor="ctr"/>
+          <a:lstStyle/>
+          <a:p>
+            <a:pPr algn="ctr"/>
+          </a:p>
+        </p:txBody>
+      </p:sp>
+      <p:sp>
+        <p:nvSpPr>
+          <p:cNvPr id="9" name="TextBox 8"/>
+          <p:cNvSpPr txBox="1"/>
+          <p:nvPr/>
+        </p:nvSpPr>
+        <p:spPr>
+          <a:xfrm>
+            <a:off x="960120" y="2916936"/>
+            <a:ext cx="10424160" cy="841248"/>
+          </a:xfrm>
+          <a:prstGeom prst="rect">
+            <a:avLst/>
+          </a:prstGeom>
+          <a:noFill/>
+        </p:spPr>
+        <p:txBody>
+          <a:bodyPr wrap="square" anchor="ctr" lIns="0" rIns="0" tIns="0" bIns="0">
+            <a:spAutoFit/>
+          </a:bodyPr>
+          <a:lstStyle/>
+          <a:p>
+            <a:pPr>
+              <a:lnSpc>
+                <a:spcPct val="100000"/>
+              </a:lnSpc>
+            </a:pPr>
+            <a:r>
+              <a:rPr sz="1700" b="0" i="0">
+                <a:solidFill>
+                  <a:srgbClr val="2A2929"/>
+                </a:solidFill>
+                <a:latin typeface="Roboto"/>
+              </a:rPr>
+              <a:t>High cohesion within, loose coupling between; the queue is the seam.</a:t>
+            </a:r>
+          </a:p>
+        </p:txBody>
+      </p:sp>
+      <p:sp>
+        <p:nvSpPr>
+          <p:cNvPr id="10" name="Rectangle 9"/>
+          <p:cNvSpPr/>
+          <p:nvPr/>
+        </p:nvSpPr>
+        <p:spPr>
+          <a:xfrm>
+            <a:off x="640080" y="3867912"/>
+            <a:ext cx="10927080" cy="841248"/>
+          </a:xfrm>
+          <a:prstGeom prst="rect">
+            <a:avLst/>
+          </a:prstGeom>
+          <a:solidFill>
+            <a:srgbClr val="FFFFFF"/>
+          </a:solidFill>
+          <a:ln w="12700">
+            <a:solidFill>
+              <a:srgbClr val="CCCCCC"/>
+            </a:solidFill>
+          </a:ln>
+          <a:effectLst/>
+        </p:spPr>
+        <p:style>
+          <a:lnRef idx="1">
+            <a:schemeClr val="accent1"/>
+          </a:lnRef>
+          <a:fillRef idx="3">
+            <a:schemeClr val="accent1"/>
+          </a:fillRef>
+          <a:effectRef idx="2">
+            <a:schemeClr val="accent1"/>
+          </a:effectRef>
+          <a:fontRef idx="minor">
+            <a:schemeClr val="lt1"/>
+          </a:fontRef>
+        </p:style>
+        <p:txBody>
+          <a:bodyPr rtlCol="0" anchor="ctr"/>
+          <a:lstStyle/>
+          <a:p>
+            <a:pPr algn="ctr"/>
+          </a:p>
+        </p:txBody>
+      </p:sp>
+      <p:sp>
+        <p:nvSpPr>
+          <p:cNvPr id="11" name="Rectangle 10"/>
+          <p:cNvSpPr/>
+          <p:nvPr/>
+        </p:nvSpPr>
+        <p:spPr>
+          <a:xfrm>
+            <a:off x="640080" y="3867912"/>
+            <a:ext cx="109728" cy="841248"/>
+          </a:xfrm>
+          <a:prstGeom prst="rect">
+            <a:avLst/>
+          </a:prstGeom>
+          <a:solidFill>
+            <a:srgbClr val="004488"/>
+          </a:solidFill>
+          <a:ln>
+            <a:noFill/>
+          </a:ln>
+          <a:effectLst/>
+        </p:spPr>
+        <p:style>
+          <a:lnRef idx="1">
+            <a:schemeClr val="accent1"/>
+          </a:lnRef>
+          <a:fillRef idx="3">
+            <a:schemeClr val="accent1"/>
+          </a:fillRef>
+          <a:effectRef idx="2">
+            <a:schemeClr val="accent1"/>
+          </a:effectRef>
+          <a:fontRef idx="minor">
+            <a:schemeClr val="lt1"/>
+          </a:fontRef>
+        </p:style>
+        <p:txBody>
+          <a:bodyPr rtlCol="0" anchor="ctr"/>
+          <a:lstStyle/>
+          <a:p>
+            <a:pPr algn="ctr"/>
+          </a:p>
+        </p:txBody>
+      </p:sp>
+      <p:sp>
+        <p:nvSpPr>
+          <p:cNvPr id="12" name="TextBox 11"/>
+          <p:cNvSpPr txBox="1"/>
+          <p:nvPr/>
+        </p:nvSpPr>
+        <p:spPr>
+          <a:xfrm>
+            <a:off x="960120" y="3867912"/>
+            <a:ext cx="10424160" cy="841248"/>
+          </a:xfrm>
+          <a:prstGeom prst="rect">
+            <a:avLst/>
+          </a:prstGeom>
+          <a:noFill/>
+        </p:spPr>
+        <p:txBody>
+          <a:bodyPr wrap="square" anchor="ctr" lIns="0" rIns="0" tIns="0" bIns="0">
+            <a:spAutoFit/>
+          </a:bodyPr>
+          <a:lstStyle/>
+          <a:p>
+            <a:pPr>
+              <a:lnSpc>
+                <a:spcPct val="100000"/>
+              </a:lnSpc>
+            </a:pPr>
+            <a:r>
+              <a:rPr sz="1700" b="0" i="0">
+                <a:solidFill>
+                  <a:srgbClr val="2A2929"/>
+                </a:solidFill>
+                <a:latin typeface="Roboto"/>
+              </a:rPr>
+              <a:t>Justify choice by choice against requirements; answer questions from your own design.</a:t>
+            </a:r>
+          </a:p>
+        </p:txBody>
+      </p:sp>
+      <p:sp>
+        <p:nvSpPr>
+          <p:cNvPr id="13" name="Rectangle 12"/>
+          <p:cNvSpPr/>
+          <p:nvPr/>
+        </p:nvSpPr>
+        <p:spPr>
+          <a:xfrm>
+            <a:off x="0" y="6565392"/>
+            <a:ext cx="12191695" cy="38100"/>
+          </a:xfrm>
+          <a:prstGeom prst="rect">
+            <a:avLst/>
+          </a:prstGeom>
+          <a:solidFill>
+            <a:srgbClr val="004488"/>
+          </a:solidFill>
+          <a:ln>
+            <a:noFill/>
+          </a:ln>
+          <a:effectLst/>
+        </p:spPr>
+        <p:style>
+          <a:lnRef idx="1">
+            <a:schemeClr val="accent1"/>
+          </a:lnRef>
+          <a:fillRef idx="3">
+            <a:schemeClr val="accent1"/>
+          </a:fillRef>
+          <a:effectRef idx="2">
+            <a:schemeClr val="accent1"/>
+          </a:effectRef>
+          <a:fontRef idx="minor">
+            <a:schemeClr val="lt1"/>
+          </a:fontRef>
+        </p:style>
+        <p:txBody>
+          <a:bodyPr rtlCol="0" anchor="ctr"/>
+          <a:lstStyle/>
+          <a:p>
+            <a:pPr algn="ctr"/>
+          </a:p>
+        </p:txBody>
+      </p:sp>
+      <p:sp>
+        <p:nvSpPr>
+          <p:cNvPr id="14" name="TextBox 13"/>
+          <p:cNvSpPr txBox="1"/>
+          <p:nvPr/>
+        </p:nvSpPr>
+        <p:spPr>
+          <a:xfrm>
+            <a:off x="502920" y="6400800"/>
+            <a:ext cx="5486400" cy="320040"/>
+          </a:xfrm>
+          <a:prstGeom prst="rect">
+            <a:avLst/>
+          </a:prstGeom>
+          <a:noFill/>
+        </p:spPr>
+        <p:txBody>
+          <a:bodyPr wrap="square" anchor="t" lIns="0" rIns="0" tIns="0" bIns="0">
+            <a:spAutoFit/>
+          </a:bodyPr>
+          <a:lstStyle/>
+          <a:p>
+            <a:r>
+              <a:rPr sz="1100" b="1" i="0">
+                <a:solidFill>
+                  <a:srgbClr val="2A2929"/>
+                </a:solidFill>
+                <a:latin typeface="Roboto"/>
+              </a:rPr>
+              <a:t>Kangan </a:t>
+            </a:r>
+            <a:r>
+              <a:rPr sz="1100" b="1" i="0">
+                <a:solidFill>
+                  <a:srgbClr val="D68E10"/>
+                </a:solidFill>
+                <a:latin typeface="Roboto"/>
+              </a:rPr>
+              <a:t>Institute</a:t>
+            </a:r>
+          </a:p>
+        </p:txBody>
+      </p:sp>
+      <p:sp>
+        <p:nvSpPr>
+          <p:cNvPr id="15" name="TextBox 14"/>
+          <p:cNvSpPr txBox="1"/>
+          <p:nvPr/>
+        </p:nvSpPr>
+        <p:spPr>
+          <a:xfrm>
+            <a:off x="10515600" y="6400800"/>
+            <a:ext cx="1188720" cy="320040"/>
+          </a:xfrm>
+          <a:prstGeom prst="rect">
+            <a:avLst/>
+          </a:prstGeom>
+          <a:noFill/>
+        </p:spPr>
+        <p:txBody>
+          <a:bodyPr wrap="square" anchor="t" lIns="0" rIns="0" tIns="0" bIns="0">
+            <a:spAutoFit/>
+          </a:bodyPr>
+          <a:lstStyle/>
+          <a:p>
+            <a:pPr algn="r"/>
+            <a:r>
+              <a:rPr sz="1100" b="0" i="0">
+                <a:solidFill>
+                  <a:srgbClr val="7A7A7A"/>
+                </a:solidFill>
+                <a:latin typeface="Roboto"/>
+              </a:rPr>
+              <a:t>19</a:t>
+            </a:r>
+          </a:p>
+        </p:txBody>
+      </p:sp>
+    </p:spTree>
+  </p:cSld>
+  <p:clrMapOvr>
+    <a:masterClrMapping/>
+  </p:clrMapOvr>
+</p:sld>
+</file>
+
+<file path=ppt/slides/slide25.xml><?xml version="1.0" encoding="utf-8"?>
+<p:sld xmlns:a="http://schemas.openxmlformats.org/drawingml/2006/main" xmlns:p="http://schemas.openxmlformats.org/presentationml/2006/main" xmlns:r="http://schemas.openxmlformats.org/officeDocument/2006/relationships">
+  <p:cSld>
+    <p:bg>
+      <p:bgPr>
+        <a:solidFill>
+          <a:srgbClr val="2A2929"/>
+        </a:solidFill>
+        <a:effectLst/>
+      </p:bgPr>
+    </p:bg>
+    <p:spTree>
+      <p:nvGrpSpPr>
+        <p:cNvPr id="1" name=""/>
+        <p:cNvGrpSpPr/>
+        <p:nvPr/>
+      </p:nvGrpSpPr>
+      <p:grpSpPr/>
+      <p:sp>
+        <p:nvSpPr>
+          <p:cNvPr id="2" name="Rectangle 1"/>
+          <p:cNvSpPr/>
+          <p:nvPr/>
+        </p:nvSpPr>
+        <p:spPr>
+          <a:xfrm>
+            <a:off x="0" y="0"/>
+            <a:ext cx="411480" cy="6858000"/>
+          </a:xfrm>
+          <a:prstGeom prst="rect">
+            <a:avLst/>
+          </a:prstGeom>
+          <a:solidFill>
+            <a:srgbClr val="EDAB0C"/>
+          </a:solidFill>
+          <a:ln>
+            <a:noFill/>
+          </a:ln>
+          <a:effectLst/>
+        </p:spPr>
+        <p:style>
+          <a:lnRef idx="1">
+            <a:schemeClr val="accent1"/>
+          </a:lnRef>
+          <a:fillRef idx="3">
+            <a:schemeClr val="accent1"/>
+          </a:fillRef>
+          <a:effectRef idx="2">
+            <a:schemeClr val="accent1"/>
+          </a:effectRef>
+          <a:fontRef idx="minor">
+            <a:schemeClr val="lt1"/>
+          </a:fontRef>
+        </p:style>
+        <p:txBody>
+          <a:bodyPr rtlCol="0" anchor="ctr"/>
+          <a:lstStyle/>
+          <a:p>
+            <a:pPr algn="ctr"/>
+          </a:p>
+        </p:txBody>
+      </p:sp>
+      <p:sp>
+        <p:nvSpPr>
+          <p:cNvPr id="3" name="TextBox 2"/>
+          <p:cNvSpPr txBox="1"/>
+          <p:nvPr/>
+        </p:nvSpPr>
+        <p:spPr>
+          <a:xfrm>
+            <a:off x="914400" y="1463040"/>
+            <a:ext cx="10515600" cy="4023360"/>
+          </a:xfrm>
+          <a:prstGeom prst="rect">
+            <a:avLst/>
+          </a:prstGeom>
+          <a:noFill/>
+        </p:spPr>
+        <p:txBody>
+          <a:bodyPr wrap="square" anchor="t" lIns="0" rIns="0" tIns="0" bIns="0">
+            <a:spAutoFit/>
+          </a:bodyPr>
+          <a:lstStyle/>
+          <a:p>
+            <a:r>
+              <a:rPr sz="4000" b="1" i="0">
+                <a:solidFill>
+                  <a:srgbClr val="FFFFFF"/>
+                </a:solidFill>
+                <a:latin typeface="Roboto"/>
+              </a:rPr>
+              <a:t>Next: Topic 3 — disaster recovery</a:t>
+            </a:r>
+          </a:p>
+          <a:p>
+            <a:pPr>
+              <a:lnSpc>
+                <a:spcPct val="105000"/>
+              </a:lnSpc>
+              <a:spcBef>
+                <a:spcPts val="1200"/>
+              </a:spcBef>
+            </a:pPr>
+            <a:r>
+              <a:rPr sz="1900" b="0" i="0">
+                <a:solidFill>
+                  <a:srgbClr val="E8E8E8"/>
+                </a:solidFill>
+                <a:latin typeface="Roboto Light"/>
+              </a:rPr>
+              <a:t>Part A's design work is done: the web-scale platform and the microservice, drawn, justified and defensible.</a:t>
+            </a:r>
+          </a:p>
+          <a:p>
+            <a:pPr>
+              <a:lnSpc>
+                <a:spcPct val="105000"/>
+              </a:lnSpc>
+              <a:spcBef>
+                <a:spcPts val="1200"/>
+              </a:spcBef>
+            </a:pPr>
+            <a:r>
+              <a:rPr sz="1900" b="0" i="0">
+                <a:solidFill>
+                  <a:srgbClr val="E8E8E8"/>
+                </a:solidFill>
+                <a:latin typeface="Roboto Light"/>
+              </a:rPr>
+              <a:t>Next you plan for the day it all fails — DR requirements and impact analysis.</a:t>
             </a:r>
           </a:p>
         </p:txBody>
@@ -8945,7 +11595,7 @@
                 </a:solidFill>
                 <a:latin typeface="Roboto"/>
               </a:rPr>
-              <a:t>Microservices &amp; data transactions</a:t>
+              <a:t>The microservice and its data</a:t>
             </a:r>
           </a:p>
           <a:p>
@@ -9583,7 +12233,7 @@
                 </a:solidFill>
                 <a:latin typeface="Roboto"/>
               </a:rPr>
-              <a:t>The one job: capture each India-cohort access/enquiry event the website emits and record it durably.</a:t>
+              <a:t>The one job: capture each access event the platform emits and record it durably.</a:t>
             </a:r>
           </a:p>
           <a:p>
@@ -9614,7 +12264,7 @@
                 </a:solidFill>
                 <a:latin typeface="Roboto"/>
               </a:rPr>
-              <a:t>The website is the event producer; it knows only the webhook contract, not the store behind it.</a:t>
+              <a:t>The platform is the event producer; it knows only the webhook contract, not the store behind it.</a:t>
             </a:r>
           </a:p>
           <a:p>
@@ -9645,7 +12295,7 @@
                 </a:solidFill>
                 <a:latin typeface="Roboto"/>
               </a:rPr>
-              <a:t>Residency: India-cohort access logs land in an India-resident store (ap-south-1) per the requirements.</a:t>
+              <a:t>The residency obligation is why this service exists on its own — the log lands in a store the platform needn't host.</a:t>
             </a:r>
           </a:p>
         </p:txBody>
@@ -9925,7 +12575,7 @@
                 </a:solidFill>
                 <a:latin typeface="Roboto"/>
               </a:rPr>
-              <a:t>One transaction: append an access event (who / what / when) — write-once, never updated.</a:t>
+              <a:t>One transaction: append an access event — who, what, when — written once and never updated.</a:t>
             </a:r>
           </a:p>
           <a:p>
@@ -9956,7 +12606,7 @@
                 </a:solidFill>
                 <a:latin typeface="Roboto"/>
               </a:rPr>
-              <a:t>Append-only means idempotent writes and simple, high-scale reads for audit retrieval.</a:t>
+              <a:t>Append-only buys idempotent writes and simple, high-scale reads.</a:t>
             </a:r>
           </a:p>
           <a:p>
@@ -9987,7 +12637,7 @@
                 </a:solidFill>
                 <a:latin typeface="Roboto"/>
               </a:rPr>
-              <a:t>Identify each transaction by the business need it meets — here, the CERT-In access-log obligation.</a:t>
+              <a:t>A transaction exists because a business need demands it, not because it is technically possible.</a:t>
             </a:r>
           </a:p>
         </p:txBody>
@@ -10266,7 +12916,7 @@
                 </a:solidFill>
                 <a:latin typeface="Roboto"/>
               </a:rPr>
-              <a:t>Identify the microservice &amp; transactions</a:t>
+              <a:t>Identify the microservice and its transactions</a:t>
             </a:r>
           </a:p>
         </p:txBody>
@@ -10320,7 +12970,7 @@
                 </a:solidFill>
                 <a:latin typeface="Roboto"/>
               </a:rPr>
-              <a:t>For the practice scenario, identify the microservice(s) and the data transaction(s) each handles.</a:t>
+              <a:t>Workbook — task 15.</a:t>
             </a:r>
           </a:p>
           <a:p>
@@ -10351,7 +13001,7 @@
                 </a:solidFill>
                 <a:latin typeface="Roboto"/>
               </a:rPr>
-              <a:t>State the business need each transaction meets.</a:t>
+              <a:t>Identify the microservice and the data it handles, and state the business need behind each transaction.</a:t>
             </a:r>
           </a:p>
         </p:txBody>
@@ -10572,7 +13222,7 @@
     <p:bg>
       <p:bgPr>
         <a:solidFill>
-          <a:srgbClr val="FFFFFF"/>
+          <a:srgbClr val="F9F9F9"/>
         </a:solidFill>
         <a:effectLst/>
       </p:bgPr>
@@ -10586,20 +13236,70 @@
       <p:grpSpPr/>
       <p:sp>
         <p:nvSpPr>
-          <p:cNvPr id="2" name="Rectangle 1"/>
+          <p:cNvPr id="2" name="TextBox 1"/>
+          <p:cNvSpPr txBox="1"/>
+          <p:nvPr/>
+        </p:nvSpPr>
+        <p:spPr>
+          <a:xfrm>
+            <a:off x="640080" y="548640"/>
+            <a:ext cx="10881360" cy="1097280"/>
+          </a:xfrm>
+          <a:prstGeom prst="rect">
+            <a:avLst/>
+          </a:prstGeom>
+          <a:noFill/>
+        </p:spPr>
+        <p:txBody>
+          <a:bodyPr wrap="square" anchor="t" lIns="0" rIns="0" tIns="0" bIns="0">
+            <a:spAutoFit/>
+          </a:bodyPr>
+          <a:lstStyle/>
+          <a:p>
+            <a:r>
+              <a:rPr sz="3200" b="1" i="0">
+                <a:solidFill>
+                  <a:srgbClr val="2A2929"/>
+                </a:solidFill>
+                <a:latin typeface="Roboto"/>
+              </a:rPr>
+              <a:t>Key takeaways</a:t>
+            </a:r>
+          </a:p>
+          <a:p>
+            <a:pPr>
+              <a:spcBef>
+                <a:spcPts val="200"/>
+              </a:spcBef>
+            </a:pPr>
+            <a:r>
+              <a:rPr sz="1800" b="1" i="0">
+                <a:solidFill>
+                  <a:srgbClr val="92268F"/>
+                </a:solidFill>
+                <a:latin typeface="Roboto"/>
+              </a:rPr>
+              <a:t>Section 1 · The service</a:t>
+            </a:r>
+          </a:p>
+        </p:txBody>
+      </p:sp>
+      <p:sp>
+        <p:nvSpPr>
+          <p:cNvPr id="3" name="Rectangle 2"/>
           <p:cNvSpPr/>
           <p:nvPr/>
         </p:nvSpPr>
         <p:spPr>
           <a:xfrm>
-            <a:off x="0" y="0"/>
-            <a:ext cx="3931920" cy="6858000"/>
+            <a:off x="658368" y="1600200"/>
+            <a:ext cx="1463040" cy="50800"/>
           </a:xfrm>
           <a:prstGeom prst="rect">
             <a:avLst/>
           </a:prstGeom>
           <a:solidFill>
-            <a:srgbClr val="27B5CE"/>
+            <a:srgbClr val="92268F"/>
           </a:solidFill>
           <a:ln>
             <a:noFill/>
@@ -10630,101 +13330,47 @@
       </p:sp>
       <p:sp>
         <p:nvSpPr>
-          <p:cNvPr id="3" name="TextBox 2"/>
-          <p:cNvSpPr txBox="1"/>
-          <p:nvPr/>
-        </p:nvSpPr>
-        <p:spPr>
-          <a:xfrm>
-            <a:off x="365760" y="2103120"/>
-            <a:ext cx="3291840" cy="2194560"/>
-          </a:xfrm>
-          <a:prstGeom prst="rect">
-            <a:avLst/>
-          </a:prstGeom>
-          <a:noFill/>
-        </p:spPr>
-        <p:txBody>
-          <a:bodyPr wrap="square" anchor="t" lIns="0" rIns="0" tIns="0" bIns="0">
-            <a:spAutoFit/>
-          </a:bodyPr>
-          <a:lstStyle/>
-          <a:p>
-            <a:r>
-              <a:rPr sz="13000" b="1" i="0">
-                <a:solidFill>
-                  <a:srgbClr val="FFFFFF"/>
-                </a:solidFill>
-                <a:latin typeface="Roboto"/>
-              </a:rPr>
-              <a:t>02</a:t>
-            </a:r>
-          </a:p>
-        </p:txBody>
-      </p:sp>
-      <p:sp>
-        <p:nvSpPr>
-          <p:cNvPr id="4" name="TextBox 3"/>
-          <p:cNvSpPr txBox="1"/>
-          <p:nvPr/>
-        </p:nvSpPr>
-        <p:spPr>
-          <a:xfrm>
-            <a:off x="4480560" y="2468880"/>
-            <a:ext cx="7132320" cy="2194560"/>
-          </a:xfrm>
-          <a:prstGeom prst="rect">
-            <a:avLst/>
-          </a:prstGeom>
-          <a:noFill/>
-        </p:spPr>
-        <p:txBody>
-          <a:bodyPr wrap="square" anchor="t" lIns="0" rIns="0" tIns="0" bIns="0">
-            <a:spAutoFit/>
-          </a:bodyPr>
-          <a:lstStyle/>
-          <a:p>
-            <a:r>
-              <a:rPr sz="1600" b="1" i="0">
-                <a:solidFill>
-                  <a:srgbClr val="27B5CE"/>
-                </a:solidFill>
-                <a:latin typeface="Roboto"/>
-              </a:rPr>
-              <a:t>SECTION</a:t>
-            </a:r>
-          </a:p>
-          <a:p>
-            <a:pPr>
-              <a:spcBef>
-                <a:spcPts val="600"/>
-              </a:spcBef>
-            </a:pPr>
-            <a:r>
-              <a:rPr sz="3800" b="1" i="0">
-                <a:solidFill>
-                  <a:srgbClr val="2A2929"/>
-                </a:solidFill>
-                <a:latin typeface="Roboto"/>
-              </a:rPr>
-              <a:t>Supporting cloud services</a:t>
-            </a:r>
-          </a:p>
-          <a:p>
-            <a:pPr>
-              <a:spcBef>
-                <a:spcPts val="1000"/>
-              </a:spcBef>
-            </a:pPr>
-            <a:r>
-              <a:rPr sz="2000" b="0" i="1">
-                <a:solidFill>
-                  <a:srgbClr val="484848"/>
-                </a:solidFill>
-                <a:latin typeface="Roboto Light"/>
-              </a:rPr>
-              <a:t>pick the serverless building blocks</a:t>
-            </a:r>
+          <p:cNvPr id="4" name="Rectangle 3"/>
+          <p:cNvSpPr/>
+          <p:nvPr/>
+        </p:nvSpPr>
+        <p:spPr>
+          <a:xfrm>
+            <a:off x="640080" y="1965960"/>
+            <a:ext cx="10927080" cy="841248"/>
+          </a:xfrm>
+          <a:prstGeom prst="rect">
+            <a:avLst/>
+          </a:prstGeom>
+          <a:solidFill>
+            <a:srgbClr val="FFFFFF"/>
+          </a:solidFill>
+          <a:ln w="12700">
+            <a:solidFill>
+              <a:srgbClr val="CCCCCC"/>
+            </a:solidFill>
+          </a:ln>
+          <a:effectLst/>
+        </p:spPr>
+        <p:style>
+          <a:lnRef idx="1">
+            <a:schemeClr val="accent1"/>
+          </a:lnRef>
+          <a:fillRef idx="3">
+            <a:schemeClr val="accent1"/>
+          </a:fillRef>
+          <a:effectRef idx="2">
+            <a:schemeClr val="accent1"/>
+          </a:effectRef>
+          <a:fontRef idx="minor">
+            <a:schemeClr val="lt1"/>
+          </a:fontRef>
+        </p:style>
+        <p:txBody>
+          <a:bodyPr rtlCol="0" anchor="ctr"/>
+          <a:lstStyle/>
+          <a:p>
+            <a:pPr algn="ctr"/>
           </a:p>
         </p:txBody>
       </p:sp>
@@ -10736,14 +13382,14 @@
         </p:nvSpPr>
         <p:spPr>
           <a:xfrm>
-            <a:off x="0" y="6565392"/>
-            <a:ext cx="12191695" cy="38100"/>
+            <a:off x="640080" y="1965960"/>
+            <a:ext cx="109728" cy="841248"/>
           </a:xfrm>
           <a:prstGeom prst="rect">
             <a:avLst/>
           </a:prstGeom>
           <a:solidFill>
-            <a:srgbClr val="27B5CE"/>
+            <a:srgbClr val="92268F"/>
           </a:solidFill>
           <a:ln>
             <a:noFill/>
@@ -10780,6 +13426,347 @@
         </p:nvSpPr>
         <p:spPr>
           <a:xfrm>
+            <a:off x="960120" y="1965960"/>
+            <a:ext cx="10424160" cy="841248"/>
+          </a:xfrm>
+          <a:prstGeom prst="rect">
+            <a:avLst/>
+          </a:prstGeom>
+          <a:noFill/>
+        </p:spPr>
+        <p:txBody>
+          <a:bodyPr wrap="square" anchor="ctr" lIns="0" rIns="0" tIns="0" bIns="0">
+            <a:spAutoFit/>
+          </a:bodyPr>
+          <a:lstStyle/>
+          <a:p>
+            <a:pPr>
+              <a:lnSpc>
+                <a:spcPct val="100000"/>
+              </a:lnSpc>
+            </a:pPr>
+            <a:r>
+              <a:rPr sz="1700" b="0" i="0">
+                <a:solidFill>
+                  <a:srgbClr val="2A2929"/>
+                </a:solidFill>
+                <a:latin typeface="Roboto"/>
+              </a:rPr>
+              <a:t>One job, its own data, a narrow contract.</a:t>
+            </a:r>
+          </a:p>
+        </p:txBody>
+      </p:sp>
+      <p:sp>
+        <p:nvSpPr>
+          <p:cNvPr id="7" name="Rectangle 6"/>
+          <p:cNvSpPr/>
+          <p:nvPr/>
+        </p:nvSpPr>
+        <p:spPr>
+          <a:xfrm>
+            <a:off x="640080" y="2916936"/>
+            <a:ext cx="10927080" cy="841248"/>
+          </a:xfrm>
+          <a:prstGeom prst="rect">
+            <a:avLst/>
+          </a:prstGeom>
+          <a:solidFill>
+            <a:srgbClr val="FFFFFF"/>
+          </a:solidFill>
+          <a:ln w="12700">
+            <a:solidFill>
+              <a:srgbClr val="CCCCCC"/>
+            </a:solidFill>
+          </a:ln>
+          <a:effectLst/>
+        </p:spPr>
+        <p:style>
+          <a:lnRef idx="1">
+            <a:schemeClr val="accent1"/>
+          </a:lnRef>
+          <a:fillRef idx="3">
+            <a:schemeClr val="accent1"/>
+          </a:fillRef>
+          <a:effectRef idx="2">
+            <a:schemeClr val="accent1"/>
+          </a:effectRef>
+          <a:fontRef idx="minor">
+            <a:schemeClr val="lt1"/>
+          </a:fontRef>
+        </p:style>
+        <p:txBody>
+          <a:bodyPr rtlCol="0" anchor="ctr"/>
+          <a:lstStyle/>
+          <a:p>
+            <a:pPr algn="ctr"/>
+          </a:p>
+        </p:txBody>
+      </p:sp>
+      <p:sp>
+        <p:nvSpPr>
+          <p:cNvPr id="8" name="Rectangle 7"/>
+          <p:cNvSpPr/>
+          <p:nvPr/>
+        </p:nvSpPr>
+        <p:spPr>
+          <a:xfrm>
+            <a:off x="640080" y="2916936"/>
+            <a:ext cx="109728" cy="841248"/>
+          </a:xfrm>
+          <a:prstGeom prst="rect">
+            <a:avLst/>
+          </a:prstGeom>
+          <a:solidFill>
+            <a:srgbClr val="92268F"/>
+          </a:solidFill>
+          <a:ln>
+            <a:noFill/>
+          </a:ln>
+          <a:effectLst/>
+        </p:spPr>
+        <p:style>
+          <a:lnRef idx="1">
+            <a:schemeClr val="accent1"/>
+          </a:lnRef>
+          <a:fillRef idx="3">
+            <a:schemeClr val="accent1"/>
+          </a:fillRef>
+          <a:effectRef idx="2">
+            <a:schemeClr val="accent1"/>
+          </a:effectRef>
+          <a:fontRef idx="minor">
+            <a:schemeClr val="lt1"/>
+          </a:fontRef>
+        </p:style>
+        <p:txBody>
+          <a:bodyPr rtlCol="0" anchor="ctr"/>
+          <a:lstStyle/>
+          <a:p>
+            <a:pPr algn="ctr"/>
+          </a:p>
+        </p:txBody>
+      </p:sp>
+      <p:sp>
+        <p:nvSpPr>
+          <p:cNvPr id="9" name="TextBox 8"/>
+          <p:cNvSpPr txBox="1"/>
+          <p:nvPr/>
+        </p:nvSpPr>
+        <p:spPr>
+          <a:xfrm>
+            <a:off x="960120" y="2916936"/>
+            <a:ext cx="10424160" cy="841248"/>
+          </a:xfrm>
+          <a:prstGeom prst="rect">
+            <a:avLst/>
+          </a:prstGeom>
+          <a:noFill/>
+        </p:spPr>
+        <p:txBody>
+          <a:bodyPr wrap="square" anchor="ctr" lIns="0" rIns="0" tIns="0" bIns="0">
+            <a:spAutoFit/>
+          </a:bodyPr>
+          <a:lstStyle/>
+          <a:p>
+            <a:pPr>
+              <a:lnSpc>
+                <a:spcPct val="100000"/>
+              </a:lnSpc>
+            </a:pPr>
+            <a:r>
+              <a:rPr sz="1700" b="0" i="0">
+                <a:solidFill>
+                  <a:srgbClr val="2A2929"/>
+                </a:solidFill>
+                <a:latin typeface="Roboto"/>
+              </a:rPr>
+              <a:t>Append-only: written once, read at scale.</a:t>
+            </a:r>
+          </a:p>
+        </p:txBody>
+      </p:sp>
+      <p:sp>
+        <p:nvSpPr>
+          <p:cNvPr id="10" name="Rectangle 9"/>
+          <p:cNvSpPr/>
+          <p:nvPr/>
+        </p:nvSpPr>
+        <p:spPr>
+          <a:xfrm>
+            <a:off x="640080" y="3867912"/>
+            <a:ext cx="10927080" cy="841248"/>
+          </a:xfrm>
+          <a:prstGeom prst="rect">
+            <a:avLst/>
+          </a:prstGeom>
+          <a:solidFill>
+            <a:srgbClr val="FFFFFF"/>
+          </a:solidFill>
+          <a:ln w="12700">
+            <a:solidFill>
+              <a:srgbClr val="CCCCCC"/>
+            </a:solidFill>
+          </a:ln>
+          <a:effectLst/>
+        </p:spPr>
+        <p:style>
+          <a:lnRef idx="1">
+            <a:schemeClr val="accent1"/>
+          </a:lnRef>
+          <a:fillRef idx="3">
+            <a:schemeClr val="accent1"/>
+          </a:fillRef>
+          <a:effectRef idx="2">
+            <a:schemeClr val="accent1"/>
+          </a:effectRef>
+          <a:fontRef idx="minor">
+            <a:schemeClr val="lt1"/>
+          </a:fontRef>
+        </p:style>
+        <p:txBody>
+          <a:bodyPr rtlCol="0" anchor="ctr"/>
+          <a:lstStyle/>
+          <a:p>
+            <a:pPr algn="ctr"/>
+          </a:p>
+        </p:txBody>
+      </p:sp>
+      <p:sp>
+        <p:nvSpPr>
+          <p:cNvPr id="11" name="Rectangle 10"/>
+          <p:cNvSpPr/>
+          <p:nvPr/>
+        </p:nvSpPr>
+        <p:spPr>
+          <a:xfrm>
+            <a:off x="640080" y="3867912"/>
+            <a:ext cx="109728" cy="841248"/>
+          </a:xfrm>
+          <a:prstGeom prst="rect">
+            <a:avLst/>
+          </a:prstGeom>
+          <a:solidFill>
+            <a:srgbClr val="92268F"/>
+          </a:solidFill>
+          <a:ln>
+            <a:noFill/>
+          </a:ln>
+          <a:effectLst/>
+        </p:spPr>
+        <p:style>
+          <a:lnRef idx="1">
+            <a:schemeClr val="accent1"/>
+          </a:lnRef>
+          <a:fillRef idx="3">
+            <a:schemeClr val="accent1"/>
+          </a:fillRef>
+          <a:effectRef idx="2">
+            <a:schemeClr val="accent1"/>
+          </a:effectRef>
+          <a:fontRef idx="minor">
+            <a:schemeClr val="lt1"/>
+          </a:fontRef>
+        </p:style>
+        <p:txBody>
+          <a:bodyPr rtlCol="0" anchor="ctr"/>
+          <a:lstStyle/>
+          <a:p>
+            <a:pPr algn="ctr"/>
+          </a:p>
+        </p:txBody>
+      </p:sp>
+      <p:sp>
+        <p:nvSpPr>
+          <p:cNvPr id="12" name="TextBox 11"/>
+          <p:cNvSpPr txBox="1"/>
+          <p:nvPr/>
+        </p:nvSpPr>
+        <p:spPr>
+          <a:xfrm>
+            <a:off x="960120" y="3867912"/>
+            <a:ext cx="10424160" cy="841248"/>
+          </a:xfrm>
+          <a:prstGeom prst="rect">
+            <a:avLst/>
+          </a:prstGeom>
+          <a:noFill/>
+        </p:spPr>
+        <p:txBody>
+          <a:bodyPr wrap="square" anchor="ctr" lIns="0" rIns="0" tIns="0" bIns="0">
+            <a:spAutoFit/>
+          </a:bodyPr>
+          <a:lstStyle/>
+          <a:p>
+            <a:pPr>
+              <a:lnSpc>
+                <a:spcPct val="100000"/>
+              </a:lnSpc>
+            </a:pPr>
+            <a:r>
+              <a:rPr sz="1700" b="0" i="0">
+                <a:solidFill>
+                  <a:srgbClr val="2A2929"/>
+                </a:solidFill>
+                <a:latin typeface="Roboto"/>
+              </a:rPr>
+              <a:t>Every transaction traces to a business need.</a:t>
+            </a:r>
+          </a:p>
+        </p:txBody>
+      </p:sp>
+      <p:sp>
+        <p:nvSpPr>
+          <p:cNvPr id="13" name="Rectangle 12"/>
+          <p:cNvSpPr/>
+          <p:nvPr/>
+        </p:nvSpPr>
+        <p:spPr>
+          <a:xfrm>
+            <a:off x="0" y="6565392"/>
+            <a:ext cx="12191695" cy="38100"/>
+          </a:xfrm>
+          <a:prstGeom prst="rect">
+            <a:avLst/>
+          </a:prstGeom>
+          <a:solidFill>
+            <a:srgbClr val="92268F"/>
+          </a:solidFill>
+          <a:ln>
+            <a:noFill/>
+          </a:ln>
+          <a:effectLst/>
+        </p:spPr>
+        <p:style>
+          <a:lnRef idx="1">
+            <a:schemeClr val="accent1"/>
+          </a:lnRef>
+          <a:fillRef idx="3">
+            <a:schemeClr val="accent1"/>
+          </a:fillRef>
+          <a:effectRef idx="2">
+            <a:schemeClr val="accent1"/>
+          </a:effectRef>
+          <a:fontRef idx="minor">
+            <a:schemeClr val="lt1"/>
+          </a:fontRef>
+        </p:style>
+        <p:txBody>
+          <a:bodyPr rtlCol="0" anchor="ctr"/>
+          <a:lstStyle/>
+          <a:p>
+            <a:pPr algn="ctr"/>
+          </a:p>
+        </p:txBody>
+      </p:sp>
+      <p:sp>
+        <p:nvSpPr>
+          <p:cNvPr id="14" name="TextBox 13"/>
+          <p:cNvSpPr txBox="1"/>
+          <p:nvPr/>
+        </p:nvSpPr>
+        <p:spPr>
+          <a:xfrm>
             <a:off x="502920" y="6400800"/>
             <a:ext cx="5486400" cy="320040"/>
           </a:xfrm>
@@ -10817,7 +13804,7 @@
       </p:sp>
       <p:sp>
         <p:nvSpPr>
-          <p:cNvPr id="7" name="TextBox 6"/>
+          <p:cNvPr id="15" name="TextBox 14"/>
           <p:cNvSpPr txBox="1"/>
           <p:nvPr/>
         </p:nvSpPr>
@@ -10845,7 +13832,7 @@
                 </a:solidFill>
                 <a:latin typeface="Roboto"/>
               </a:rPr>
-              <a:t/>
+              <a:t>6</a:t>
             </a:r>
           </a:p>
         </p:txBody>
@@ -10878,48 +13865,14 @@
       <p:grpSpPr/>
       <p:sp>
         <p:nvSpPr>
-          <p:cNvPr id="2" name="TextBox 1"/>
-          <p:cNvSpPr txBox="1"/>
-          <p:nvPr/>
-        </p:nvSpPr>
-        <p:spPr>
-          <a:xfrm>
-            <a:off x="640080" y="457200"/>
-            <a:ext cx="10881360" cy="960120"/>
-          </a:xfrm>
-          <a:prstGeom prst="rect">
-            <a:avLst/>
-          </a:prstGeom>
-          <a:noFill/>
-        </p:spPr>
-        <p:txBody>
-          <a:bodyPr wrap="square" anchor="t" lIns="0" rIns="0" tIns="0" bIns="0">
-            <a:spAutoFit/>
-          </a:bodyPr>
-          <a:lstStyle/>
-          <a:p>
-            <a:r>
-              <a:rPr sz="2800" b="1" i="0">
-                <a:solidFill>
-                  <a:srgbClr val="2A2929"/>
-                </a:solidFill>
-                <a:latin typeface="Roboto"/>
-              </a:rPr>
-              <a:t>The serverless building blocks</a:t>
-            </a:r>
-          </a:p>
-        </p:txBody>
-      </p:sp>
-      <p:sp>
-        <p:nvSpPr>
-          <p:cNvPr id="3" name="Rectangle 2"/>
+          <p:cNvPr id="2" name="Rectangle 1"/>
           <p:cNvSpPr/>
           <p:nvPr/>
         </p:nvSpPr>
         <p:spPr>
           <a:xfrm>
-            <a:off x="658368" y="1371600"/>
-            <a:ext cx="1463040" cy="50800"/>
+            <a:off x="0" y="0"/>
+            <a:ext cx="3931920" cy="6858000"/>
           </a:xfrm>
           <a:prstGeom prst="rect">
             <a:avLst/>
@@ -10956,14 +13909,48 @@
       </p:sp>
       <p:sp>
         <p:nvSpPr>
+          <p:cNvPr id="3" name="TextBox 2"/>
+          <p:cNvSpPr txBox="1"/>
+          <p:nvPr/>
+        </p:nvSpPr>
+        <p:spPr>
+          <a:xfrm>
+            <a:off x="365760" y="2103120"/>
+            <a:ext cx="3291840" cy="2194560"/>
+          </a:xfrm>
+          <a:prstGeom prst="rect">
+            <a:avLst/>
+          </a:prstGeom>
+          <a:noFill/>
+        </p:spPr>
+        <p:txBody>
+          <a:bodyPr wrap="square" anchor="t" lIns="0" rIns="0" tIns="0" bIns="0">
+            <a:spAutoFit/>
+          </a:bodyPr>
+          <a:lstStyle/>
+          <a:p>
+            <a:r>
+              <a:rPr sz="13000" b="1" i="0">
+                <a:solidFill>
+                  <a:srgbClr val="FFFFFF"/>
+                </a:solidFill>
+                <a:latin typeface="Roboto"/>
+              </a:rPr>
+              <a:t>02</a:t>
+            </a:r>
+          </a:p>
+        </p:txBody>
+      </p:sp>
+      <p:sp>
+        <p:nvSpPr>
           <p:cNvPr id="4" name="TextBox 3"/>
           <p:cNvSpPr txBox="1"/>
           <p:nvPr/>
         </p:nvSpPr>
         <p:spPr>
           <a:xfrm>
-            <a:off x="658368" y="1691640"/>
-            <a:ext cx="10881360" cy="4480560"/>
+            <a:off x="4480560" y="2468880"/>
+            <a:ext cx="7132320" cy="2194560"/>
           </a:xfrm>
           <a:prstGeom prst="rect">
             <a:avLst/>
@@ -10971,132 +13958,51 @@
           <a:noFill/>
         </p:spPr>
         <p:txBody>
-          <a:bodyPr wrap="square" anchor="ctr" lIns="0" rIns="0" tIns="0" bIns="0">
+          <a:bodyPr wrap="square" anchor="t" lIns="0" rIns="0" tIns="0" bIns="0">
             <a:spAutoFit/>
           </a:bodyPr>
           <a:lstStyle/>
           <a:p>
-            <a:pPr marL="0" indent="0">
-              <a:lnSpc>
-                <a:spcPct val="105000"/>
-              </a:lnSpc>
+            <a:r>
+              <a:rPr sz="1600" b="1" i="0">
+                <a:solidFill>
+                  <a:srgbClr val="27B5CE"/>
+                </a:solidFill>
+                <a:latin typeface="Roboto"/>
+              </a:rPr>
+              <a:t>SECTION</a:t>
+            </a:r>
+          </a:p>
+          <a:p>
+            <a:pPr>
               <a:spcBef>
-                <a:spcPts val="0"/>
+                <a:spcPts val="600"/>
               </a:spcBef>
-              <a:spcAft>
+            </a:pPr>
+            <a:r>
+              <a:rPr sz="3800" b="1" i="0">
+                <a:solidFill>
+                  <a:srgbClr val="2A2929"/>
+                </a:solidFill>
+                <a:latin typeface="Roboto"/>
+              </a:rPr>
+              <a:t>The supporting services</a:t>
+            </a:r>
+          </a:p>
+          <a:p>
+            <a:pPr>
+              <a:spcBef>
                 <a:spcPts val="1000"/>
-              </a:spcAft>
+              </a:spcBef>
             </a:pPr>
             <a:r>
-              <a:rPr sz="2400" b="1" i="0">
-                <a:solidFill>
-                  <a:srgbClr val="EDAB0C"/>
-                </a:solidFill>
-                <a:latin typeface="Roboto"/>
-              </a:rPr>
-              <a:t>■  </a:t>
-            </a:r>
-            <a:r>
-              <a:rPr sz="2400" b="0" i="0">
-                <a:solidFill>
-                  <a:srgbClr val="2A2929"/>
-                </a:solidFill>
-                <a:latin typeface="Roboto"/>
-              </a:rPr>
-              <a:t>Compute: a function service runs your code on demand, no servers to manage (e.g. AWS Lambda).</a:t>
-            </a:r>
-          </a:p>
-          <a:p>
-            <a:pPr marL="0" indent="0">
-              <a:lnSpc>
-                <a:spcPct val="105000"/>
-              </a:lnSpc>
-              <a:spcBef>
-                <a:spcPts val="0"/>
-              </a:spcBef>
-              <a:spcAft>
-                <a:spcPts val="1000"/>
-              </a:spcAft>
-            </a:pPr>
-            <a:r>
-              <a:rPr sz="2400" b="1" i="0">
-                <a:solidFill>
-                  <a:srgbClr val="EDAB0C"/>
-                </a:solidFill>
-                <a:latin typeface="Roboto"/>
-              </a:rPr>
-              <a:t>■  </a:t>
-            </a:r>
-            <a:r>
-              <a:rPr sz="2400" b="0" i="0">
-                <a:solidFill>
-                  <a:srgbClr val="2A2929"/>
-                </a:solidFill>
-                <a:latin typeface="Roboto"/>
-              </a:rPr>
-              <a:t>Front door: an API gateway receives requests and routes them to the function.</a:t>
-            </a:r>
-          </a:p>
-          <a:p>
-            <a:pPr marL="0" indent="0">
-              <a:lnSpc>
-                <a:spcPct val="105000"/>
-              </a:lnSpc>
-              <a:spcBef>
-                <a:spcPts val="0"/>
-              </a:spcBef>
-              <a:spcAft>
-                <a:spcPts val="1000"/>
-              </a:spcAft>
-            </a:pPr>
-            <a:r>
-              <a:rPr sz="2400" b="1" i="0">
-                <a:solidFill>
-                  <a:srgbClr val="EDAB0C"/>
-                </a:solidFill>
-                <a:latin typeface="Roboto"/>
-              </a:rPr>
-              <a:t>■  </a:t>
-            </a:r>
-            <a:r>
-              <a:rPr sz="2400" b="0" i="0">
-                <a:solidFill>
-                  <a:srgbClr val="2A2929"/>
-                </a:solidFill>
-                <a:latin typeface="Roboto"/>
-              </a:rPr>
-              <a:t>Messaging / queuing: a queue or topic buffers events and decouples producer from consumer.</a:t>
-            </a:r>
-          </a:p>
-          <a:p>
-            <a:pPr marL="0" indent="0">
-              <a:lnSpc>
-                <a:spcPct val="105000"/>
-              </a:lnSpc>
-              <a:spcBef>
-                <a:spcPts val="0"/>
-              </a:spcBef>
-              <a:spcAft>
-                <a:spcPts val="1000"/>
-              </a:spcAft>
-            </a:pPr>
-            <a:r>
-              <a:rPr sz="2400" b="1" i="0">
-                <a:solidFill>
-                  <a:srgbClr val="EDAB0C"/>
-                </a:solidFill>
-                <a:latin typeface="Roboto"/>
-              </a:rPr>
-              <a:t>■  </a:t>
-            </a:r>
-            <a:r>
-              <a:rPr sz="2400" b="0" i="0">
-                <a:solidFill>
-                  <a:srgbClr val="2A2929"/>
-                </a:solidFill>
-                <a:latin typeface="Roboto"/>
-              </a:rPr>
-              <a:t>Persistence: a managed datastore keeps the data without you running a database server.</a:t>
+              <a:rPr sz="2000" b="0" i="1">
+                <a:solidFill>
+                  <a:srgbClr val="484848"/>
+                </a:solidFill>
+                <a:latin typeface="Roboto Light"/>
+              </a:rPr>
+              <a:t>pick the serverless building blocks</a:t>
             </a:r>
           </a:p>
         </p:txBody>
@@ -11218,7 +14124,7 @@
                 </a:solidFill>
                 <a:latin typeface="Roboto"/>
               </a:rPr>
-              <a:t>6</a:t>
+              <a:t/>
             </a:r>
           </a:p>
         </p:txBody>
